--- a/agent-observability-course/10-graphics/slides/section-12.pptx
+++ b/agent-observability-course/10-graphics/slides/section-12.pptx
@@ -37,6 +37,13 @@
     <p:sldId id="285" r:id="rId37"/>
     <p:sldId id="286" r:id="rId38"/>
     <p:sldId id="287" r:id="rId39"/>
+    <p:sldId id="288" r:id="rId40"/>
+    <p:sldId id="289" r:id="rId41"/>
+    <p:sldId id="290" r:id="rId42"/>
+    <p:sldId id="291" r:id="rId43"/>
+    <p:sldId id="292" r:id="rId44"/>
+    <p:sldId id="293" r:id="rId45"/>
+    <p:sldId id="294" r:id="rId46"/>
   </p:sldIdLst>
   <p:sldSz cx="12191695" cy="6858000" type="screen4x3"/>
   <p:notesSz cx="6858000" cy="9144000"/>
@@ -603,7 +610,19 @@
           <a:lstStyle/>
           <a:p>
             <a:r>
-              <a:t>Title card (K2). Arize Phoenix and OpenInference.</a:t>
+              <a:t>Four differences that touch code. Types: no `agent` or `guardrail`, so your type-based filters change. Scores become feedback, one function. Sessions become metadata, one mapping. And prompts. LangSmith has a prompt hub with commits and tags; Langfuse has versions and labels. Same idea, different API, so your `get_prompt_text` wrapper and the promotion gate from Incident 3 get reimplemented.</a:t>
+            </a:r>
+          </a:p>
+          <a:p/>
+          <a:p>
+            <a:r>
+              <a:t>Two more differences that don't touch code but touch your wallet and your data. LangSmith is a hosted service with a self-host option on enterprise plans; Langfuse self-hosts on the free tier, which is Section 13. And LangSmith is not OTel-native in the way Langfuse 4 is. It accepts OTLP and can emit OTel, but its primary path is its own run format. Verify both against the current pricing and docs pages before you decide anything.</a:t>
+            </a:r>
+          </a:p>
+          <a:p/>
+          <a:p>
+            <a:r>
+              <a:t>Total code to trace Atlas to LangSmith: one module of about sixty lines that already ships, two decorators in `agent.py`, and one optional field on two request models. Everything in `src/northwind` didn't notice. That's what Lecture 12.1 promised.</a:t>
             </a:r>
           </a:p>
         </p:txBody>
@@ -673,37 +692,7 @@
           <a:lstStyle/>
           <a:p>
             <a:r>
-              <a:t>Two conventions. The OTel GenAI semantic conventions, which `genai_attrs.py` sets on every span, Lecture 3.4. And OpenInference, which the `OpenAIInstrumentor` from Lecture 3.5 emits automatically on the spans it creates. OpenInference is Arize's convention, older than the OTel one, and it's what Phoenix's UI reads to render token counts, prompts and retrieval documents.</a:t>
-            </a:r>
-          </a:p>
-          <a:p/>
-          <a:p>
-            <a:r>
-              <a:t>Why both? Because the OTel GenAI conventions are still incubating. Names may change. OpenInference is stable and Phoenix understands it today. Langfuse reads both. So Atlas emits both, and the cost is a few extra attributes per span. When the GenAI conventions stabilise and every backend reads them, you drop OpenInference. Not before.</a:t>
-            </a:r>
-          </a:p>
-          <a:p/>
-          <a:p>
-            <a:r>
-              <a:t>[CODE: this lecture's addition to `telemetry/genai_attrs.py::set_llm_usage`]</a:t>
-            </a:r>
-          </a:p>
-          <a:p/>
-          <a:p>
-            <a:r>
-              <a:t>Four lines, added to `set_llm_usage`. This is why the manual generation spans render properly in Phoenix. Auto-instrumented spans from `OpenAIInstrumentor` already carry OpenInference; this covers the spans Atlas creates itself, like the mock LLM in offline mode and Router mode.</a:t>
-            </a:r>
-          </a:p>
-          <a:p/>
-          <a:p>
-            <a:r>
-              <a:t>[SCREEN: Phoenix, project view. Token counts and latency per trace. Click into the evals tab briefly.]</a:t>
-            </a:r>
-          </a:p>
-          <a:p/>
-          <a:p>
-            <a:r>
-              <a:t>Phoenix gives you token counts, latency, a session view keyed on `session.id`, which Atlas already sets, and its own evals and datasets, which overlap with Langfuse's. Same non-portable layer, different vendor.</a:t>
+              <a:t>Title card (K2). Arize Phoenix and OpenInference.</a:t>
             </a:r>
           </a:p>
         </p:txBody>
@@ -773,13 +762,37 @@
           <a:lstStyle/>
           <a:p>
             <a:r>
-              <a:t>When does Phoenix fit? When you want local first: one container, no account, works on a plane. When you're doing heavy RAG debugging, because retrieval documents render beautifully. And as a second backend during development, fed by the Collector, while Langfuse stays the system of record for prompts and scores. Verify its current prompt and score features before you make it your only backend; they've been growing fast.</a:t>
+              <a:t>Two conventions. The OTel GenAI semantic conventions, which `genai_attrs.py` sets on every span, Lecture 3.4. And OpenInference, which the `OpenAIInstrumentor` from Lecture 3.5 emits automatically on the spans it creates. OpenInference is Arize's convention, older than the OTel one, and it's what Phoenix's UI reads to render token counts, prompts and retrieval documents.</a:t>
             </a:r>
           </a:p>
           <a:p/>
           <a:p>
             <a:r>
-              <a:t>Add up what you changed today: two environment variables and four attribute lines. That's the escape hatch working. Next, the tools you'll meet when your company already has an APM.</a:t>
+              <a:t>Why both? Because the OTel GenAI conventions are still incubating. Names may change. OpenInference is stable and Phoenix understands it today. Langfuse reads both. So Atlas emits both, and the cost is a few extra attributes per span. When the GenAI conventions stabilise and every backend reads them, you drop OpenInference. Not before.</a:t>
+            </a:r>
+          </a:p>
+          <a:p/>
+          <a:p>
+            <a:r>
+              <a:t>[CODE: an optional addition to `telemetry/genai_attrs.py::set_llm_usage` (not in the repo)]</a:t>
+            </a:r>
+          </a:p>
+          <a:p/>
+          <a:p>
+            <a:r>
+              <a:t>This is not in the repo; it's an optional four lines you can add to `set_llm_usage`. Auto-instrumented spans from `OpenAIInstrumentor` already carry OpenInference. Atlas's own generation spans, including every offline mock call, carry only the GenAI attributes. If your Phoenix version doesn't show token counts for them, these four lines fix it. Add a unit test that asserts both names, so the mirror never drifts.</a:t>
+            </a:r>
+          </a:p>
+          <a:p/>
+          <a:p>
+            <a:r>
+              <a:t>[SCREEN: Phoenix, project view. Token counts and latency per trace. Click into the evals tab briefly.]</a:t>
+            </a:r>
+          </a:p>
+          <a:p/>
+          <a:p>
+            <a:r>
+              <a:t>Phoenix gives you token counts, latency, a session view keyed on `session.id`, which Atlas already sets, and its own evals and datasets, which overlap with Langfuse's. Same non-portable layer, different vendor.</a:t>
             </a:r>
           </a:p>
         </p:txBody>
@@ -849,7 +862,13 @@
           <a:lstStyle/>
           <a:p>
             <a:r>
-              <a:t>Title card (K2). OpenLLMetry, Datadog and the enterprise APMs.</a:t>
+              <a:t>When does Phoenix fit? When you want local first: one container, no account, works on a plane. When you're doing heavy RAG debugging, because retrieval documents render beautifully. And as a second backend during development, fed by the Collector, while Langfuse stays the system of record for prompts and scores. Verify its current prompt and score features before you make it your only backend; they've been growing fast.</a:t>
+            </a:r>
+          </a:p>
+          <a:p/>
+          <a:p>
+            <a:r>
+              <a:t>Add up what you changed today: two environment variables, plus four optional attribute lines. That's the escape hatch working. Next, the tools you'll meet when your company already has an APM.</a:t>
             </a:r>
           </a:p>
         </p:txBody>
@@ -919,13 +938,7 @@
           <a:lstStyle/>
           <a:p>
             <a:r>
-              <a:t>Two families you haven't met. First, OpenLLMetry. It's an open-source instrumentation SDK from Traceloop. You call one init function and it patches OpenAI, Anthropic, popular vector stores and frameworks to emit OpenTelemetry spans with GenAI attributes. It's the auto-instrumentation layer, like OpenInference, but with a different set of integrations. Where the spans go is up to you: any OTLP backend, or Traceloop's own hosted product.</a:t>
-            </a:r>
-          </a:p>
-          <a:p/>
-          <a:p>
-            <a:r>
-              <a:t>Second, the APM add-ons. Every major APM now has an LLM observability product. Datadog LLM Observability, New Relic AI Monitoring, Dynatrace, Grafana Cloud's offering, Splunk. Their pitch is the sentence you just heard: one vendor, one bill, one login, the LLM traces next to the database traces.</a:t>
+              <a:t>Title card (K2). OpenLLMetry, Datadog and the enterprise APMs.</a:t>
             </a:r>
           </a:p>
         </p:txBody>
@@ -995,7 +1008,13 @@
           <a:lstStyle/>
           <a:p>
             <a:r>
-              <a:t>Give the APMs their due. Correlation is real: when Atlas is slow, seeing the LLM span, the ticketing API call and the host CPU on one screen is exactly what Incident 2 needed. Paging is already there, with the rotation and escalation policies your company has argued about for years. Security has already approved the retention and access model. And finance already reads cost per service from it.</a:t>
+              <a:t>Two families you haven't met. First, OpenLLMetry. It's an open-source instrumentation SDK from Traceloop. You call one init function and it patches OpenAI, Anthropic, popular vector stores and frameworks to emit OpenTelemetry spans with GenAI attributes. It's the auto-instrumentation layer, like OpenInference, but with a different set of integrations. Where the spans go is up to you: any OTLP backend, or Traceloop's own hosted product.</a:t>
+            </a:r>
+          </a:p>
+          <a:p/>
+          <a:p>
+            <a:r>
+              <a:t>Second, the APM add-ons. Every major APM now has an LLM observability product. Datadog LLM Observability, New Relic AI Monitoring, Dynatrace, Grafana Cloud's offering, Splunk. Their pitch is the sentence you just heard: one vendor, one bill, one login, the LLM traces next to the database traces.</a:t>
             </a:r>
           </a:p>
         </p:txBody>
@@ -1065,13 +1084,7 @@
           <a:lstStyle/>
           <a:p>
             <a:r>
-              <a:t>What you lose or pay for. Prompt management with labels, the thing Incident 3 turned on, is usually missing or thin. Scores and datasets exist in some, but the eval loop from Section 8 is where LLM-native tools are years ahead. Verify feature by feature; this moves monthly.</a:t>
-            </a:r>
-          </a:p>
-          <a:p/>
-          <a:p>
-            <a:r>
-              <a:t>And the cost model. APMs price per span, per ingested gigabyte or per host. Agent traces are big. A single Atlas step carries the full prompt, the retrieved chunks and the tool result. Ten kilobytes a step is normal. At company scale, keeping a hundred percent of LLM spans in an APM can cost more than the LLM calls they describe. So the first conversation with the APM team is about sampling, and you already know the answer from Lecture 4.6: head sample by session, tail sample errors and slow traces at a hundred percent.</a:t>
+              <a:t>Give the APMs their due. Correlation is real: when Atlas is slow, seeing the LLM span, the ticketing API call and the host CPU on one screen is exactly what Incident 2 needed. Paging is already there, with the rotation and escalation policies your company has argued about for years. Security has already approved the retention and access model. And finance already reads cost per service from it.</a:t>
             </a:r>
           </a:p>
         </p:txBody>
@@ -1141,7 +1154,19 @@
           <a:lstStyle/>
           <a:p>
             <a:r>
-              <a:t>OpenLLMetry in one line: `Traceloop.init` with an app name, and it emits spans to whatever OTLP endpoint your environment names. Verify the exact call against the current docs; it's shown here for shape. One warning from Lecture 3.6: it overlaps with OpenInference for the OpenAI client. Run both and you double-count every generation. Pick one auto-instrumentor.</a:t>
+              <a:t>What you lose or pay for. Prompt management with labels, the thing Incident 3 turned on, is usually missing or thin. Scores and datasets exist in some, but the eval loop from Section 8 is where LLM-native tools are years ahead. Verify feature by feature; this moves monthly.</a:t>
+            </a:r>
+          </a:p>
+          <a:p/>
+          <a:p>
+            <a:r>
+              <a:t>[B-ROLL: An APM invoice line item, "LLM spans ingested: 2.1 billion", next to the LLM provider's bill for the same month; the observabili...]</a:t>
+            </a:r>
+          </a:p>
+          <a:p/>
+          <a:p>
+            <a:r>
+              <a:t>And the cost model. APMs price per span, per ingested gigabyte or per host. Agent traces are big. A single Atlas step carries the full prompt, the retrieved chunks and the tool result. How big depends on whether you capture prompt and result text. At company scale, keeping a hundred percent of LLM spans in an APM can cost more than the LLM calls they describe. So the first conversation with the APM team is about sampling, and you already know the answer from Lecture 4.6: head sample by session, tail sample errors and slow traces at a hundred percent.</a:t>
             </a:r>
           </a:p>
         </p:txBody>
@@ -1211,13 +1236,7 @@
           <a:lstStyle/>
           <a:p>
             <a:r>
-              <a:t>Which brings us to the pattern that answers the original question. A hybrid. Atlas emits once, to the Collector. The Collector sends sampled spans and metrics to the APM, where paging and correlation live. And it sends full LLM spans to Langfuse or Phoenix, where prompts, scores and datasets live. Masking happens once, in the Collector. Sampling can differ per destination: ten percent to the APM to control the bill, a hundred percent of errors and slow traces to both.</a:t>
-            </a:r>
-          </a:p>
-          <a:p/>
-          <a:p>
-            <a:r>
-              <a:t>One instrumentation, two audiences. The platform team gets their single pane. You get your eval loop. Nobody instruments twice.</a:t>
+              <a:t>OpenLLMetry in one line: `Traceloop.init` with an app name, and it emits spans to whatever OTLP endpoint your environment names. Verify the exact call against the current docs; it's shown here for shape. One warning from Lecture 3.6: it overlaps with OpenInference for the OpenAI client. Run both and you double-count every generation. Pick one auto-instrumentor.</a:t>
             </a:r>
           </a:p>
         </p:txBody>
@@ -1287,13 +1306,19 @@
           <a:lstStyle/>
           <a:p>
             <a:r>
-              <a:t>How to have the conversation. Ask for the price per span or per gigabyte and the retention default. Bring your own numbers: span size and daily span count are one query in the Ops Console. Propose the hybrid, with the Collector config you'll build in Lecture 13.2 as the concrete artefact. And agree on the split: latency, errors and cost page from the APM; quality and prompt investigations happen in the LLM tool.</a:t>
+              <a:t>[SCREEN: `deploy/otel-collector.yaml`, the `service.pipelines.traces` block: `exporters: [otlphttp/langfuse, otlphttp/phoenix, debug, spa...]</a:t>
             </a:r>
           </a:p>
           <a:p/>
           <a:p>
             <a:r>
-              <a:t>You now know every family of backend: LLM-native, open-source local-first, instrumentation SDKs and APM add-ons. Next, a five-minute decision matrix, so you can choose one in a meeting and defend it.</a:t>
+              <a:t>Which brings us to the pattern that answers the original question. A hybrid. The Collector config in the repo already exports every trace to two backends, Langfuse and Phoenix. Swap one of them for your APM's OTLP endpoint and you have it. Atlas emits once, to the Collector. The Collector sends sampled spans and metrics to the APM, where paging and correlation live. And it sends full LLM spans to Langfuse or Phoenix, where prompts, scores and datasets live. Masking happens once, in the Collector. Sampling can differ per destination: ten percent to the APM to control the bill, a hundred percent of errors and slow traces to both.</a:t>
+            </a:r>
+          </a:p>
+          <a:p/>
+          <a:p>
+            <a:r>
+              <a:t>One instrumentation, two audiences. The platform team gets their single pane. You get your eval loop. Nobody instruments twice.</a:t>
             </a:r>
           </a:p>
         </p:txBody>
@@ -1445,7 +1470,19 @@
           <a:lstStyle/>
           <a:p>
             <a:r>
-              <a:t>Title card (K2). Decision matrix: choosing your backend.</a:t>
+              <a:t>[SCREEN: Terminal: `OFFLINE=1 make replay` ends with `Store: .atlas/spans.sqlite (total spans now 70560)`. Then `python -c "import sqlite...]</a:t>
+            </a:r>
+          </a:p>
+          <a:p/>
+          <a:p>
+            <a:r>
+              <a:t>How to have the conversation. Ask for the price per span or per gigabyte and the retention default. Bring your own numbers. Atlas's replayed day is seventy thousand five hundred and sixty spans, averaging about six hundred bytes of attributes each in the local store: roughly forty megabytes a day before any prompt text. That's the number the APM team prices. Propose the hybrid, with the Collector config you'll build in Lecture 13.2 as the concrete artefact. And agree on the split: latency, errors and cost page from the APM; quality and prompt investigations happen in the LLM tool.</a:t>
+            </a:r>
+          </a:p>
+          <a:p/>
+          <a:p>
+            <a:r>
+              <a:t>You now know every family of backend: LLM-native, open-source local-first, instrumentation SDKs and APM add-ons. Next, a five-minute decision matrix, so you can choose one in a meeting and defend it.</a:t>
             </a:r>
           </a:p>
         </p:txBody>
@@ -1515,7 +1552,7 @@
           <a:lstStyle/>
           <a:p>
             <a:r>
-              <a:t>Five criteria. Control: can you self-host, and who owns the data? Cost: what's the pricing unit, and what does it cost to keep everything? Compliance: residency, retention, masking before the data leaves your network, and an audit trail for changes like prompt labels. Features: the list, but weighted by what you actually use from Sections 4 through 9. And lock-in: does it accept OTLP, can you export, and how many files change if you leave? For Atlas, you know that last number: four.</a:t>
+              <a:t>Title card (K2). Decision matrix: choosing your backend.</a:t>
             </a:r>
           </a:p>
         </p:txBody>
@@ -1585,13 +1622,19 @@
           <a:lstStyle/>
           <a:p>
             <a:r>
-              <a:t>Here's the matrix filled in for Atlas, as of recording. Every cell is dated the moment I say it, so the resource file has a "verified on" line for you to update.</a:t>
+              <a:t>Five criteria. Control: can you self-host, and who owns the data? Cost: what's the pricing unit, and what does it cost to keep everything? Compliance: residency, retention, masking before the data leaves your network, and an audit trail for changes like prompt labels. Features: the list, but weighted by what you actually use from Sections 4 through 9. And lock-in: does it accept OTLP, can you export, and how many files change if you leave? For Atlas, you know that last number: four.</a:t>
             </a:r>
           </a:p>
           <a:p/>
           <a:p>
             <a:r>
-              <a:t>Langfuse: self-hostable on the free tier, OTel-native, has everything Sections 4 through 9 used. It's the course default for those reasons, not because it's perfect. LangSmith: excellent tracing and evals, a natural fit if your team already lives in LangChain, hosted first. Phoenix: the local-first choice and the best RAG debugger. And the APM add-on: strong where APMs are strong, and the place where the hybrid earns its keep.</a:t>
+              <a:t>[SCREEN: VS Code, `10-resources/backend-decision-matrix.md` open beside the terminal; the terminal reruns `grep -rln "from telemetry.lang...]</a:t>
+            </a:r>
+          </a:p>
+          <a:p/>
+          <a:p>
+            <a:r>
+              <a:t>Put the grep from Lecture 12.1 straight into the lock-in row. Measured, not estimated.</a:t>
             </a:r>
           </a:p>
         </p:txBody>
@@ -1661,25 +1704,13 @@
           <a:lstStyle/>
           <a:p>
             <a:r>
-              <a:t>Three situations decide the answer before the matrix does.</a:t>
+              <a:t>Here's the matrix filled in for Atlas, as of recording. Every cell is dated the moment I say it, so the resource file has a "verified on" line for you to update.</a:t>
             </a:r>
           </a:p>
           <a:p/>
           <a:p>
             <a:r>
-              <a:t>One. Regulated data, and your security team says no telemetry leaves the network. Then you self-host. Langfuse or Phoenix, with masking in the SDK from Lecture 4.6 and in the Collector from Lecture 10.2. The matrix only picks between those two.</a:t>
-            </a:r>
-          </a:p>
-          <a:p/>
-          <a:p>
-            <a:r>
-              <a:t>Two. Your company mandates the APM. Then the answer is the hybrid from Lecture 12.4, and the matrix picks the LLM-native side of it.</a:t>
-            </a:r>
-          </a:p>
-          <a:p/>
-          <a:p>
-            <a:r>
-              <a:t>Three. Small team, no platform engineers. Then hosted. Langfuse Cloud or LangSmith. Self-hosting means running Postgres, ClickHouse and Redis, and someone owns that at two in the morning. If that someone is also the only person who can fix Atlas, don't.</a:t>
+              <a:t>Langfuse: self-hostable on the free tier, OTel-native, has everything Sections 4 through 9 used. It's the course default for those reasons, not because it's perfect. LangSmith: excellent tracing and evals, a natural fit if your team already lives in LangChain, hosted first. Phoenix: the local-first choice and the best RAG debugger. And the APM add-on: strong where APMs are strong, and the place where the hybrid earns its keep.</a:t>
             </a:r>
           </a:p>
         </p:txBody>
@@ -1749,13 +1780,25 @@
           <a:lstStyle/>
           <a:p>
             <a:r>
-              <a:t>Open `backend-decision-matrix.md`. Same five rows, blank columns, a "verified on" date at the top. Before you score anything, weight the criteria for your organisation. A bank weights compliance at forty percent. A startup weights cost and speed. Then score, and write one paragraph: the decision, and the two things that would change it. "We chose Langfuse self-hosted; we'd revisit if the APM's LLM product gained prompt labels, or if we lost our platform engineer."</a:t>
+              <a:t>Three situations decide the answer before the matrix does.</a:t>
             </a:r>
           </a:p>
           <a:p/>
           <a:p>
             <a:r>
-              <a:t>That paragraph is what your manager wants. Not the matrix. The matrix is how you got there, and it's what you show when someone asks "did you consider X?"</a:t>
+              <a:t>One. Regulated data, and your security team says no telemetry leaves the network. Then you self-host. Langfuse or Phoenix, with masking in the SDK from Lecture 4.6 and in the Collector from Lecture 10.2. The matrix only picks between those two.</a:t>
+            </a:r>
+          </a:p>
+          <a:p/>
+          <a:p>
+            <a:r>
+              <a:t>Two. Your company mandates the APM. Then the answer is the hybrid from Lecture 12.4, and the matrix picks the LLM-native side of it.</a:t>
+            </a:r>
+          </a:p>
+          <a:p/>
+          <a:p>
+            <a:r>
+              <a:t>Three. Small team, no platform engineers. Then hosted. Langfuse Cloud or LangSmith. Self-hosting means running Postgres, ClickHouse and Redis, and someone owns that at two in the morning. If that someone is also the only person who can fix Atlas, don't.</a:t>
             </a:r>
           </a:p>
         </p:txBody>
@@ -1825,7 +1868,13 @@
           <a:lstStyle/>
           <a:p>
             <a:r>
-              <a:t>Title card (K2). Quiz: Portability.</a:t>
+              <a:t>Open `backend-decision-matrix.md`. Same five rows, blank columns, a "verified on" date at the top. Before you score anything, weight the criteria for your organisation. A bank weights compliance at forty percent. A startup weights cost and speed. Then score, and write one paragraph: the decision, and the two things that would change it. "We chose Langfuse self-hosted; we'd revisit if the APM's LLM product gained prompt labels, or if we lost our platform engineer."</a:t>
+            </a:r>
+          </a:p>
+          <a:p/>
+          <a:p>
+            <a:r>
+              <a:t>That paragraph is what your manager wants. Not the matrix. The matrix is how you got there, and it's what you show when someone asks "did you consider X?"</a:t>
             </a:r>
           </a:p>
         </p:txBody>
@@ -1895,6 +1944,76 @@
           <a:lstStyle/>
           <a:p>
             <a:r>
+              <a:t>Title card (K2). Quiz: Portability.</a:t>
+            </a:r>
+          </a:p>
+        </p:txBody>
+      </p:sp>
+      <p:sp>
+        <p:nvSpPr>
+          <p:cNvPr id="4" name="Slide Number Placeholder 3"/>
+          <p:cNvSpPr>
+            <a:spLocks noGrp="1"/>
+          </p:cNvSpPr>
+          <p:nvPr>
+            <p:ph type="sldNum" idx="5" sz="quarter"/>
+          </p:nvPr>
+        </p:nvSpPr>
+        <p:spPr/>
+      </p:sp>
+    </p:spTree>
+  </p:cSld>
+  <p:clrMapOvr>
+    <a:masterClrMapping/>
+  </p:clrMapOvr>
+</p:notes>
+</file>
+
+<file path=ppt/notesSlides/notesSlide27.xml><?xml version="1.0" encoding="utf-8"?>
+<p:notes xmlns:a="http://schemas.openxmlformats.org/drawingml/2006/main" xmlns:p="http://schemas.openxmlformats.org/presentationml/2006/main" xmlns:r="http://schemas.openxmlformats.org/officeDocument/2006/relationships">
+  <p:cSld>
+    <p:spTree>
+      <p:nvGrpSpPr>
+        <p:cNvPr id="1" name=""/>
+        <p:cNvGrpSpPr/>
+        <p:nvPr/>
+      </p:nvGrpSpPr>
+      <p:grpSpPr>
+        <a:xfrm>
+          <a:off x="0" y="0"/>
+          <a:ext cx="0" cy="0"/>
+          <a:chOff x="0" y="0"/>
+          <a:chExt cx="0" cy="0"/>
+        </a:xfrm>
+      </p:grpSpPr>
+      <p:sp>
+        <p:nvSpPr>
+          <p:cNvPr id="2" name="Slide Image Placeholder 1"/>
+          <p:cNvSpPr>
+            <a:spLocks noGrp="1"/>
+          </p:cNvSpPr>
+          <p:nvPr>
+            <p:ph type="sldImg" idx="2"/>
+          </p:nvPr>
+        </p:nvSpPr>
+        <p:spPr/>
+      </p:sp>
+      <p:sp>
+        <p:nvSpPr>
+          <p:cNvPr id="3" name="Notes Placeholder 2"/>
+          <p:cNvSpPr>
+            <a:spLocks noGrp="1"/>
+          </p:cNvSpPr>
+          <p:nvPr>
+            <p:ph type="body" idx="3" sz="quarter"/>
+          </p:nvPr>
+        </p:nvSpPr>
+        <p:spPr/>
+        <p:txBody>
+          <a:bodyPr/>
+          <a:lstStyle/>
+          <a:p>
+            <a:r>
               <a:t>They check what moves over OTLP and what stays behind, the LangSmith run types and feedback call, the two conventions Phoenix reads, and where the Collector sits in a hybrid. One question asks you to count how many Atlas files change when you swap backends. You know that number.</a:t>
             </a:r>
           </a:p>
@@ -1971,7 +2090,7 @@
           <a:p/>
           <a:p>
             <a:r>
-              <a:t>One caveat, and it matters. Session, user and tenant move for free *only* if they live as span attributes. In Lecture 4.3 you set them with `trace_attributes(session_id=, user_id=, tags=)`, our wrapper around Langfuse's `propagate_attributes`. It writes `session.id` and `user.id` as plain span attributes, which most backends recognise, and `langfuse.trace.tags`, which only Langfuse understands. So tags arrive elsewhere as an opaque attribute. The fix is what `genai_attrs.py` already does: `set_tenant_context` writes `atlas.tenant` and `gen_ai.conversation.id` on the same spans. Two lines, and now every backend gets the same fields.</a:t>
+              <a:t>One caveat, and it matters. Session, user and tenant move for free *only* if they live as span attributes. `trace_attributes`, our wrapper around Langfuse's `propagate_attributes`, writes Langfuse's own trace fields, and tags arrive anywhere else as an opaque attribute. That's why the agent span also gets `set_tenant_context` from `genai_attrs.py`: plain `session.id`, `user.id`, `atlas.tenant` and `gen_ai.conversation.id`. Standard fields first, vendor fields second, and every backend gets the same dimensions.</a:t>
             </a:r>
           </a:p>
         </p:txBody>
@@ -2117,7 +2236,19 @@
           <a:lstStyle/>
           <a:p>
             <a:r>
-              <a:t>Most of Atlas is portable because we were disciplined about where things live. Cost is computed in `pricing.py`, our own code, and written as a span attribute *and* as Langfuse cost details. If Langfuse goes away, the attribute stays. The parts that don't move are three files: the online judge, the feedback endpoint, and dataset promotion, plus prompt fetching. Four files, each behind a small function in `telemetry/langfuse_setup.py`. That's the two days.</a:t>
+              <a:t>Most of Atlas is portable because we were disciplined about where things live. Cost is computed in `pricing.py`, our own code, and written as a span attribute *and* as Langfuse cost details. If Langfuse goes away, the attribute stays.</a:t>
+            </a:r>
+          </a:p>
+          <a:p/>
+          <a:p>
+            <a:r>
+              <a:t>[SCREEN: Terminal in `03-code/`: `grep -rln "from telemetry.langfuse_setup import" app evals`. Output: `app/agent.py`, `app/prompts.py`,...]</a:t>
+            </a:r>
+          </a:p>
+          <a:p/>
+          <a:p>
+            <a:r>
+              <a:t>Don't take my word for it. Ask the code which files import the Langfuse module. Five. One of them, `agent.py`, only uses `trace_attributes`, which is a no-op without Langfuse. The other four are the non-portable layer: prompts, the feedback endpoint, the online judge and dataset promotion. Four files, each behind a small function in `telemetry/langfuse_setup.py`. That's the two days.</a:t>
             </a:r>
           </a:p>
         </p:txBody>
@@ -2409,19 +2540,61 @@
           <a:lstStyle/>
           <a:p>
             <a:r>
-              <a:t>Four differences that touch code. Types: no `agent` or `guardrail`, so your type-based filters change. Scores become feedback, one function. Sessions become metadata, one mapping. And prompts. LangSmith has a prompt hub with commits and tags; Langfuse has versions and labels. Same idea, different API, so your `get_prompt_text` wrapper and the promotion gate from Incident 3 get reimplemented.</a:t>
+              <a:t>Metadata goes in at call time through `langsmith_extra`, which every `traceable` function accepts. Tenant, session and user land on the root run. LangSmith groups runs into a thread when metadata carries a `session_id`, `thread_id` or `conversation_id` key, so this is how sessions come back. Verify the exact key names against the current LangSmith docs; they've changed before.</a:t>
             </a:r>
           </a:p>
           <a:p/>
           <a:p>
             <a:r>
-              <a:t>Two more differences that don't touch code but touch your wallet and your data. LangSmith is a hosted service with a self-host option on enterprise plans; Langfuse self-hosts on the free tier, which is Section 13. And LangSmith is not OTel-native in the way Langfuse 4 is. It accepts OTLP and can emit OTel, but its primary path is its own run format. Verify both against the current pricing and docs pages before you decide anything.</a:t>
+              <a:t>Nesting is automatic. Any `traceable` function called inside another becomes a child run, and every wrapped OpenAI call inside becomes an `llm` child. Same shape as Langfuse, one level shallower: retrieval shows up as a tool run, because we decorated `_run_tool`, not the retriever.</a:t>
             </a:r>
           </a:p>
           <a:p/>
           <a:p>
             <a:r>
-              <a:t>Total code changed to trace Atlas to LangSmith: one module of about sixty lines that already ships in the repo, three decorators in `agent.py`, and one field on the chat response. Everything in `src/northwind` didn't notice. That's what Lecture 12.1 promised.</a:t>
+              <a:t>[SCREEN: With the two decorators added: `OFFLINE=0 LANGSMITH_TRACING=true LANGSMITH_API_KEY=... make run`, then `curl` the VPN question w...]</a:t>
+            </a:r>
+          </a:p>
+          <a:p/>
+          <a:p>
+            <a:r>
+              <a:t>[DEMO: LangSmith trace view. Root `atlas` chain with metadata panel showing tenant, session_id, user_id. Children: `ChatOpenAI` llm runs...]</a:t>
+            </a:r>
+          </a:p>
+          <a:p/>
+          <a:p>
+            <a:r>
+              <a:t>Run Atlas with the key set, send one question, open the trace. Root run, `atlas`, with our metadata. Under it, the model calls with tokens and LangSmith's own cost estimate, and the tool run. Same shape as Lecture 2.3, different UI.</a:t>
+            </a:r>
+          </a:p>
+          <a:p/>
+          <a:p>
+            <a:r>
+              <a:t>Now feedback. In Langfuse, thumbs became `create_score` on a trace id. In LangSmith, they become `create_feedback` on a run id.</a:t>
+            </a:r>
+          </a:p>
+          <a:p/>
+          <a:p>
+            <a:r>
+              <a:t>[CODE: `telemetry/langsmith_setup.py::send_feedback` (shipped) and the `/feedback` wiring (your addition to `app/server.py`)]</a:t>
+            </a:r>
+          </a:p>
+          <a:p/>
+          <a:p>
+            <a:r>
+              <a:t>`create_feedback` takes the run id, a key, a score and an optional comment. The key is your score name, `user_feedback`, `judge_grounded`, whatever you used in Langfuse. The shipped `/feedback` body is a trace id, a score of minus one, zero or one, an optional reason and an optional comment, from Lecture 8.3. Add one optional field, `run_id`, to it and to the chat response, and the front end sends it back with the thumbs.</a:t>
+            </a:r>
+          </a:p>
+          <a:p/>
+          <a:p>
+            <a:r>
+              <a:t>[SCREEN: `curl -X POST localhost:8000/feedback -d '{"trace_id": "...", "run_id": "...", "score": -1, "reason": "unhelpful"}'`. LangSmith...]</a:t>
+            </a:r>
+          </a:p>
+          <a:p/>
+          <a:p>
+            <a:r>
+              <a:t>Post a thumbs-down. The run page shows it. And the judge in `online_judge.py` would call the same function with `key="judge_grounded"` and a float. One function swapped, the rest of Section 8 unchanged.</a:t>
             </a:r>
           </a:p>
         </p:txBody>
@@ -5667,6 +5840,671 @@
 </file>
 
 <file path=ppt/slides/slide10.xml><?xml version="1.0" encoding="utf-8"?>
+<p:sld xmlns:a="http://schemas.openxmlformats.org/drawingml/2006/main" xmlns:p="http://schemas.openxmlformats.org/presentationml/2006/main" xmlns:r="http://schemas.openxmlformats.org/officeDocument/2006/relationships">
+  <p:cSld>
+    <p:bg>
+      <p:bgPr>
+        <a:solidFill>
+          <a:srgbClr val="0A1628"/>
+        </a:solidFill>
+        <a:effectLst/>
+      </p:bgPr>
+    </p:bg>
+    <p:spTree>
+      <p:nvGrpSpPr>
+        <p:cNvPr id="1" name=""/>
+        <p:cNvGrpSpPr/>
+        <p:nvPr/>
+      </p:nvGrpSpPr>
+      <p:grpSpPr/>
+      <p:sp>
+        <p:nvSpPr>
+          <p:cNvPr id="2" name="TextBox 1"/>
+          <p:cNvSpPr txBox="1"/>
+          <p:nvPr/>
+        </p:nvSpPr>
+        <p:spPr>
+          <a:xfrm>
+            <a:off x="457200" y="6419088"/>
+            <a:ext cx="8686800" cy="320040"/>
+          </a:xfrm>
+          <a:prstGeom prst="rect">
+            <a:avLst/>
+          </a:prstGeom>
+          <a:noFill/>
+        </p:spPr>
+        <p:txBody>
+          <a:bodyPr wrap="square" lIns="45720" rIns="45720" tIns="27432" bIns="27432" anchor="t">
+            <a:spAutoFit/>
+          </a:bodyPr>
+          <a:lstStyle/>
+          <a:p>
+            <a:r>
+              <a:rPr sz="900" b="0">
+                <a:solidFill>
+                  <a:srgbClr val="64748B"/>
+                </a:solidFill>
+                <a:latin typeface="Inter"/>
+              </a:rPr>
+              <a:t>AI Agent Observability &amp; Cost Control · Section 12 · Lecture 12.2</a:t>
+            </a:r>
+          </a:p>
+        </p:txBody>
+      </p:sp>
+      <p:sp>
+        <p:nvSpPr>
+          <p:cNvPr id="3" name="TextBox 2"/>
+          <p:cNvSpPr txBox="1"/>
+          <p:nvPr/>
+        </p:nvSpPr>
+        <p:spPr>
+          <a:xfrm>
+            <a:off x="6675120" y="320040"/>
+            <a:ext cx="5074920" cy="548640"/>
+          </a:xfrm>
+          <a:prstGeom prst="rect">
+            <a:avLst/>
+          </a:prstGeom>
+          <a:noFill/>
+        </p:spPr>
+        <p:txBody>
+          <a:bodyPr wrap="square" lIns="45720" rIns="45720" tIns="27432" bIns="27432" anchor="t">
+            <a:spAutoFit/>
+          </a:bodyPr>
+          <a:lstStyle/>
+          <a:p>
+            <a:pPr algn="r"/>
+            <a:r>
+              <a:rPr sz="1000" b="0">
+                <a:solidFill>
+                  <a:srgbClr val="94A3B8"/>
+                </a:solidFill>
+                <a:latin typeface="Inter"/>
+              </a:rPr>
+              <a:t>SECTION 12 · PORTABILITY AND ALTERNATIVES</a:t>
+            </a:r>
+          </a:p>
+        </p:txBody>
+      </p:sp>
+      <p:sp>
+        <p:nvSpPr>
+          <p:cNvPr id="4" name="TextBox 3"/>
+          <p:cNvSpPr txBox="1"/>
+          <p:nvPr/>
+        </p:nvSpPr>
+        <p:spPr>
+          <a:xfrm>
+            <a:off x="914400" y="1417320"/>
+            <a:ext cx="10332720" cy="457200"/>
+          </a:xfrm>
+          <a:prstGeom prst="rect">
+            <a:avLst/>
+          </a:prstGeom>
+          <a:noFill/>
+        </p:spPr>
+        <p:txBody>
+          <a:bodyPr wrap="square" lIns="45720" rIns="45720" tIns="27432" bIns="27432" anchor="t">
+            <a:spAutoFit/>
+          </a:bodyPr>
+          <a:lstStyle/>
+          <a:p>
+            <a:r>
+              <a:rPr sz="1200" b="1">
+                <a:solidFill>
+                  <a:srgbClr val="00D4AA"/>
+                </a:solidFill>
+                <a:latin typeface="Inter"/>
+              </a:rPr>
+              <a:t>LECTURE 12.2</a:t>
+            </a:r>
+          </a:p>
+        </p:txBody>
+      </p:sp>
+      <p:sp>
+        <p:nvSpPr>
+          <p:cNvPr id="5" name="TextBox 4"/>
+          <p:cNvSpPr txBox="1"/>
+          <p:nvPr/>
+        </p:nvSpPr>
+        <p:spPr>
+          <a:xfrm>
+            <a:off x="914400" y="1874519"/>
+            <a:ext cx="10332720" cy="1645920"/>
+          </a:xfrm>
+          <a:prstGeom prst="rect">
+            <a:avLst/>
+          </a:prstGeom>
+          <a:noFill/>
+        </p:spPr>
+        <p:txBody>
+          <a:bodyPr wrap="square" lIns="45720" rIns="45720" tIns="27432" bIns="27432" anchor="t">
+            <a:spAutoFit/>
+          </a:bodyPr>
+          <a:lstStyle/>
+          <a:p>
+            <a:pPr>
+              <a:lnSpc>
+                <a:spcPct val="110000"/>
+              </a:lnSpc>
+            </a:pPr>
+            <a:r>
+              <a:rPr sz="3000" b="1">
+                <a:solidFill>
+                  <a:srgbClr val="FFFFFF"/>
+                </a:solidFill>
+                <a:latin typeface="Inter"/>
+              </a:rPr>
+              <a:t>Code-along: same Atlas, traced to LangSmith</a:t>
+            </a:r>
+          </a:p>
+        </p:txBody>
+      </p:sp>
+      <p:sp>
+        <p:nvSpPr>
+          <p:cNvPr id="6" name="Rectangle 5"/>
+          <p:cNvSpPr/>
+          <p:nvPr/>
+        </p:nvSpPr>
+        <p:spPr>
+          <a:xfrm>
+            <a:off x="914400" y="3794760"/>
+            <a:ext cx="64008" cy="1143000"/>
+          </a:xfrm>
+          <a:prstGeom prst="rect">
+            <a:avLst/>
+          </a:prstGeom>
+          <a:solidFill>
+            <a:srgbClr val="00D4AA"/>
+          </a:solidFill>
+          <a:ln>
+            <a:noFill/>
+          </a:ln>
+          <a:effectLst/>
+        </p:spPr>
+        <p:style>
+          <a:lnRef idx="1">
+            <a:schemeClr val="accent1"/>
+          </a:lnRef>
+          <a:fillRef idx="3">
+            <a:schemeClr val="accent1"/>
+          </a:fillRef>
+          <a:effectRef idx="2">
+            <a:schemeClr val="accent1"/>
+          </a:effectRef>
+          <a:fontRef idx="minor">
+            <a:schemeClr val="lt1"/>
+          </a:fontRef>
+        </p:style>
+        <p:txBody>
+          <a:bodyPr rtlCol="0" anchor="ctr"/>
+          <a:lstStyle/>
+          <a:p/>
+        </p:txBody>
+      </p:sp>
+      <p:sp>
+        <p:nvSpPr>
+          <p:cNvPr id="7" name="TextBox 6"/>
+          <p:cNvSpPr txBox="1"/>
+          <p:nvPr/>
+        </p:nvSpPr>
+        <p:spPr>
+          <a:xfrm>
+            <a:off x="1188720" y="3749039"/>
+            <a:ext cx="9692640" cy="1280160"/>
+          </a:xfrm>
+          <a:prstGeom prst="rect">
+            <a:avLst/>
+          </a:prstGeom>
+          <a:noFill/>
+        </p:spPr>
+        <p:txBody>
+          <a:bodyPr wrap="square" lIns="45720" rIns="45720" tIns="27432" bIns="27432" anchor="ctr">
+            <a:spAutoFit/>
+          </a:bodyPr>
+          <a:lstStyle/>
+          <a:p>
+            <a:pPr>
+              <a:lnSpc>
+                <a:spcPct val="130000"/>
+              </a:lnSpc>
+            </a:pPr>
+            <a:r>
+              <a:rPr sz="1600" b="0">
+                <a:solidFill>
+                  <a:srgbClr val="CBD5E1"/>
+                </a:solidFill>
+                <a:latin typeface="Inter"/>
+              </a:rPr>
+              <a:t>Trace Atlas to LangSmith with </a:t>
+            </a:r>
+            <a:r>
+              <a:rPr sz="1472" b="0">
+                <a:solidFill>
+                  <a:srgbClr val="00D4AA"/>
+                </a:solidFill>
+                <a:latin typeface="JetBrains Mono"/>
+              </a:rPr>
+              <a:t>wrap_openai</a:t>
+            </a:r>
+            <a:r>
+              <a:rPr sz="1600" b="0">
+                <a:solidFill>
+                  <a:srgbClr val="CBD5E1"/>
+                </a:solidFill>
+                <a:latin typeface="Inter"/>
+              </a:rPr>
+              <a:t> (shipped) and </a:t>
+            </a:r>
+            <a:r>
+              <a:rPr sz="1472" b="0">
+                <a:solidFill>
+                  <a:srgbClr val="00D4AA"/>
+                </a:solidFill>
+                <a:latin typeface="JetBrains Mono"/>
+              </a:rPr>
+              <a:t>@traceable</a:t>
+            </a:r>
+            <a:r>
+              <a:rPr sz="1600" b="0">
+                <a:solidFill>
+                  <a:srgbClr val="CBD5E1"/>
+                </a:solidFill>
+                <a:latin typeface="Inter"/>
+              </a:rPr>
+              <a:t> run types (your addition), with tenant and session metadata.</a:t>
+            </a:r>
+          </a:p>
+        </p:txBody>
+      </p:sp>
+    </p:spTree>
+  </p:cSld>
+  <p:clrMapOvr>
+    <a:masterClrMapping/>
+  </p:clrMapOvr>
+</p:sld>
+</file>
+
+<file path=ppt/slides/slide11.xml><?xml version="1.0" encoding="utf-8"?>
+<p:sld xmlns:a="http://schemas.openxmlformats.org/drawingml/2006/main" xmlns:p="http://schemas.openxmlformats.org/presentationml/2006/main" xmlns:r="http://schemas.openxmlformats.org/officeDocument/2006/relationships">
+  <p:cSld>
+    <p:bg>
+      <p:bgPr>
+        <a:solidFill>
+          <a:srgbClr val="0A1628"/>
+        </a:solidFill>
+        <a:effectLst/>
+      </p:bgPr>
+    </p:bg>
+    <p:spTree>
+      <p:nvGrpSpPr>
+        <p:cNvPr id="1" name=""/>
+        <p:cNvGrpSpPr/>
+        <p:nvPr/>
+      </p:nvGrpSpPr>
+      <p:grpSpPr/>
+      <p:sp>
+        <p:nvSpPr>
+          <p:cNvPr id="2" name="TextBox 1"/>
+          <p:cNvSpPr txBox="1"/>
+          <p:nvPr/>
+        </p:nvSpPr>
+        <p:spPr>
+          <a:xfrm>
+            <a:off x="457200" y="6419088"/>
+            <a:ext cx="8686800" cy="320040"/>
+          </a:xfrm>
+          <a:prstGeom prst="rect">
+            <a:avLst/>
+          </a:prstGeom>
+          <a:noFill/>
+        </p:spPr>
+        <p:txBody>
+          <a:bodyPr wrap="square" lIns="45720" rIns="45720" tIns="27432" bIns="27432" anchor="t">
+            <a:spAutoFit/>
+          </a:bodyPr>
+          <a:lstStyle/>
+          <a:p>
+            <a:r>
+              <a:rPr sz="900" b="0">
+                <a:solidFill>
+                  <a:srgbClr val="64748B"/>
+                </a:solidFill>
+                <a:latin typeface="Inter"/>
+              </a:rPr>
+              <a:t>AI Agent Observability &amp; Cost Control · Section 12 · Lecture 12.2</a:t>
+            </a:r>
+          </a:p>
+        </p:txBody>
+      </p:sp>
+      <p:sp>
+        <p:nvSpPr>
+          <p:cNvPr id="3" name="TextBox 2"/>
+          <p:cNvSpPr txBox="1"/>
+          <p:nvPr/>
+        </p:nvSpPr>
+        <p:spPr>
+          <a:xfrm>
+            <a:off x="457200" y="411480"/>
+            <a:ext cx="11247120" cy="868680"/>
+          </a:xfrm>
+          <a:prstGeom prst="rect">
+            <a:avLst/>
+          </a:prstGeom>
+          <a:noFill/>
+        </p:spPr>
+        <p:txBody>
+          <a:bodyPr wrap="square" lIns="45720" rIns="45720" tIns="27432" bIns="27432" anchor="t">
+            <a:spAutoFit/>
+          </a:bodyPr>
+          <a:lstStyle/>
+          <a:p>
+            <a:pPr>
+              <a:lnSpc>
+                <a:spcPct val="110000"/>
+              </a:lnSpc>
+            </a:pPr>
+            <a:r>
+              <a:rPr sz="2600" b="1">
+                <a:solidFill>
+                  <a:srgbClr val="FFFFFF"/>
+                </a:solidFill>
+                <a:latin typeface="Inter"/>
+              </a:rPr>
+              <a:t>LangSmith run types</a:t>
+            </a:r>
+          </a:p>
+        </p:txBody>
+      </p:sp>
+      <p:sp>
+        <p:nvSpPr>
+          <p:cNvPr id="4" name="Rectangle 3"/>
+          <p:cNvSpPr/>
+          <p:nvPr/>
+        </p:nvSpPr>
+        <p:spPr>
+          <a:xfrm>
+            <a:off x="502920" y="1024128"/>
+            <a:ext cx="822960" cy="54864"/>
+          </a:xfrm>
+          <a:prstGeom prst="rect">
+            <a:avLst/>
+          </a:prstGeom>
+          <a:solidFill>
+            <a:srgbClr val="00D4AA"/>
+          </a:solidFill>
+          <a:ln>
+            <a:noFill/>
+          </a:ln>
+          <a:effectLst/>
+        </p:spPr>
+        <p:style>
+          <a:lnRef idx="1">
+            <a:schemeClr val="accent1"/>
+          </a:lnRef>
+          <a:fillRef idx="3">
+            <a:schemeClr val="accent1"/>
+          </a:fillRef>
+          <a:effectRef idx="2">
+            <a:schemeClr val="accent1"/>
+          </a:effectRef>
+          <a:fontRef idx="minor">
+            <a:schemeClr val="lt1"/>
+          </a:fontRef>
+        </p:style>
+        <p:txBody>
+          <a:bodyPr rtlCol="0" anchor="ctr"/>
+          <a:lstStyle/>
+          <a:p/>
+        </p:txBody>
+      </p:sp>
+      <p:sp>
+        <p:nvSpPr>
+          <p:cNvPr id="5" name="TextBox 4"/>
+          <p:cNvSpPr txBox="1"/>
+          <p:nvPr/>
+        </p:nvSpPr>
+        <p:spPr>
+          <a:xfrm>
+            <a:off x="640080" y="1417320"/>
+            <a:ext cx="10881360" cy="4892040"/>
+          </a:xfrm>
+          <a:prstGeom prst="rect">
+            <a:avLst/>
+          </a:prstGeom>
+          <a:noFill/>
+        </p:spPr>
+        <p:txBody>
+          <a:bodyPr wrap="square" lIns="45720" rIns="45720" tIns="27432" bIns="27432" anchor="t">
+            <a:spAutoFit/>
+          </a:bodyPr>
+          <a:lstStyle/>
+          <a:p>
+            <a:pPr marL="292608" indent="-292608">
+              <a:lnSpc>
+                <a:spcPct val="120000"/>
+              </a:lnSpc>
+              <a:spcAft>
+                <a:spcPts val="1539"/>
+              </a:spcAft>
+              <a:buClr>
+                <a:srgbClr val="00D4AA"/>
+              </a:buClr>
+              <a:buFont typeface="Inter"/>
+              <a:buChar char="•"/>
+            </a:pPr>
+            <a:r>
+              <a:rPr sz="2024" b="0">
+                <a:solidFill>
+                  <a:srgbClr val="00D4AA"/>
+                </a:solidFill>
+                <a:latin typeface="JetBrains Mono"/>
+              </a:rPr>
+              <a:t>chain</a:t>
+            </a:r>
+            <a:r>
+              <a:rPr sz="2200" b="0">
+                <a:solidFill>
+                  <a:srgbClr val="FFFFFF"/>
+                </a:solidFill>
+                <a:latin typeface="Inter"/>
+              </a:rPr>
+              <a:t>, </a:t>
+            </a:r>
+            <a:r>
+              <a:rPr sz="2024" b="0">
+                <a:solidFill>
+                  <a:srgbClr val="00D4AA"/>
+                </a:solidFill>
+                <a:latin typeface="JetBrains Mono"/>
+              </a:rPr>
+              <a:t>llm</a:t>
+            </a:r>
+            <a:r>
+              <a:rPr sz="2200" b="0">
+                <a:solidFill>
+                  <a:srgbClr val="FFFFFF"/>
+                </a:solidFill>
+                <a:latin typeface="Inter"/>
+              </a:rPr>
+              <a:t>, </a:t>
+            </a:r>
+            <a:r>
+              <a:rPr sz="2024" b="0">
+                <a:solidFill>
+                  <a:srgbClr val="00D4AA"/>
+                </a:solidFill>
+                <a:latin typeface="JetBrains Mono"/>
+              </a:rPr>
+              <a:t>tool</a:t>
+            </a:r>
+            <a:r>
+              <a:rPr sz="2200" b="0">
+                <a:solidFill>
+                  <a:srgbClr val="FFFFFF"/>
+                </a:solidFill>
+                <a:latin typeface="Inter"/>
+              </a:rPr>
+              <a:t>, </a:t>
+            </a:r>
+            <a:r>
+              <a:rPr sz="2024" b="0">
+                <a:solidFill>
+                  <a:srgbClr val="00D4AA"/>
+                </a:solidFill>
+                <a:latin typeface="JetBrains Mono"/>
+              </a:rPr>
+              <a:t>retriever</a:t>
+            </a:r>
+            <a:r>
+              <a:rPr sz="2200" b="0">
+                <a:solidFill>
+                  <a:srgbClr val="FFFFFF"/>
+                </a:solidFill>
+                <a:latin typeface="Inter"/>
+              </a:rPr>
+              <a:t>, </a:t>
+            </a:r>
+            <a:r>
+              <a:rPr sz="2024" b="0">
+                <a:solidFill>
+                  <a:srgbClr val="00D4AA"/>
+                </a:solidFill>
+                <a:latin typeface="JetBrains Mono"/>
+              </a:rPr>
+              <a:t>embedding</a:t>
+            </a:r>
+            <a:r>
+              <a:rPr sz="2200" b="0">
+                <a:solidFill>
+                  <a:srgbClr val="FFFFFF"/>
+                </a:solidFill>
+                <a:latin typeface="Inter"/>
+              </a:rPr>
+              <a:t>, </a:t>
+            </a:r>
+            <a:r>
+              <a:rPr sz="2024" b="0">
+                <a:solidFill>
+                  <a:srgbClr val="00D4AA"/>
+                </a:solidFill>
+                <a:latin typeface="JetBrains Mono"/>
+              </a:rPr>
+              <a:t>prompt</a:t>
+            </a:r>
+            <a:r>
+              <a:rPr sz="2200" b="0">
+                <a:solidFill>
+                  <a:srgbClr val="FFFFFF"/>
+                </a:solidFill>
+                <a:latin typeface="Inter"/>
+              </a:rPr>
+              <a:t>, </a:t>
+            </a:r>
+            <a:r>
+              <a:rPr sz="2024" b="0">
+                <a:solidFill>
+                  <a:srgbClr val="00D4AA"/>
+                </a:solidFill>
+                <a:latin typeface="JetBrains Mono"/>
+              </a:rPr>
+              <a:t>parser</a:t>
+            </a:r>
+          </a:p>
+          <a:p>
+            <a:pPr marL="292608" indent="-292608">
+              <a:lnSpc>
+                <a:spcPct val="120000"/>
+              </a:lnSpc>
+              <a:spcAft>
+                <a:spcPts val="1539"/>
+              </a:spcAft>
+              <a:buClr>
+                <a:srgbClr val="00D4AA"/>
+              </a:buClr>
+              <a:buFont typeface="Inter"/>
+              <a:buChar char="•"/>
+            </a:pPr>
+            <a:r>
+              <a:rPr sz="2200" b="0">
+                <a:solidFill>
+                  <a:srgbClr val="FFFFFF"/>
+                </a:solidFill>
+                <a:latin typeface="Inter"/>
+              </a:rPr>
+              <a:t>No </a:t>
+            </a:r>
+            <a:r>
+              <a:rPr sz="2024" b="0">
+                <a:solidFill>
+                  <a:srgbClr val="00D4AA"/>
+                </a:solidFill>
+                <a:latin typeface="JetBrains Mono"/>
+              </a:rPr>
+              <a:t>agent</a:t>
+            </a:r>
+            <a:r>
+              <a:rPr sz="2200" b="0">
+                <a:solidFill>
+                  <a:srgbClr val="FFFFFF"/>
+                </a:solidFill>
+                <a:latin typeface="Inter"/>
+              </a:rPr>
+              <a:t>, no </a:t>
+            </a:r>
+            <a:r>
+              <a:rPr sz="2024" b="0">
+                <a:solidFill>
+                  <a:srgbClr val="00D4AA"/>
+                </a:solidFill>
+                <a:latin typeface="JetBrains Mono"/>
+              </a:rPr>
+              <a:t>guardrail</a:t>
+            </a:r>
+          </a:p>
+          <a:p>
+            <a:pPr marL="292608" indent="-292608">
+              <a:lnSpc>
+                <a:spcPct val="120000"/>
+              </a:lnSpc>
+              <a:spcAft>
+                <a:spcPts val="1539"/>
+              </a:spcAft>
+              <a:buClr>
+                <a:srgbClr val="00D4AA"/>
+              </a:buClr>
+              <a:buFont typeface="Inter"/>
+              <a:buChar char="•"/>
+            </a:pPr>
+            <a:r>
+              <a:rPr sz="2200" b="0">
+                <a:solidFill>
+                  <a:srgbClr val="FFFFFF"/>
+                </a:solidFill>
+                <a:latin typeface="Inter"/>
+              </a:rPr>
+              <a:t>Metadata at call time: </a:t>
+            </a:r>
+            <a:r>
+              <a:rPr sz="2024" b="0">
+                <a:solidFill>
+                  <a:srgbClr val="00D4AA"/>
+                </a:solidFill>
+                <a:latin typeface="JetBrains Mono"/>
+              </a:rPr>
+              <a:t>langsmith_extra={"metadata": {...}}</a:t>
+            </a:r>
+          </a:p>
+        </p:txBody>
+      </p:sp>
+    </p:spTree>
+  </p:cSld>
+  <p:clrMapOvr>
+    <a:masterClrMapping/>
+  </p:clrMapOvr>
+</p:sld>
+</file>
+
+<file path=ppt/slides/slide12.xml><?xml version="1.0" encoding="utf-8"?>
 <p:sld xmlns:a="http://schemas.openxmlformats.org/drawingml/2006/main" xmlns:p="http://schemas.openxmlformats.org/presentationml/2006/main" xmlns:r="http://schemas.openxmlformats.org/officeDocument/2006/relationships">
   <p:cSld>
     <p:bg>
@@ -6399,7 +7237,7 @@
 </p:sld>
 </file>
 
-<file path=ppt/slides/slide11.xml><?xml version="1.0" encoding="utf-8"?>
+<file path=ppt/slides/slide13.xml><?xml version="1.0" encoding="utf-8"?>
 <p:sld xmlns:a="http://schemas.openxmlformats.org/drawingml/2006/main" xmlns:p="http://schemas.openxmlformats.org/presentationml/2006/main" xmlns:r="http://schemas.openxmlformats.org/officeDocument/2006/relationships">
   <p:cSld>
     <p:bg>
@@ -6459,8 +7297,122 @@
         </p:nvSpPr>
         <p:spPr>
           <a:xfrm>
-            <a:off x="2377440" y="2286000"/>
-            <a:ext cx="1097280" cy="1097280"/>
+            <a:off x="1371600" y="822960"/>
+            <a:ext cx="9418320" cy="457200"/>
+          </a:xfrm>
+          <a:prstGeom prst="rect">
+            <a:avLst/>
+          </a:prstGeom>
+          <a:noFill/>
+        </p:spPr>
+        <p:txBody>
+          <a:bodyPr wrap="square" lIns="45720" rIns="45720" tIns="27432" bIns="27432" anchor="t">
+            <a:spAutoFit/>
+          </a:bodyPr>
+          <a:lstStyle/>
+          <a:p>
+            <a:pPr algn="ctr"/>
+            <a:r>
+              <a:rPr sz="1200" b="1">
+                <a:solidFill>
+                  <a:srgbClr val="00D4AA"/>
+                </a:solidFill>
+                <a:latin typeface="Inter"/>
+              </a:rPr>
+              <a:t>RECAP</a:t>
+            </a:r>
+          </a:p>
+        </p:txBody>
+      </p:sp>
+      <p:sp>
+        <p:nvSpPr>
+          <p:cNvPr id="4" name="TextBox 3"/>
+          <p:cNvSpPr txBox="1"/>
+          <p:nvPr/>
+        </p:nvSpPr>
+        <p:spPr>
+          <a:xfrm>
+            <a:off x="1371600" y="1234440"/>
+            <a:ext cx="9418320" cy="822960"/>
+          </a:xfrm>
+          <a:prstGeom prst="rect">
+            <a:avLst/>
+          </a:prstGeom>
+          <a:noFill/>
+        </p:spPr>
+        <p:txBody>
+          <a:bodyPr wrap="square" lIns="45720" rIns="45720" tIns="27432" bIns="27432" anchor="t">
+            <a:spAutoFit/>
+          </a:bodyPr>
+          <a:lstStyle/>
+          <a:p>
+            <a:pPr algn="ctr"/>
+            <a:r>
+              <a:rPr sz="2600" b="1">
+                <a:solidFill>
+                  <a:srgbClr val="FFFFFF"/>
+                </a:solidFill>
+                <a:latin typeface="Inter"/>
+              </a:rPr>
+              <a:t>Key takeaways</a:t>
+            </a:r>
+          </a:p>
+        </p:txBody>
+      </p:sp>
+      <p:sp>
+        <p:nvSpPr>
+          <p:cNvPr id="5" name="Rounded Rectangle 4"/>
+          <p:cNvSpPr/>
+          <p:nvPr/>
+        </p:nvSpPr>
+        <p:spPr>
+          <a:xfrm>
+            <a:off x="2011680" y="2514600"/>
+            <a:ext cx="8138160" cy="777240"/>
+          </a:xfrm>
+          <a:prstGeom prst="roundRect">
+            <a:avLst>
+              <a:gd name="adj" fmla="val 6588"/>
+            </a:avLst>
+          </a:prstGeom>
+          <a:solidFill>
+            <a:srgbClr val="1A2742"/>
+          </a:solidFill>
+          <a:ln>
+            <a:noFill/>
+          </a:ln>
+          <a:effectLst/>
+        </p:spPr>
+        <p:style>
+          <a:lnRef idx="1">
+            <a:schemeClr val="accent1"/>
+          </a:lnRef>
+          <a:fillRef idx="3">
+            <a:schemeClr val="accent1"/>
+          </a:fillRef>
+          <a:effectRef idx="2">
+            <a:schemeClr val="accent1"/>
+          </a:effectRef>
+          <a:fontRef idx="minor">
+            <a:schemeClr val="lt1"/>
+          </a:fontRef>
+        </p:style>
+        <p:txBody>
+          <a:bodyPr rtlCol="0" anchor="ctr"/>
+          <a:lstStyle/>
+          <a:p/>
+        </p:txBody>
+      </p:sp>
+      <p:sp>
+        <p:nvSpPr>
+          <p:cNvPr id="6" name="TextBox 5"/>
+          <p:cNvSpPr txBox="1"/>
+          <p:nvPr/>
+        </p:nvSpPr>
+        <p:spPr>
+          <a:xfrm>
+            <a:off x="2194560" y="2514600"/>
+            <a:ext cx="548640" cy="777240"/>
           </a:xfrm>
           <a:prstGeom prst="rect">
             <a:avLst/>
@@ -6474,27 +7426,27 @@
           <a:lstStyle/>
           <a:p>
             <a:r>
-              <a:rPr sz="5400" b="1">
+              <a:rPr sz="2200" b="1">
                 <a:solidFill>
                   <a:srgbClr val="00D4AA"/>
                 </a:solidFill>
                 <a:latin typeface="Inter"/>
               </a:rPr>
-              <a:t>→</a:t>
-            </a:r>
-          </a:p>
-        </p:txBody>
-      </p:sp>
-      <p:sp>
-        <p:nvSpPr>
-          <p:cNvPr id="4" name="TextBox 3"/>
+              <a:t>✓</a:t>
+            </a:r>
+          </a:p>
+        </p:txBody>
+      </p:sp>
+      <p:sp>
+        <p:nvSpPr>
+          <p:cNvPr id="7" name="TextBox 6"/>
           <p:cNvSpPr txBox="1"/>
           <p:nvPr/>
         </p:nvSpPr>
         <p:spPr>
           <a:xfrm>
-            <a:off x="3566160" y="2148840"/>
-            <a:ext cx="7315200" cy="457200"/>
+            <a:off x="2788920" y="2514600"/>
+            <a:ext cx="7223760" cy="777240"/>
           </a:xfrm>
           <a:prstGeom prst="rect">
             <a:avLst/>
@@ -6502,33 +7454,86 @@
           <a:noFill/>
         </p:spPr>
         <p:txBody>
-          <a:bodyPr wrap="square" lIns="45720" rIns="45720" tIns="27432" bIns="27432" anchor="t">
+          <a:bodyPr wrap="square" lIns="45720" rIns="45720" tIns="27432" bIns="27432" anchor="ctr">
             <a:spAutoFit/>
           </a:bodyPr>
           <a:lstStyle/>
           <a:p>
             <a:r>
-              <a:rPr sz="1400" b="0">
-                <a:solidFill>
-                  <a:srgbClr val="94A3B8"/>
-                </a:solidFill>
-                <a:latin typeface="Inter"/>
-              </a:rPr>
-              <a:t>Next up:</a:t>
-            </a:r>
-          </a:p>
-        </p:txBody>
-      </p:sp>
-      <p:sp>
-        <p:nvSpPr>
-          <p:cNvPr id="5" name="TextBox 4"/>
+              <a:rPr sz="1656" b="0">
+                <a:solidFill>
+                  <a:srgbClr val="00D4AA"/>
+                </a:solidFill>
+                <a:latin typeface="JetBrains Mono"/>
+              </a:rPr>
+              <a:t>wrap_openai</a:t>
+            </a:r>
+            <a:r>
+              <a:rPr sz="1800" b="1">
+                <a:solidFill>
+                  <a:srgbClr val="FFFFFF"/>
+                </a:solidFill>
+                <a:latin typeface="Inter"/>
+              </a:rPr>
+              <a:t> ships; decorators are yours</a:t>
+            </a:r>
+          </a:p>
+        </p:txBody>
+      </p:sp>
+      <p:sp>
+        <p:nvSpPr>
+          <p:cNvPr id="8" name="Rounded Rectangle 7"/>
+          <p:cNvSpPr/>
+          <p:nvPr/>
+        </p:nvSpPr>
+        <p:spPr>
+          <a:xfrm>
+            <a:off x="2011680" y="3474720"/>
+            <a:ext cx="8138160" cy="777240"/>
+          </a:xfrm>
+          <a:prstGeom prst="roundRect">
+            <a:avLst>
+              <a:gd name="adj" fmla="val 6588"/>
+            </a:avLst>
+          </a:prstGeom>
+          <a:solidFill>
+            <a:srgbClr val="1A2742"/>
+          </a:solidFill>
+          <a:ln>
+            <a:noFill/>
+          </a:ln>
+          <a:effectLst/>
+        </p:spPr>
+        <p:style>
+          <a:lnRef idx="1">
+            <a:schemeClr val="accent1"/>
+          </a:lnRef>
+          <a:fillRef idx="3">
+            <a:schemeClr val="accent1"/>
+          </a:fillRef>
+          <a:effectRef idx="2">
+            <a:schemeClr val="accent1"/>
+          </a:effectRef>
+          <a:fontRef idx="minor">
+            <a:schemeClr val="lt1"/>
+          </a:fontRef>
+        </p:style>
+        <p:txBody>
+          <a:bodyPr rtlCol="0" anchor="ctr"/>
+          <a:lstStyle/>
+          <a:p/>
+        </p:txBody>
+      </p:sp>
+      <p:sp>
+        <p:nvSpPr>
+          <p:cNvPr id="9" name="TextBox 8"/>
           <p:cNvSpPr txBox="1"/>
           <p:nvPr/>
         </p:nvSpPr>
         <p:spPr>
           <a:xfrm>
-            <a:off x="3566160" y="2560320"/>
-            <a:ext cx="7315200" cy="1097280"/>
+            <a:off x="2194560" y="3474720"/>
+            <a:ext cx="548640" cy="777240"/>
           </a:xfrm>
           <a:prstGeom prst="rect">
             <a:avLst/>
@@ -6536,33 +7541,33 @@
           <a:noFill/>
         </p:spPr>
         <p:txBody>
-          <a:bodyPr wrap="square" lIns="45720" rIns="45720" tIns="27432" bIns="27432" anchor="t">
+          <a:bodyPr wrap="square" lIns="45720" rIns="45720" tIns="27432" bIns="27432" anchor="ctr">
             <a:spAutoFit/>
           </a:bodyPr>
           <a:lstStyle/>
           <a:p>
             <a:r>
-              <a:rPr sz="2600" b="1">
-                <a:solidFill>
-                  <a:srgbClr val="FFFFFF"/>
-                </a:solidFill>
-                <a:latin typeface="Inter"/>
-              </a:rPr>
-              <a:t>Arize Phoenix and OpenInference</a:t>
-            </a:r>
-          </a:p>
-        </p:txBody>
-      </p:sp>
-      <p:sp>
-        <p:nvSpPr>
-          <p:cNvPr id="6" name="TextBox 5"/>
+              <a:rPr sz="2200" b="1">
+                <a:solidFill>
+                  <a:srgbClr val="00D4AA"/>
+                </a:solidFill>
+                <a:latin typeface="Inter"/>
+              </a:rPr>
+              <a:t>✓</a:t>
+            </a:r>
+          </a:p>
+        </p:txBody>
+      </p:sp>
+      <p:sp>
+        <p:nvSpPr>
+          <p:cNvPr id="10" name="TextBox 9"/>
           <p:cNvSpPr txBox="1"/>
           <p:nvPr/>
         </p:nvSpPr>
         <p:spPr>
           <a:xfrm>
-            <a:off x="3566160" y="3703320"/>
-            <a:ext cx="7315200" cy="1097280"/>
+            <a:off x="2788920" y="3474720"/>
+            <a:ext cx="7223760" cy="777240"/>
           </a:xfrm>
           <a:prstGeom prst="rect">
             <a:avLst/>
@@ -6570,19 +7575,149 @@
           <a:noFill/>
         </p:spPr>
         <p:txBody>
-          <a:bodyPr wrap="square" lIns="45720" rIns="45720" tIns="27432" bIns="27432" anchor="t">
+          <a:bodyPr wrap="square" lIns="45720" rIns="45720" tIns="27432" bIns="27432" anchor="ctr">
             <a:spAutoFit/>
           </a:bodyPr>
           <a:lstStyle/>
           <a:p>
             <a:r>
-              <a:rPr sz="1400" b="0">
-                <a:solidFill>
-                  <a:srgbClr val="94A3B8"/>
-                </a:solidFill>
-                <a:latin typeface="Inter"/>
-              </a:rPr>
-              <a:t>Next, Arize Phoenix: no SDK swap at all, just point the OTLP exporter somewhere else, and meet a…</a:t>
+              <a:rPr sz="1656" b="0">
+                <a:solidFill>
+                  <a:srgbClr val="00D4AA"/>
+                </a:solidFill>
+                <a:latin typeface="JetBrains Mono"/>
+              </a:rPr>
+              <a:t>create_feedback</a:t>
+            </a:r>
+            <a:r>
+              <a:rPr sz="1800" b="1">
+                <a:solidFill>
+                  <a:srgbClr val="FFFFFF"/>
+                </a:solidFill>
+                <a:latin typeface="Inter"/>
+              </a:rPr>
+              <a:t> replaces </a:t>
+            </a:r>
+            <a:r>
+              <a:rPr sz="1656" b="0">
+                <a:solidFill>
+                  <a:srgbClr val="00D4AA"/>
+                </a:solidFill>
+                <a:latin typeface="JetBrains Mono"/>
+              </a:rPr>
+              <a:t>create_score</a:t>
+            </a:r>
+          </a:p>
+        </p:txBody>
+      </p:sp>
+      <p:sp>
+        <p:nvSpPr>
+          <p:cNvPr id="11" name="Rounded Rectangle 10"/>
+          <p:cNvSpPr/>
+          <p:nvPr/>
+        </p:nvSpPr>
+        <p:spPr>
+          <a:xfrm>
+            <a:off x="2011680" y="4434840"/>
+            <a:ext cx="8138160" cy="777240"/>
+          </a:xfrm>
+          <a:prstGeom prst="roundRect">
+            <a:avLst>
+              <a:gd name="adj" fmla="val 6588"/>
+            </a:avLst>
+          </a:prstGeom>
+          <a:solidFill>
+            <a:srgbClr val="1A2742"/>
+          </a:solidFill>
+          <a:ln>
+            <a:noFill/>
+          </a:ln>
+          <a:effectLst/>
+        </p:spPr>
+        <p:style>
+          <a:lnRef idx="1">
+            <a:schemeClr val="accent1"/>
+          </a:lnRef>
+          <a:fillRef idx="3">
+            <a:schemeClr val="accent1"/>
+          </a:fillRef>
+          <a:effectRef idx="2">
+            <a:schemeClr val="accent1"/>
+          </a:effectRef>
+          <a:fontRef idx="minor">
+            <a:schemeClr val="lt1"/>
+          </a:fontRef>
+        </p:style>
+        <p:txBody>
+          <a:bodyPr rtlCol="0" anchor="ctr"/>
+          <a:lstStyle/>
+          <a:p/>
+        </p:txBody>
+      </p:sp>
+      <p:sp>
+        <p:nvSpPr>
+          <p:cNvPr id="12" name="TextBox 11"/>
+          <p:cNvSpPr txBox="1"/>
+          <p:nvPr/>
+        </p:nvSpPr>
+        <p:spPr>
+          <a:xfrm>
+            <a:off x="2194560" y="4434840"/>
+            <a:ext cx="548640" cy="777240"/>
+          </a:xfrm>
+          <a:prstGeom prst="rect">
+            <a:avLst/>
+          </a:prstGeom>
+          <a:noFill/>
+        </p:spPr>
+        <p:txBody>
+          <a:bodyPr wrap="square" lIns="45720" rIns="45720" tIns="27432" bIns="27432" anchor="ctr">
+            <a:spAutoFit/>
+          </a:bodyPr>
+          <a:lstStyle/>
+          <a:p>
+            <a:r>
+              <a:rPr sz="2200" b="1">
+                <a:solidFill>
+                  <a:srgbClr val="00D4AA"/>
+                </a:solidFill>
+                <a:latin typeface="Inter"/>
+              </a:rPr>
+              <a:t>✓</a:t>
+            </a:r>
+          </a:p>
+        </p:txBody>
+      </p:sp>
+      <p:sp>
+        <p:nvSpPr>
+          <p:cNvPr id="13" name="TextBox 12"/>
+          <p:cNvSpPr txBox="1"/>
+          <p:nvPr/>
+        </p:nvSpPr>
+        <p:spPr>
+          <a:xfrm>
+            <a:off x="2788920" y="4434840"/>
+            <a:ext cx="7223760" cy="777240"/>
+          </a:xfrm>
+          <a:prstGeom prst="rect">
+            <a:avLst/>
+          </a:prstGeom>
+          <a:noFill/>
+        </p:spPr>
+        <p:txBody>
+          <a:bodyPr wrap="square" lIns="45720" rIns="45720" tIns="27432" bIns="27432" anchor="ctr">
+            <a:spAutoFit/>
+          </a:bodyPr>
+          <a:lstStyle/>
+          <a:p>
+            <a:r>
+              <a:rPr sz="1800" b="1">
+                <a:solidFill>
+                  <a:srgbClr val="FFFFFF"/>
+                </a:solidFill>
+                <a:latin typeface="Inter"/>
+              </a:rPr>
+              <a:t>Types, feedback, sessions, prompts differ</a:t>
             </a:r>
           </a:p>
         </p:txBody>
@@ -6595,7 +7730,7 @@
 </p:sld>
 </file>
 
-<file path=ppt/slides/slide12.xml><?xml version="1.0" encoding="utf-8"?>
+<file path=ppt/slides/slide14.xml><?xml version="1.0" encoding="utf-8"?>
 <p:sld xmlns:a="http://schemas.openxmlformats.org/drawingml/2006/main" xmlns:p="http://schemas.openxmlformats.org/presentationml/2006/main" xmlns:r="http://schemas.openxmlformats.org/officeDocument/2006/relationships">
   <p:cSld>
     <p:bg>
@@ -6642,6 +7777,202 @@
                 </a:solidFill>
                 <a:latin typeface="Inter"/>
               </a:rPr>
+              <a:t>AI Agent Observability &amp; Cost Control · Section 12 · Lecture 12.2</a:t>
+            </a:r>
+          </a:p>
+        </p:txBody>
+      </p:sp>
+      <p:sp>
+        <p:nvSpPr>
+          <p:cNvPr id="3" name="TextBox 2"/>
+          <p:cNvSpPr txBox="1"/>
+          <p:nvPr/>
+        </p:nvSpPr>
+        <p:spPr>
+          <a:xfrm>
+            <a:off x="2377440" y="2286000"/>
+            <a:ext cx="1097280" cy="1097280"/>
+          </a:xfrm>
+          <a:prstGeom prst="rect">
+            <a:avLst/>
+          </a:prstGeom>
+          <a:noFill/>
+        </p:spPr>
+        <p:txBody>
+          <a:bodyPr wrap="square" lIns="45720" rIns="45720" tIns="27432" bIns="27432" anchor="ctr">
+            <a:spAutoFit/>
+          </a:bodyPr>
+          <a:lstStyle/>
+          <a:p>
+            <a:r>
+              <a:rPr sz="5400" b="1">
+                <a:solidFill>
+                  <a:srgbClr val="00D4AA"/>
+                </a:solidFill>
+                <a:latin typeface="Inter"/>
+              </a:rPr>
+              <a:t>→</a:t>
+            </a:r>
+          </a:p>
+        </p:txBody>
+      </p:sp>
+      <p:sp>
+        <p:nvSpPr>
+          <p:cNvPr id="4" name="TextBox 3"/>
+          <p:cNvSpPr txBox="1"/>
+          <p:nvPr/>
+        </p:nvSpPr>
+        <p:spPr>
+          <a:xfrm>
+            <a:off x="3566160" y="2148840"/>
+            <a:ext cx="7315200" cy="457200"/>
+          </a:xfrm>
+          <a:prstGeom prst="rect">
+            <a:avLst/>
+          </a:prstGeom>
+          <a:noFill/>
+        </p:spPr>
+        <p:txBody>
+          <a:bodyPr wrap="square" lIns="45720" rIns="45720" tIns="27432" bIns="27432" anchor="t">
+            <a:spAutoFit/>
+          </a:bodyPr>
+          <a:lstStyle/>
+          <a:p>
+            <a:r>
+              <a:rPr sz="1400" b="0">
+                <a:solidFill>
+                  <a:srgbClr val="94A3B8"/>
+                </a:solidFill>
+                <a:latin typeface="Inter"/>
+              </a:rPr>
+              <a:t>Next up:</a:t>
+            </a:r>
+          </a:p>
+        </p:txBody>
+      </p:sp>
+      <p:sp>
+        <p:nvSpPr>
+          <p:cNvPr id="5" name="TextBox 4"/>
+          <p:cNvSpPr txBox="1"/>
+          <p:nvPr/>
+        </p:nvSpPr>
+        <p:spPr>
+          <a:xfrm>
+            <a:off x="3566160" y="2560320"/>
+            <a:ext cx="7315200" cy="1097280"/>
+          </a:xfrm>
+          <a:prstGeom prst="rect">
+            <a:avLst/>
+          </a:prstGeom>
+          <a:noFill/>
+        </p:spPr>
+        <p:txBody>
+          <a:bodyPr wrap="square" lIns="45720" rIns="45720" tIns="27432" bIns="27432" anchor="t">
+            <a:spAutoFit/>
+          </a:bodyPr>
+          <a:lstStyle/>
+          <a:p>
+            <a:r>
+              <a:rPr sz="2600" b="1">
+                <a:solidFill>
+                  <a:srgbClr val="FFFFFF"/>
+                </a:solidFill>
+                <a:latin typeface="Inter"/>
+              </a:rPr>
+              <a:t>Arize Phoenix and OpenInference</a:t>
+            </a:r>
+          </a:p>
+        </p:txBody>
+      </p:sp>
+      <p:sp>
+        <p:nvSpPr>
+          <p:cNvPr id="6" name="TextBox 5"/>
+          <p:cNvSpPr txBox="1"/>
+          <p:nvPr/>
+        </p:nvSpPr>
+        <p:spPr>
+          <a:xfrm>
+            <a:off x="3566160" y="3703320"/>
+            <a:ext cx="7315200" cy="1097280"/>
+          </a:xfrm>
+          <a:prstGeom prst="rect">
+            <a:avLst/>
+          </a:prstGeom>
+          <a:noFill/>
+        </p:spPr>
+        <p:txBody>
+          <a:bodyPr wrap="square" lIns="45720" rIns="45720" tIns="27432" bIns="27432" anchor="t">
+            <a:spAutoFit/>
+          </a:bodyPr>
+          <a:lstStyle/>
+          <a:p>
+            <a:r>
+              <a:rPr sz="1400" b="0">
+                <a:solidFill>
+                  <a:srgbClr val="94A3B8"/>
+                </a:solidFill>
+                <a:latin typeface="Inter"/>
+              </a:rPr>
+              <a:t>Next, Arize Phoenix: no SDK swap at all, just point the OTLP exporter somewhere else, and meet a…</a:t>
+            </a:r>
+          </a:p>
+        </p:txBody>
+      </p:sp>
+    </p:spTree>
+  </p:cSld>
+  <p:clrMapOvr>
+    <a:masterClrMapping/>
+  </p:clrMapOvr>
+</p:sld>
+</file>
+
+<file path=ppt/slides/slide15.xml><?xml version="1.0" encoding="utf-8"?>
+<p:sld xmlns:a="http://schemas.openxmlformats.org/drawingml/2006/main" xmlns:p="http://schemas.openxmlformats.org/presentationml/2006/main" xmlns:r="http://schemas.openxmlformats.org/officeDocument/2006/relationships">
+  <p:cSld>
+    <p:bg>
+      <p:bgPr>
+        <a:solidFill>
+          <a:srgbClr val="0A1628"/>
+        </a:solidFill>
+        <a:effectLst/>
+      </p:bgPr>
+    </p:bg>
+    <p:spTree>
+      <p:nvGrpSpPr>
+        <p:cNvPr id="1" name=""/>
+        <p:cNvGrpSpPr/>
+        <p:nvPr/>
+      </p:nvGrpSpPr>
+      <p:grpSpPr/>
+      <p:sp>
+        <p:nvSpPr>
+          <p:cNvPr id="2" name="TextBox 1"/>
+          <p:cNvSpPr txBox="1"/>
+          <p:nvPr/>
+        </p:nvSpPr>
+        <p:spPr>
+          <a:xfrm>
+            <a:off x="457200" y="6419088"/>
+            <a:ext cx="8686800" cy="320040"/>
+          </a:xfrm>
+          <a:prstGeom prst="rect">
+            <a:avLst/>
+          </a:prstGeom>
+          <a:noFill/>
+        </p:spPr>
+        <p:txBody>
+          <a:bodyPr wrap="square" lIns="45720" rIns="45720" tIns="27432" bIns="27432" anchor="t">
+            <a:spAutoFit/>
+          </a:bodyPr>
+          <a:lstStyle/>
+          <a:p>
+            <a:r>
+              <a:rPr sz="900" b="0">
+                <a:solidFill>
+                  <a:srgbClr val="64748B"/>
+                </a:solidFill>
+                <a:latin typeface="Inter"/>
+              </a:rPr>
               <a:t>AI Agent Observability &amp; Cost Control · Section 12 · Lecture 12.3</a:t>
             </a:r>
           </a:p>
@@ -6844,7 +8175,7 @@
 </p:sld>
 </file>
 
-<file path=ppt/slides/slide13.xml><?xml version="1.0" encoding="utf-8"?>
+<file path=ppt/slides/slide16.xml><?xml version="1.0" encoding="utf-8"?>
 <p:sld xmlns:a="http://schemas.openxmlformats.org/drawingml/2006/main" xmlns:p="http://schemas.openxmlformats.org/presentationml/2006/main" xmlns:r="http://schemas.openxmlformats.org/officeDocument/2006/relationships">
   <p:cSld>
     <p:bg>
@@ -7497,735 +8828,6 @@
 </p:sld>
 </file>
 
-<file path=ppt/slides/slide14.xml><?xml version="1.0" encoding="utf-8"?>
-<p:sld xmlns:a="http://schemas.openxmlformats.org/drawingml/2006/main" xmlns:p="http://schemas.openxmlformats.org/presentationml/2006/main" xmlns:r="http://schemas.openxmlformats.org/officeDocument/2006/relationships">
-  <p:cSld>
-    <p:bg>
-      <p:bgPr>
-        <a:solidFill>
-          <a:srgbClr val="0A1628"/>
-        </a:solidFill>
-        <a:effectLst/>
-      </p:bgPr>
-    </p:bg>
-    <p:spTree>
-      <p:nvGrpSpPr>
-        <p:cNvPr id="1" name=""/>
-        <p:cNvGrpSpPr/>
-        <p:nvPr/>
-      </p:nvGrpSpPr>
-      <p:grpSpPr/>
-      <p:sp>
-        <p:nvSpPr>
-          <p:cNvPr id="2" name="TextBox 1"/>
-          <p:cNvSpPr txBox="1"/>
-          <p:nvPr/>
-        </p:nvSpPr>
-        <p:spPr>
-          <a:xfrm>
-            <a:off x="457200" y="6419088"/>
-            <a:ext cx="8686800" cy="320040"/>
-          </a:xfrm>
-          <a:prstGeom prst="rect">
-            <a:avLst/>
-          </a:prstGeom>
-          <a:noFill/>
-        </p:spPr>
-        <p:txBody>
-          <a:bodyPr wrap="square" lIns="45720" rIns="45720" tIns="27432" bIns="27432" anchor="t">
-            <a:spAutoFit/>
-          </a:bodyPr>
-          <a:lstStyle/>
-          <a:p>
-            <a:r>
-              <a:rPr sz="900" b="0">
-                <a:solidFill>
-                  <a:srgbClr val="64748B"/>
-                </a:solidFill>
-                <a:latin typeface="Inter"/>
-              </a:rPr>
-              <a:t>AI Agent Observability &amp; Cost Control · Section 12 · Lecture 12.3</a:t>
-            </a:r>
-          </a:p>
-        </p:txBody>
-      </p:sp>
-      <p:sp>
-        <p:nvSpPr>
-          <p:cNvPr id="3" name="TextBox 2"/>
-          <p:cNvSpPr txBox="1"/>
-          <p:nvPr/>
-        </p:nvSpPr>
-        <p:spPr>
-          <a:xfrm>
-            <a:off x="457200" y="411480"/>
-            <a:ext cx="11247120" cy="868680"/>
-          </a:xfrm>
-          <a:prstGeom prst="rect">
-            <a:avLst/>
-          </a:prstGeom>
-          <a:noFill/>
-        </p:spPr>
-        <p:txBody>
-          <a:bodyPr wrap="square" lIns="45720" rIns="45720" tIns="27432" bIns="27432" anchor="t">
-            <a:spAutoFit/>
-          </a:bodyPr>
-          <a:lstStyle/>
-          <a:p>
-            <a:pPr>
-              <a:lnSpc>
-                <a:spcPct val="110000"/>
-              </a:lnSpc>
-            </a:pPr>
-            <a:r>
-              <a:rPr sz="2600" b="1">
-                <a:solidFill>
-                  <a:srgbClr val="FFFFFF"/>
-                </a:solidFill>
-                <a:latin typeface="Inter"/>
-              </a:rPr>
-              <a:t>When Phoenix fits</a:t>
-            </a:r>
-          </a:p>
-        </p:txBody>
-      </p:sp>
-      <p:sp>
-        <p:nvSpPr>
-          <p:cNvPr id="4" name="Rectangle 3"/>
-          <p:cNvSpPr/>
-          <p:nvPr/>
-        </p:nvSpPr>
-        <p:spPr>
-          <a:xfrm>
-            <a:off x="502920" y="1024128"/>
-            <a:ext cx="822960" cy="54864"/>
-          </a:xfrm>
-          <a:prstGeom prst="rect">
-            <a:avLst/>
-          </a:prstGeom>
-          <a:solidFill>
-            <a:srgbClr val="00D4AA"/>
-          </a:solidFill>
-          <a:ln>
-            <a:noFill/>
-          </a:ln>
-          <a:effectLst/>
-        </p:spPr>
-        <p:style>
-          <a:lnRef idx="1">
-            <a:schemeClr val="accent1"/>
-          </a:lnRef>
-          <a:fillRef idx="3">
-            <a:schemeClr val="accent1"/>
-          </a:fillRef>
-          <a:effectRef idx="2">
-            <a:schemeClr val="accent1"/>
-          </a:effectRef>
-          <a:fontRef idx="minor">
-            <a:schemeClr val="lt1"/>
-          </a:fontRef>
-        </p:style>
-        <p:txBody>
-          <a:bodyPr rtlCol="0" anchor="ctr"/>
-          <a:lstStyle/>
-          <a:p/>
-        </p:txBody>
-      </p:sp>
-      <p:sp>
-        <p:nvSpPr>
-          <p:cNvPr id="5" name="TextBox 4"/>
-          <p:cNvSpPr txBox="1"/>
-          <p:nvPr/>
-        </p:nvSpPr>
-        <p:spPr>
-          <a:xfrm>
-            <a:off x="640080" y="1417320"/>
-            <a:ext cx="10881360" cy="4892040"/>
-          </a:xfrm>
-          <a:prstGeom prst="rect">
-            <a:avLst/>
-          </a:prstGeom>
-          <a:noFill/>
-        </p:spPr>
-        <p:txBody>
-          <a:bodyPr wrap="square" lIns="45720" rIns="45720" tIns="27432" bIns="27432" anchor="t">
-            <a:spAutoFit/>
-          </a:bodyPr>
-          <a:lstStyle/>
-          <a:p>
-            <a:pPr marL="292608" indent="-292608">
-              <a:lnSpc>
-                <a:spcPct val="120000"/>
-              </a:lnSpc>
-              <a:spcAft>
-                <a:spcPts val="1260"/>
-              </a:spcAft>
-              <a:buClr>
-                <a:srgbClr val="00D4AA"/>
-              </a:buClr>
-              <a:buFont typeface="Inter"/>
-              <a:buChar char="•"/>
-            </a:pPr>
-            <a:r>
-              <a:rPr sz="1800" b="0">
-                <a:solidFill>
-                  <a:srgbClr val="FFFFFF"/>
-                </a:solidFill>
-                <a:latin typeface="Inter"/>
-              </a:rPr>
-              <a:t>Local-first: one container, no account, good for laptops and air-gapped environments</a:t>
-            </a:r>
-          </a:p>
-          <a:p>
-            <a:pPr marL="292608" indent="-292608">
-              <a:lnSpc>
-                <a:spcPct val="120000"/>
-              </a:lnSpc>
-              <a:spcAft>
-                <a:spcPts val="1260"/>
-              </a:spcAft>
-              <a:buClr>
-                <a:srgbClr val="00D4AA"/>
-              </a:buClr>
-              <a:buFont typeface="Inter"/>
-              <a:buChar char="•"/>
-            </a:pPr>
-            <a:r>
-              <a:rPr sz="1800" b="0">
-                <a:solidFill>
-                  <a:srgbClr val="FFFFFF"/>
-                </a:solidFill>
-                <a:latin typeface="Inter"/>
-              </a:rPr>
-              <a:t>Open source with a hosted option (Arize AX) for teams</a:t>
-            </a:r>
-          </a:p>
-          <a:p>
-            <a:pPr marL="292608" indent="-292608">
-              <a:lnSpc>
-                <a:spcPct val="120000"/>
-              </a:lnSpc>
-              <a:spcAft>
-                <a:spcPts val="1260"/>
-              </a:spcAft>
-              <a:buClr>
-                <a:srgbClr val="00D4AA"/>
-              </a:buClr>
-              <a:buFont typeface="Inter"/>
-              <a:buChar char="•"/>
-            </a:pPr>
-            <a:r>
-              <a:rPr sz="1800" b="0">
-                <a:solidFill>
-                  <a:srgbClr val="FFFFFF"/>
-                </a:solidFill>
-                <a:latin typeface="Inter"/>
-              </a:rPr>
-              <a:t>Strong on RAG and retrieval debugging; OpenInference is its native tongue</a:t>
-            </a:r>
-          </a:p>
-          <a:p>
-            <a:pPr marL="292608" indent="-292608">
-              <a:lnSpc>
-                <a:spcPct val="120000"/>
-              </a:lnSpc>
-              <a:spcAft>
-                <a:spcPts val="1260"/>
-              </a:spcAft>
-              <a:buClr>
-                <a:srgbClr val="00D4AA"/>
-              </a:buClr>
-              <a:buFont typeface="Inter"/>
-              <a:buChar char="•"/>
-            </a:pPr>
-            <a:r>
-              <a:rPr sz="1800" b="0">
-                <a:solidFill>
-                  <a:srgbClr val="FFFFFF"/>
-                </a:solidFill>
-                <a:latin typeface="Inter"/>
-              </a:rPr>
-              <a:t>Weaker fit if you need prompt management with labels the way Incident 3 used them; verify current features</a:t>
-            </a:r>
-          </a:p>
-          <a:p>
-            <a:pPr marL="292608" indent="-292608">
-              <a:lnSpc>
-                <a:spcPct val="120000"/>
-              </a:lnSpc>
-              <a:spcAft>
-                <a:spcPts val="1260"/>
-              </a:spcAft>
-              <a:buClr>
-                <a:srgbClr val="00D4AA"/>
-              </a:buClr>
-              <a:buFont typeface="Inter"/>
-              <a:buChar char="•"/>
-            </a:pPr>
-            <a:r>
-              <a:rPr sz="1800" b="0">
-                <a:solidFill>
-                  <a:srgbClr val="FFFFFF"/>
-                </a:solidFill>
-                <a:latin typeface="Inter"/>
-              </a:rPr>
-              <a:t>Best paired with the Collector: Langfuse for prompts and scores, Phoenix for local debugging</a:t>
-            </a:r>
-          </a:p>
-        </p:txBody>
-      </p:sp>
-    </p:spTree>
-  </p:cSld>
-  <p:clrMapOvr>
-    <a:masterClrMapping/>
-  </p:clrMapOvr>
-</p:sld>
-</file>
-
-<file path=ppt/slides/slide15.xml><?xml version="1.0" encoding="utf-8"?>
-<p:sld xmlns:a="http://schemas.openxmlformats.org/drawingml/2006/main" xmlns:p="http://schemas.openxmlformats.org/presentationml/2006/main" xmlns:r="http://schemas.openxmlformats.org/officeDocument/2006/relationships">
-  <p:cSld>
-    <p:bg>
-      <p:bgPr>
-        <a:solidFill>
-          <a:srgbClr val="0A1628"/>
-        </a:solidFill>
-        <a:effectLst/>
-      </p:bgPr>
-    </p:bg>
-    <p:spTree>
-      <p:nvGrpSpPr>
-        <p:cNvPr id="1" name=""/>
-        <p:cNvGrpSpPr/>
-        <p:nvPr/>
-      </p:nvGrpSpPr>
-      <p:grpSpPr/>
-      <p:sp>
-        <p:nvSpPr>
-          <p:cNvPr id="2" name="TextBox 1"/>
-          <p:cNvSpPr txBox="1"/>
-          <p:nvPr/>
-        </p:nvSpPr>
-        <p:spPr>
-          <a:xfrm>
-            <a:off x="457200" y="6419088"/>
-            <a:ext cx="8686800" cy="320040"/>
-          </a:xfrm>
-          <a:prstGeom prst="rect">
-            <a:avLst/>
-          </a:prstGeom>
-          <a:noFill/>
-        </p:spPr>
-        <p:txBody>
-          <a:bodyPr wrap="square" lIns="45720" rIns="45720" tIns="27432" bIns="27432" anchor="t">
-            <a:spAutoFit/>
-          </a:bodyPr>
-          <a:lstStyle/>
-          <a:p>
-            <a:r>
-              <a:rPr sz="900" b="0">
-                <a:solidFill>
-                  <a:srgbClr val="64748B"/>
-                </a:solidFill>
-                <a:latin typeface="Inter"/>
-              </a:rPr>
-              <a:t>AI Agent Observability &amp; Cost Control · Section 12 · Lecture 12.3</a:t>
-            </a:r>
-          </a:p>
-        </p:txBody>
-      </p:sp>
-      <p:sp>
-        <p:nvSpPr>
-          <p:cNvPr id="3" name="TextBox 2"/>
-          <p:cNvSpPr txBox="1"/>
-          <p:nvPr/>
-        </p:nvSpPr>
-        <p:spPr>
-          <a:xfrm>
-            <a:off x="2377440" y="2286000"/>
-            <a:ext cx="1097280" cy="1097280"/>
-          </a:xfrm>
-          <a:prstGeom prst="rect">
-            <a:avLst/>
-          </a:prstGeom>
-          <a:noFill/>
-        </p:spPr>
-        <p:txBody>
-          <a:bodyPr wrap="square" lIns="45720" rIns="45720" tIns="27432" bIns="27432" anchor="ctr">
-            <a:spAutoFit/>
-          </a:bodyPr>
-          <a:lstStyle/>
-          <a:p>
-            <a:r>
-              <a:rPr sz="5400" b="1">
-                <a:solidFill>
-                  <a:srgbClr val="00D4AA"/>
-                </a:solidFill>
-                <a:latin typeface="Inter"/>
-              </a:rPr>
-              <a:t>→</a:t>
-            </a:r>
-          </a:p>
-        </p:txBody>
-      </p:sp>
-      <p:sp>
-        <p:nvSpPr>
-          <p:cNvPr id="4" name="TextBox 3"/>
-          <p:cNvSpPr txBox="1"/>
-          <p:nvPr/>
-        </p:nvSpPr>
-        <p:spPr>
-          <a:xfrm>
-            <a:off x="3566160" y="2148840"/>
-            <a:ext cx="7315200" cy="457200"/>
-          </a:xfrm>
-          <a:prstGeom prst="rect">
-            <a:avLst/>
-          </a:prstGeom>
-          <a:noFill/>
-        </p:spPr>
-        <p:txBody>
-          <a:bodyPr wrap="square" lIns="45720" rIns="45720" tIns="27432" bIns="27432" anchor="t">
-            <a:spAutoFit/>
-          </a:bodyPr>
-          <a:lstStyle/>
-          <a:p>
-            <a:r>
-              <a:rPr sz="1400" b="0">
-                <a:solidFill>
-                  <a:srgbClr val="94A3B8"/>
-                </a:solidFill>
-                <a:latin typeface="Inter"/>
-              </a:rPr>
-              <a:t>Next up:</a:t>
-            </a:r>
-          </a:p>
-        </p:txBody>
-      </p:sp>
-      <p:sp>
-        <p:nvSpPr>
-          <p:cNvPr id="5" name="TextBox 4"/>
-          <p:cNvSpPr txBox="1"/>
-          <p:nvPr/>
-        </p:nvSpPr>
-        <p:spPr>
-          <a:xfrm>
-            <a:off x="3566160" y="2560320"/>
-            <a:ext cx="7315200" cy="1097280"/>
-          </a:xfrm>
-          <a:prstGeom prst="rect">
-            <a:avLst/>
-          </a:prstGeom>
-          <a:noFill/>
-        </p:spPr>
-        <p:txBody>
-          <a:bodyPr wrap="square" lIns="45720" rIns="45720" tIns="27432" bIns="27432" anchor="t">
-            <a:spAutoFit/>
-          </a:bodyPr>
-          <a:lstStyle/>
-          <a:p>
-            <a:r>
-              <a:rPr sz="2600" b="1">
-                <a:solidFill>
-                  <a:srgbClr val="FFFFFF"/>
-                </a:solidFill>
-                <a:latin typeface="Inter"/>
-              </a:rPr>
-              <a:t>OpenLLMetry, Datadog and the enterprise APMs</a:t>
-            </a:r>
-          </a:p>
-        </p:txBody>
-      </p:sp>
-      <p:sp>
-        <p:nvSpPr>
-          <p:cNvPr id="6" name="TextBox 5"/>
-          <p:cNvSpPr txBox="1"/>
-          <p:nvPr/>
-        </p:nvSpPr>
-        <p:spPr>
-          <a:xfrm>
-            <a:off x="3566160" y="3703320"/>
-            <a:ext cx="7315200" cy="1097280"/>
-          </a:xfrm>
-          <a:prstGeom prst="rect">
-            <a:avLst/>
-          </a:prstGeom>
-          <a:noFill/>
-        </p:spPr>
-        <p:txBody>
-          <a:bodyPr wrap="square" lIns="45720" rIns="45720" tIns="27432" bIns="27432" anchor="t">
-            <a:spAutoFit/>
-          </a:bodyPr>
-          <a:lstStyle/>
-          <a:p>
-            <a:r>
-              <a:rPr sz="1400" b="0">
-                <a:solidFill>
-                  <a:srgbClr val="94A3B8"/>
-                </a:solidFill>
-                <a:latin typeface="Inter"/>
-              </a:rPr>
-              <a:t>Next, OpenLLMetry, Datadog and the enterprise APMs, and how to live in a hybrid setup without instrumenting twice.</a:t>
-            </a:r>
-          </a:p>
-        </p:txBody>
-      </p:sp>
-    </p:spTree>
-  </p:cSld>
-  <p:clrMapOvr>
-    <a:masterClrMapping/>
-  </p:clrMapOvr>
-</p:sld>
-</file>
-
-<file path=ppt/slides/slide16.xml><?xml version="1.0" encoding="utf-8"?>
-<p:sld xmlns:a="http://schemas.openxmlformats.org/drawingml/2006/main" xmlns:p="http://schemas.openxmlformats.org/presentationml/2006/main" xmlns:r="http://schemas.openxmlformats.org/officeDocument/2006/relationships">
-  <p:cSld>
-    <p:bg>
-      <p:bgPr>
-        <a:solidFill>
-          <a:srgbClr val="0A1628"/>
-        </a:solidFill>
-        <a:effectLst/>
-      </p:bgPr>
-    </p:bg>
-    <p:spTree>
-      <p:nvGrpSpPr>
-        <p:cNvPr id="1" name=""/>
-        <p:cNvGrpSpPr/>
-        <p:nvPr/>
-      </p:nvGrpSpPr>
-      <p:grpSpPr/>
-      <p:sp>
-        <p:nvSpPr>
-          <p:cNvPr id="2" name="TextBox 1"/>
-          <p:cNvSpPr txBox="1"/>
-          <p:nvPr/>
-        </p:nvSpPr>
-        <p:spPr>
-          <a:xfrm>
-            <a:off x="457200" y="6419088"/>
-            <a:ext cx="8686800" cy="320040"/>
-          </a:xfrm>
-          <a:prstGeom prst="rect">
-            <a:avLst/>
-          </a:prstGeom>
-          <a:noFill/>
-        </p:spPr>
-        <p:txBody>
-          <a:bodyPr wrap="square" lIns="45720" rIns="45720" tIns="27432" bIns="27432" anchor="t">
-            <a:spAutoFit/>
-          </a:bodyPr>
-          <a:lstStyle/>
-          <a:p>
-            <a:r>
-              <a:rPr sz="900" b="0">
-                <a:solidFill>
-                  <a:srgbClr val="64748B"/>
-                </a:solidFill>
-                <a:latin typeface="Inter"/>
-              </a:rPr>
-              <a:t>AI Agent Observability &amp; Cost Control · Section 12 · Lecture 12.4</a:t>
-            </a:r>
-          </a:p>
-        </p:txBody>
-      </p:sp>
-      <p:sp>
-        <p:nvSpPr>
-          <p:cNvPr id="3" name="TextBox 2"/>
-          <p:cNvSpPr txBox="1"/>
-          <p:nvPr/>
-        </p:nvSpPr>
-        <p:spPr>
-          <a:xfrm>
-            <a:off x="6675120" y="320040"/>
-            <a:ext cx="5074920" cy="548640"/>
-          </a:xfrm>
-          <a:prstGeom prst="rect">
-            <a:avLst/>
-          </a:prstGeom>
-          <a:noFill/>
-        </p:spPr>
-        <p:txBody>
-          <a:bodyPr wrap="square" lIns="45720" rIns="45720" tIns="27432" bIns="27432" anchor="t">
-            <a:spAutoFit/>
-          </a:bodyPr>
-          <a:lstStyle/>
-          <a:p>
-            <a:pPr algn="r"/>
-            <a:r>
-              <a:rPr sz="1000" b="0">
-                <a:solidFill>
-                  <a:srgbClr val="94A3B8"/>
-                </a:solidFill>
-                <a:latin typeface="Inter"/>
-              </a:rPr>
-              <a:t>SECTION 12 · PORTABILITY AND ALTERNATIVES</a:t>
-            </a:r>
-          </a:p>
-        </p:txBody>
-      </p:sp>
-      <p:sp>
-        <p:nvSpPr>
-          <p:cNvPr id="4" name="TextBox 3"/>
-          <p:cNvSpPr txBox="1"/>
-          <p:nvPr/>
-        </p:nvSpPr>
-        <p:spPr>
-          <a:xfrm>
-            <a:off x="914400" y="1417320"/>
-            <a:ext cx="10332720" cy="457200"/>
-          </a:xfrm>
-          <a:prstGeom prst="rect">
-            <a:avLst/>
-          </a:prstGeom>
-          <a:noFill/>
-        </p:spPr>
-        <p:txBody>
-          <a:bodyPr wrap="square" lIns="45720" rIns="45720" tIns="27432" bIns="27432" anchor="t">
-            <a:spAutoFit/>
-          </a:bodyPr>
-          <a:lstStyle/>
-          <a:p>
-            <a:r>
-              <a:rPr sz="1200" b="1">
-                <a:solidFill>
-                  <a:srgbClr val="00D4AA"/>
-                </a:solidFill>
-                <a:latin typeface="Inter"/>
-              </a:rPr>
-              <a:t>LECTURE 12.4</a:t>
-            </a:r>
-          </a:p>
-        </p:txBody>
-      </p:sp>
-      <p:sp>
-        <p:nvSpPr>
-          <p:cNvPr id="5" name="TextBox 4"/>
-          <p:cNvSpPr txBox="1"/>
-          <p:nvPr/>
-        </p:nvSpPr>
-        <p:spPr>
-          <a:xfrm>
-            <a:off x="914400" y="1874519"/>
-            <a:ext cx="10332720" cy="1645920"/>
-          </a:xfrm>
-          <a:prstGeom prst="rect">
-            <a:avLst/>
-          </a:prstGeom>
-          <a:noFill/>
-        </p:spPr>
-        <p:txBody>
-          <a:bodyPr wrap="square" lIns="45720" rIns="45720" tIns="27432" bIns="27432" anchor="t">
-            <a:spAutoFit/>
-          </a:bodyPr>
-          <a:lstStyle/>
-          <a:p>
-            <a:pPr>
-              <a:lnSpc>
-                <a:spcPct val="110000"/>
-              </a:lnSpc>
-            </a:pPr>
-            <a:r>
-              <a:rPr sz="3000" b="1">
-                <a:solidFill>
-                  <a:srgbClr val="FFFFFF"/>
-                </a:solidFill>
-                <a:latin typeface="Inter"/>
-              </a:rPr>
-              <a:t>OpenLLMetry, Datadog and the enterprise APMs</a:t>
-            </a:r>
-          </a:p>
-        </p:txBody>
-      </p:sp>
-      <p:sp>
-        <p:nvSpPr>
-          <p:cNvPr id="6" name="Rectangle 5"/>
-          <p:cNvSpPr/>
-          <p:nvPr/>
-        </p:nvSpPr>
-        <p:spPr>
-          <a:xfrm>
-            <a:off x="914400" y="3794760"/>
-            <a:ext cx="64008" cy="1143000"/>
-          </a:xfrm>
-          <a:prstGeom prst="rect">
-            <a:avLst/>
-          </a:prstGeom>
-          <a:solidFill>
-            <a:srgbClr val="00D4AA"/>
-          </a:solidFill>
-          <a:ln>
-            <a:noFill/>
-          </a:ln>
-          <a:effectLst/>
-        </p:spPr>
-        <p:style>
-          <a:lnRef idx="1">
-            <a:schemeClr val="accent1"/>
-          </a:lnRef>
-          <a:fillRef idx="3">
-            <a:schemeClr val="accent1"/>
-          </a:fillRef>
-          <a:effectRef idx="2">
-            <a:schemeClr val="accent1"/>
-          </a:effectRef>
-          <a:fontRef idx="minor">
-            <a:schemeClr val="lt1"/>
-          </a:fontRef>
-        </p:style>
-        <p:txBody>
-          <a:bodyPr rtlCol="0" anchor="ctr"/>
-          <a:lstStyle/>
-          <a:p/>
-        </p:txBody>
-      </p:sp>
-      <p:sp>
-        <p:nvSpPr>
-          <p:cNvPr id="7" name="TextBox 6"/>
-          <p:cNvSpPr txBox="1"/>
-          <p:nvPr/>
-        </p:nvSpPr>
-        <p:spPr>
-          <a:xfrm>
-            <a:off x="1188720" y="3749039"/>
-            <a:ext cx="9692640" cy="1280160"/>
-          </a:xfrm>
-          <a:prstGeom prst="rect">
-            <a:avLst/>
-          </a:prstGeom>
-          <a:noFill/>
-        </p:spPr>
-        <p:txBody>
-          <a:bodyPr wrap="square" lIns="45720" rIns="45720" tIns="27432" bIns="27432" anchor="ctr">
-            <a:spAutoFit/>
-          </a:bodyPr>
-          <a:lstStyle/>
-          <a:p>
-            <a:pPr>
-              <a:lnSpc>
-                <a:spcPct val="130000"/>
-              </a:lnSpc>
-            </a:pPr>
-            <a:r>
-              <a:rPr sz="1600" b="0">
-                <a:solidFill>
-                  <a:srgbClr val="CBD5E1"/>
-                </a:solidFill>
-                <a:latin typeface="Inter"/>
-              </a:rPr>
-              <a:t>Place OpenLLMetry, Datadog LLM Observability and the other APM add-ons in the same layer model as Langfuse, LangSmith and Phoenix.</a:t>
-            </a:r>
-          </a:p>
-        </p:txBody>
-      </p:sp>
-    </p:spTree>
-  </p:cSld>
-  <p:clrMapOvr>
-    <a:masterClrMapping/>
-  </p:clrMapOvr>
-</p:sld>
-</file>
-
 <file path=ppt/slides/slide17.xml><?xml version="1.0" encoding="utf-8"?>
 <p:sld xmlns:a="http://schemas.openxmlformats.org/drawingml/2006/main" xmlns:p="http://schemas.openxmlformats.org/presentationml/2006/main" xmlns:r="http://schemas.openxmlformats.org/officeDocument/2006/relationships">
   <p:cSld>
@@ -8273,7 +8875,7 @@
                 </a:solidFill>
                 <a:latin typeface="Inter"/>
               </a:rPr>
-              <a:t>AI Agent Observability &amp; Cost Control · Section 12 · Lecture 12.4</a:t>
+              <a:t>AI Agent Observability &amp; Cost Control · Section 12 · Lecture 12.3</a:t>
             </a:r>
           </a:p>
         </p:txBody>
@@ -8312,7 +8914,7 @@
                 </a:solidFill>
                 <a:latin typeface="Inter"/>
               </a:rPr>
-              <a:t>Two more families</a:t>
+              <a:t>When Phoenix fits</a:t>
             </a:r>
           </a:p>
         </p:txBody>
@@ -8401,7 +9003,7 @@
                 </a:solidFill>
                 <a:latin typeface="Inter"/>
               </a:rPr>
-              <a:t>OpenLLMetry (Traceloop): an open-source SDK that emits OTel spans with GenAI attributes from many LLM libraries; ships to any OTLP backend</a:t>
+              <a:t>Local-first: one container, no account, good for laptops and air-gapped environments</a:t>
             </a:r>
           </a:p>
           <a:p>
@@ -8425,7 +9027,7 @@
                 </a:solidFill>
                 <a:latin typeface="Inter"/>
               </a:rPr>
-              <a:t>APM add-ons: Datadog LLM Observability, New Relic AI Monitoring, Dynatrace, Grafana Cloud, Splunk; LLM views inside the APM you already pay for</a:t>
+              <a:t>Open source with a hosted option (Arize AX) for teams</a:t>
             </a:r>
           </a:p>
           <a:p>
@@ -8449,7 +9051,55 @@
                 </a:solidFill>
                 <a:latin typeface="Inter"/>
               </a:rPr>
-              <a:t>Both sit in the same layers as everything else: instrumentation at the bottom, storage and features at the top</a:t>
+              <a:t>Strong on RAG and retrieval debugging; OpenInference is its native tongue</a:t>
+            </a:r>
+          </a:p>
+          <a:p>
+            <a:pPr marL="292608" indent="-292608">
+              <a:lnSpc>
+                <a:spcPct val="120000"/>
+              </a:lnSpc>
+              <a:spcAft>
+                <a:spcPts val="1260"/>
+              </a:spcAft>
+              <a:buClr>
+                <a:srgbClr val="00D4AA"/>
+              </a:buClr>
+              <a:buFont typeface="Inter"/>
+              <a:buChar char="•"/>
+            </a:pPr>
+            <a:r>
+              <a:rPr sz="1800" b="0">
+                <a:solidFill>
+                  <a:srgbClr val="FFFFFF"/>
+                </a:solidFill>
+                <a:latin typeface="Inter"/>
+              </a:rPr>
+              <a:t>Weaker fit if you need prompt management with labels the way Incident 3 used them; verify current features</a:t>
+            </a:r>
+          </a:p>
+          <a:p>
+            <a:pPr marL="292608" indent="-292608">
+              <a:lnSpc>
+                <a:spcPct val="120000"/>
+              </a:lnSpc>
+              <a:spcAft>
+                <a:spcPts val="1260"/>
+              </a:spcAft>
+              <a:buClr>
+                <a:srgbClr val="00D4AA"/>
+              </a:buClr>
+              <a:buFont typeface="Inter"/>
+              <a:buChar char="•"/>
+            </a:pPr>
+            <a:r>
+              <a:rPr sz="1800" b="0">
+                <a:solidFill>
+                  <a:srgbClr val="FFFFFF"/>
+                </a:solidFill>
+                <a:latin typeface="Inter"/>
+              </a:rPr>
+              <a:t>Best paired with the Collector: Langfuse for prompts and scores, Phoenix for local debugging</a:t>
             </a:r>
           </a:p>
         </p:txBody>
@@ -8509,7 +9159,7 @@
                 </a:solidFill>
                 <a:latin typeface="Inter"/>
               </a:rPr>
-              <a:t>AI Agent Observability &amp; Cost Control · Section 12 · Lecture 12.4</a:t>
+              <a:t>AI Agent Observability &amp; Cost Control · Section 12 · Lecture 12.3</a:t>
             </a:r>
           </a:p>
         </p:txBody>
@@ -8522,8 +9172,8 @@
         </p:nvSpPr>
         <p:spPr>
           <a:xfrm>
-            <a:off x="457200" y="411480"/>
-            <a:ext cx="11247120" cy="868680"/>
+            <a:off x="1371600" y="822960"/>
+            <a:ext cx="9418320" cy="457200"/>
           </a:xfrm>
           <a:prstGeom prst="rect">
             <a:avLst/>
@@ -8536,11 +9186,42 @@
           </a:bodyPr>
           <a:lstStyle/>
           <a:p>
-            <a:pPr>
-              <a:lnSpc>
-                <a:spcPct val="110000"/>
-              </a:lnSpc>
-            </a:pPr>
+            <a:pPr algn="ctr"/>
+            <a:r>
+              <a:rPr sz="1200" b="1">
+                <a:solidFill>
+                  <a:srgbClr val="00D4AA"/>
+                </a:solidFill>
+                <a:latin typeface="Inter"/>
+              </a:rPr>
+              <a:t>RECAP</a:t>
+            </a:r>
+          </a:p>
+        </p:txBody>
+      </p:sp>
+      <p:sp>
+        <p:nvSpPr>
+          <p:cNvPr id="4" name="TextBox 3"/>
+          <p:cNvSpPr txBox="1"/>
+          <p:nvPr/>
+        </p:nvSpPr>
+        <p:spPr>
+          <a:xfrm>
+            <a:off x="1371600" y="1234440"/>
+            <a:ext cx="9418320" cy="822960"/>
+          </a:xfrm>
+          <a:prstGeom prst="rect">
+            <a:avLst/>
+          </a:prstGeom>
+          <a:noFill/>
+        </p:spPr>
+        <p:txBody>
+          <a:bodyPr wrap="square" lIns="45720" rIns="45720" tIns="27432" bIns="27432" anchor="t">
+            <a:spAutoFit/>
+          </a:bodyPr>
+          <a:lstStyle/>
+          <a:p>
+            <a:pPr algn="ctr"/>
             <a:r>
               <a:rPr sz="2600" b="1">
                 <a:solidFill>
@@ -8548,27 +9229,29 @@
                 </a:solidFill>
                 <a:latin typeface="Inter"/>
               </a:rPr>
-              <a:t>What the APMs do well</a:t>
-            </a:r>
-          </a:p>
-        </p:txBody>
-      </p:sp>
-      <p:sp>
-        <p:nvSpPr>
-          <p:cNvPr id="4" name="Rectangle 3"/>
+              <a:t>Key takeaways</a:t>
+            </a:r>
+          </a:p>
+        </p:txBody>
+      </p:sp>
+      <p:sp>
+        <p:nvSpPr>
+          <p:cNvPr id="5" name="Rounded Rectangle 4"/>
           <p:cNvSpPr/>
           <p:nvPr/>
         </p:nvSpPr>
         <p:spPr>
           <a:xfrm>
-            <a:off x="502920" y="1024128"/>
-            <a:ext cx="822960" cy="54864"/>
-          </a:xfrm>
-          <a:prstGeom prst="rect">
-            <a:avLst/>
+            <a:off x="2011680" y="2514600"/>
+            <a:ext cx="8138160" cy="777240"/>
+          </a:xfrm>
+          <a:prstGeom prst="roundRect">
+            <a:avLst>
+              <a:gd name="adj" fmla="val 6588"/>
+            </a:avLst>
           </a:prstGeom>
           <a:solidFill>
-            <a:srgbClr val="00D4AA"/>
+            <a:srgbClr val="1A2742"/>
           </a:solidFill>
           <a:ln>
             <a:noFill/>
@@ -8597,14 +9280,14 @@
       </p:sp>
       <p:sp>
         <p:nvSpPr>
-          <p:cNvPr id="5" name="TextBox 4"/>
+          <p:cNvPr id="6" name="TextBox 5"/>
           <p:cNvSpPr txBox="1"/>
           <p:nvPr/>
         </p:nvSpPr>
         <p:spPr>
           <a:xfrm>
-            <a:off x="640080" y="1417320"/>
-            <a:ext cx="10881360" cy="4892040"/>
+            <a:off x="2194560" y="2514600"/>
+            <a:ext cx="548640" cy="777240"/>
           </a:xfrm>
           <a:prstGeom prst="rect">
             <a:avLst/>
@@ -8612,104 +9295,277 @@
           <a:noFill/>
         </p:spPr>
         <p:txBody>
-          <a:bodyPr wrap="square" lIns="45720" rIns="45720" tIns="27432" bIns="27432" anchor="t">
+          <a:bodyPr wrap="square" lIns="45720" rIns="45720" tIns="27432" bIns="27432" anchor="ctr">
             <a:spAutoFit/>
           </a:bodyPr>
           <a:lstStyle/>
           <a:p>
-            <a:pPr marL="292608" indent="-292608">
-              <a:lnSpc>
-                <a:spcPct val="120000"/>
-              </a:lnSpc>
-              <a:spcAft>
-                <a:spcPts val="1260"/>
-              </a:spcAft>
-              <a:buClr>
-                <a:srgbClr val="00D4AA"/>
-              </a:buClr>
-              <a:buFont typeface="Inter"/>
-              <a:buChar char="•"/>
-            </a:pPr>
-            <a:r>
-              <a:rPr sz="1800" b="0">
+            <a:r>
+              <a:rPr sz="2200" b="1">
+                <a:solidFill>
+                  <a:srgbClr val="00D4AA"/>
+                </a:solidFill>
+                <a:latin typeface="Inter"/>
+              </a:rPr>
+              <a:t>✓</a:t>
+            </a:r>
+          </a:p>
+        </p:txBody>
+      </p:sp>
+      <p:sp>
+        <p:nvSpPr>
+          <p:cNvPr id="7" name="TextBox 6"/>
+          <p:cNvSpPr txBox="1"/>
+          <p:nvPr/>
+        </p:nvSpPr>
+        <p:spPr>
+          <a:xfrm>
+            <a:off x="2788920" y="2514600"/>
+            <a:ext cx="7223760" cy="777240"/>
+          </a:xfrm>
+          <a:prstGeom prst="rect">
+            <a:avLst/>
+          </a:prstGeom>
+          <a:noFill/>
+        </p:spPr>
+        <p:txBody>
+          <a:bodyPr wrap="square" lIns="45720" rIns="45720" tIns="27432" bIns="27432" anchor="ctr">
+            <a:spAutoFit/>
+          </a:bodyPr>
+          <a:lstStyle/>
+          <a:p>
+            <a:r>
+              <a:rPr sz="1800" b="1">
                 <a:solidFill>
                   <a:srgbClr val="FFFFFF"/>
                 </a:solidFill>
                 <a:latin typeface="Inter"/>
               </a:rPr>
-              <a:t>Correlation: the LLM span next to the HTTP span, the database span and the host metrics</a:t>
-            </a:r>
-          </a:p>
-          <a:p>
-            <a:pPr marL="292608" indent="-292608">
-              <a:lnSpc>
-                <a:spcPct val="120000"/>
-              </a:lnSpc>
-              <a:spcAft>
-                <a:spcPts val="1260"/>
-              </a:spcAft>
-              <a:buClr>
-                <a:srgbClr val="00D4AA"/>
-              </a:buClr>
-              <a:buFont typeface="Inter"/>
-              <a:buChar char="•"/>
-            </a:pPr>
-            <a:r>
-              <a:rPr sz="1800" b="0">
+              <a:t>Phoenix is just another OTLP endpoint</a:t>
+            </a:r>
+          </a:p>
+        </p:txBody>
+      </p:sp>
+      <p:sp>
+        <p:nvSpPr>
+          <p:cNvPr id="8" name="Rounded Rectangle 7"/>
+          <p:cNvSpPr/>
+          <p:nvPr/>
+        </p:nvSpPr>
+        <p:spPr>
+          <a:xfrm>
+            <a:off x="2011680" y="3474720"/>
+            <a:ext cx="8138160" cy="777240"/>
+          </a:xfrm>
+          <a:prstGeom prst="roundRect">
+            <a:avLst>
+              <a:gd name="adj" fmla="val 6588"/>
+            </a:avLst>
+          </a:prstGeom>
+          <a:solidFill>
+            <a:srgbClr val="1A2742"/>
+          </a:solidFill>
+          <a:ln>
+            <a:noFill/>
+          </a:ln>
+          <a:effectLst/>
+        </p:spPr>
+        <p:style>
+          <a:lnRef idx="1">
+            <a:schemeClr val="accent1"/>
+          </a:lnRef>
+          <a:fillRef idx="3">
+            <a:schemeClr val="accent1"/>
+          </a:fillRef>
+          <a:effectRef idx="2">
+            <a:schemeClr val="accent1"/>
+          </a:effectRef>
+          <a:fontRef idx="minor">
+            <a:schemeClr val="lt1"/>
+          </a:fontRef>
+        </p:style>
+        <p:txBody>
+          <a:bodyPr rtlCol="0" anchor="ctr"/>
+          <a:lstStyle/>
+          <a:p/>
+        </p:txBody>
+      </p:sp>
+      <p:sp>
+        <p:nvSpPr>
+          <p:cNvPr id="9" name="TextBox 8"/>
+          <p:cNvSpPr txBox="1"/>
+          <p:nvPr/>
+        </p:nvSpPr>
+        <p:spPr>
+          <a:xfrm>
+            <a:off x="2194560" y="3474720"/>
+            <a:ext cx="548640" cy="777240"/>
+          </a:xfrm>
+          <a:prstGeom prst="rect">
+            <a:avLst/>
+          </a:prstGeom>
+          <a:noFill/>
+        </p:spPr>
+        <p:txBody>
+          <a:bodyPr wrap="square" lIns="45720" rIns="45720" tIns="27432" bIns="27432" anchor="ctr">
+            <a:spAutoFit/>
+          </a:bodyPr>
+          <a:lstStyle/>
+          <a:p>
+            <a:r>
+              <a:rPr sz="2200" b="1">
+                <a:solidFill>
+                  <a:srgbClr val="00D4AA"/>
+                </a:solidFill>
+                <a:latin typeface="Inter"/>
+              </a:rPr>
+              <a:t>✓</a:t>
+            </a:r>
+          </a:p>
+        </p:txBody>
+      </p:sp>
+      <p:sp>
+        <p:nvSpPr>
+          <p:cNvPr id="10" name="TextBox 9"/>
+          <p:cNvSpPr txBox="1"/>
+          <p:nvPr/>
+        </p:nvSpPr>
+        <p:spPr>
+          <a:xfrm>
+            <a:off x="2788920" y="3474720"/>
+            <a:ext cx="7223760" cy="777240"/>
+          </a:xfrm>
+          <a:prstGeom prst="rect">
+            <a:avLst/>
+          </a:prstGeom>
+          <a:noFill/>
+        </p:spPr>
+        <p:txBody>
+          <a:bodyPr wrap="square" lIns="45720" rIns="45720" tIns="27432" bIns="27432" anchor="ctr">
+            <a:spAutoFit/>
+          </a:bodyPr>
+          <a:lstStyle/>
+          <a:p>
+            <a:r>
+              <a:rPr sz="1800" b="1">
                 <a:solidFill>
                   <a:srgbClr val="FFFFFF"/>
                 </a:solidFill>
                 <a:latin typeface="Inter"/>
               </a:rPr>
-              <a:t>Paging: the on-call rotation, escalation policies and runbooks already live there</a:t>
-            </a:r>
-          </a:p>
-          <a:p>
-            <a:pPr marL="292608" indent="-292608">
-              <a:lnSpc>
-                <a:spcPct val="120000"/>
-              </a:lnSpc>
-              <a:spcAft>
-                <a:spcPts val="1260"/>
-              </a:spcAft>
-              <a:buClr>
-                <a:srgbClr val="00D4AA"/>
-              </a:buClr>
-              <a:buFont typeface="Inter"/>
-              <a:buChar char="•"/>
-            </a:pPr>
-            <a:r>
-              <a:rPr sz="1800" b="0">
+              <a:t>One Phoenix on port 6006, never two</a:t>
+            </a:r>
+          </a:p>
+        </p:txBody>
+      </p:sp>
+      <p:sp>
+        <p:nvSpPr>
+          <p:cNvPr id="11" name="Rounded Rectangle 10"/>
+          <p:cNvSpPr/>
+          <p:nvPr/>
+        </p:nvSpPr>
+        <p:spPr>
+          <a:xfrm>
+            <a:off x="2011680" y="4434840"/>
+            <a:ext cx="8138160" cy="777240"/>
+          </a:xfrm>
+          <a:prstGeom prst="roundRect">
+            <a:avLst>
+              <a:gd name="adj" fmla="val 6588"/>
+            </a:avLst>
+          </a:prstGeom>
+          <a:solidFill>
+            <a:srgbClr val="1A2742"/>
+          </a:solidFill>
+          <a:ln>
+            <a:noFill/>
+          </a:ln>
+          <a:effectLst/>
+        </p:spPr>
+        <p:style>
+          <a:lnRef idx="1">
+            <a:schemeClr val="accent1"/>
+          </a:lnRef>
+          <a:fillRef idx="3">
+            <a:schemeClr val="accent1"/>
+          </a:fillRef>
+          <a:effectRef idx="2">
+            <a:schemeClr val="accent1"/>
+          </a:effectRef>
+          <a:fontRef idx="minor">
+            <a:schemeClr val="lt1"/>
+          </a:fontRef>
+        </p:style>
+        <p:txBody>
+          <a:bodyPr rtlCol="0" anchor="ctr"/>
+          <a:lstStyle/>
+          <a:p/>
+        </p:txBody>
+      </p:sp>
+      <p:sp>
+        <p:nvSpPr>
+          <p:cNvPr id="12" name="TextBox 11"/>
+          <p:cNvSpPr txBox="1"/>
+          <p:nvPr/>
+        </p:nvSpPr>
+        <p:spPr>
+          <a:xfrm>
+            <a:off x="2194560" y="4434840"/>
+            <a:ext cx="548640" cy="777240"/>
+          </a:xfrm>
+          <a:prstGeom prst="rect">
+            <a:avLst/>
+          </a:prstGeom>
+          <a:noFill/>
+        </p:spPr>
+        <p:txBody>
+          <a:bodyPr wrap="square" lIns="45720" rIns="45720" tIns="27432" bIns="27432" anchor="ctr">
+            <a:spAutoFit/>
+          </a:bodyPr>
+          <a:lstStyle/>
+          <a:p>
+            <a:r>
+              <a:rPr sz="2200" b="1">
+                <a:solidFill>
+                  <a:srgbClr val="00D4AA"/>
+                </a:solidFill>
+                <a:latin typeface="Inter"/>
+              </a:rPr>
+              <a:t>✓</a:t>
+            </a:r>
+          </a:p>
+        </p:txBody>
+      </p:sp>
+      <p:sp>
+        <p:nvSpPr>
+          <p:cNvPr id="13" name="TextBox 12"/>
+          <p:cNvSpPr txBox="1"/>
+          <p:nvPr/>
+        </p:nvSpPr>
+        <p:spPr>
+          <a:xfrm>
+            <a:off x="2788920" y="4434840"/>
+            <a:ext cx="7223760" cy="777240"/>
+          </a:xfrm>
+          <a:prstGeom prst="rect">
+            <a:avLst/>
+          </a:prstGeom>
+          <a:noFill/>
+        </p:spPr>
+        <p:txBody>
+          <a:bodyPr wrap="square" lIns="45720" rIns="45720" tIns="27432" bIns="27432" anchor="ctr">
+            <a:spAutoFit/>
+          </a:bodyPr>
+          <a:lstStyle/>
+          <a:p>
+            <a:r>
+              <a:rPr sz="1800" b="1">
                 <a:solidFill>
                   <a:srgbClr val="FFFFFF"/>
                 </a:solidFill>
                 <a:latin typeface="Inter"/>
               </a:rPr>
-              <a:t>Compliance: retention, access control and audit already approved by security</a:t>
-            </a:r>
-          </a:p>
-          <a:p>
-            <a:pPr marL="292608" indent="-292608">
-              <a:lnSpc>
-                <a:spcPct val="120000"/>
-              </a:lnSpc>
-              <a:spcAft>
-                <a:spcPts val="1260"/>
-              </a:spcAft>
-              <a:buClr>
-                <a:srgbClr val="00D4AA"/>
-              </a:buClr>
-              <a:buFont typeface="Inter"/>
-              <a:buChar char="•"/>
-            </a:pPr>
-            <a:r>
-              <a:rPr sz="1800" b="0">
-                <a:solidFill>
-                  <a:srgbClr val="FFFFFF"/>
-                </a:solidFill>
-                <a:latin typeface="Inter"/>
-              </a:rPr>
-              <a:t>Cost visibility per service across the whole company</a:t>
+              <a:t>Mirror OpenInference only if you need it</a:t>
             </a:r>
           </a:p>
         </p:txBody>
@@ -8769,7 +9625,7 @@
                 </a:solidFill>
                 <a:latin typeface="Inter"/>
               </a:rPr>
-              <a:t>AI Agent Observability &amp; Cost Control · Section 12 · Lecture 12.4</a:t>
+              <a:t>AI Agent Observability &amp; Cost Control · Section 12 · Lecture 12.3</a:t>
             </a:r>
           </a:p>
         </p:txBody>
@@ -8782,8 +9638,42 @@
         </p:nvSpPr>
         <p:spPr>
           <a:xfrm>
-            <a:off x="457200" y="411480"/>
-            <a:ext cx="11247120" cy="868680"/>
+            <a:off x="2377440" y="2286000"/>
+            <a:ext cx="1097280" cy="1097280"/>
+          </a:xfrm>
+          <a:prstGeom prst="rect">
+            <a:avLst/>
+          </a:prstGeom>
+          <a:noFill/>
+        </p:spPr>
+        <p:txBody>
+          <a:bodyPr wrap="square" lIns="45720" rIns="45720" tIns="27432" bIns="27432" anchor="ctr">
+            <a:spAutoFit/>
+          </a:bodyPr>
+          <a:lstStyle/>
+          <a:p>
+            <a:r>
+              <a:rPr sz="5400" b="1">
+                <a:solidFill>
+                  <a:srgbClr val="00D4AA"/>
+                </a:solidFill>
+                <a:latin typeface="Inter"/>
+              </a:rPr>
+              <a:t>→</a:t>
+            </a:r>
+          </a:p>
+        </p:txBody>
+      </p:sp>
+      <p:sp>
+        <p:nvSpPr>
+          <p:cNvPr id="4" name="TextBox 3"/>
+          <p:cNvSpPr txBox="1"/>
+          <p:nvPr/>
+        </p:nvSpPr>
+        <p:spPr>
+          <a:xfrm>
+            <a:off x="3566160" y="2148840"/>
+            <a:ext cx="7315200" cy="457200"/>
           </a:xfrm>
           <a:prstGeom prst="rect">
             <a:avLst/>
@@ -8796,63 +9686,16 @@
           </a:bodyPr>
           <a:lstStyle/>
           <a:p>
-            <a:pPr>
-              <a:lnSpc>
-                <a:spcPct val="110000"/>
-              </a:lnSpc>
-            </a:pPr>
-            <a:r>
-              <a:rPr sz="2600" b="1">
-                <a:solidFill>
-                  <a:srgbClr val="FFFFFF"/>
-                </a:solidFill>
-                <a:latin typeface="Inter"/>
-              </a:rPr>
-              <a:t>What you lose or pay for</a:t>
-            </a:r>
-          </a:p>
-        </p:txBody>
-      </p:sp>
-      <p:sp>
-        <p:nvSpPr>
-          <p:cNvPr id="4" name="Rectangle 3"/>
-          <p:cNvSpPr/>
-          <p:nvPr/>
-        </p:nvSpPr>
-        <p:spPr>
-          <a:xfrm>
-            <a:off x="502920" y="1024128"/>
-            <a:ext cx="822960" cy="54864"/>
-          </a:xfrm>
-          <a:prstGeom prst="rect">
-            <a:avLst/>
-          </a:prstGeom>
-          <a:solidFill>
-            <a:srgbClr val="00D4AA"/>
-          </a:solidFill>
-          <a:ln>
-            <a:noFill/>
-          </a:ln>
-          <a:effectLst/>
-        </p:spPr>
-        <p:style>
-          <a:lnRef idx="1">
-            <a:schemeClr val="accent1"/>
-          </a:lnRef>
-          <a:fillRef idx="3">
-            <a:schemeClr val="accent1"/>
-          </a:fillRef>
-          <a:effectRef idx="2">
-            <a:schemeClr val="accent1"/>
-          </a:effectRef>
-          <a:fontRef idx="minor">
-            <a:schemeClr val="lt1"/>
-          </a:fontRef>
-        </p:style>
-        <p:txBody>
-          <a:bodyPr rtlCol="0" anchor="ctr"/>
-          <a:lstStyle/>
-          <a:p/>
+            <a:r>
+              <a:rPr sz="1400" b="0">
+                <a:solidFill>
+                  <a:srgbClr val="94A3B8"/>
+                </a:solidFill>
+                <a:latin typeface="Inter"/>
+              </a:rPr>
+              <a:t>Next up:</a:t>
+            </a:r>
+          </a:p>
         </p:txBody>
       </p:sp>
       <p:sp>
@@ -8863,8 +9706,8 @@
         </p:nvSpPr>
         <p:spPr>
           <a:xfrm>
-            <a:off x="640080" y="1417320"/>
-            <a:ext cx="10881360" cy="4892040"/>
+            <a:off x="3566160" y="2560320"/>
+            <a:ext cx="7315200" cy="1097280"/>
           </a:xfrm>
           <a:prstGeom prst="rect">
             <a:avLst/>
@@ -8877,99 +9720,48 @@
           </a:bodyPr>
           <a:lstStyle/>
           <a:p>
-            <a:pPr marL="292608" indent="-292608">
-              <a:lnSpc>
-                <a:spcPct val="120000"/>
-              </a:lnSpc>
-              <a:spcAft>
-                <a:spcPts val="1260"/>
-              </a:spcAft>
-              <a:buClr>
-                <a:srgbClr val="00D4AA"/>
-              </a:buClr>
-              <a:buFont typeface="Inter"/>
-              <a:buChar char="•"/>
-            </a:pPr>
-            <a:r>
-              <a:rPr sz="1800" b="0">
+            <a:r>
+              <a:rPr sz="2600" b="1">
                 <a:solidFill>
                   <a:srgbClr val="FFFFFF"/>
                 </a:solidFill>
                 <a:latin typeface="Inter"/>
               </a:rPr>
-              <a:t>Prompt management with labels: usually missing or thin; verify per vendor</a:t>
-            </a:r>
-          </a:p>
-          <a:p>
-            <a:pPr marL="292608" indent="-292608">
-              <a:lnSpc>
-                <a:spcPct val="120000"/>
-              </a:lnSpc>
-              <a:spcAft>
-                <a:spcPts val="1260"/>
-              </a:spcAft>
-              <a:buClr>
-                <a:srgbClr val="00D4AA"/>
-              </a:buClr>
-              <a:buFont typeface="Inter"/>
-              <a:buChar char="•"/>
-            </a:pPr>
-            <a:r>
-              <a:rPr sz="1800" b="0">
-                <a:solidFill>
-                  <a:srgbClr val="FFFFFF"/>
-                </a:solidFill>
-                <a:latin typeface="Inter"/>
-              </a:rPr>
-              <a:t>Scores and datasets: present in some, shallow in most; the eval loop from Section 8 lives elsewhere</a:t>
-            </a:r>
-          </a:p>
-          <a:p>
-            <a:pPr marL="292608" indent="-292608">
-              <a:lnSpc>
-                <a:spcPct val="120000"/>
-              </a:lnSpc>
-              <a:spcAft>
-                <a:spcPts val="1260"/>
-              </a:spcAft>
-              <a:buClr>
-                <a:srgbClr val="00D4AA"/>
-              </a:buClr>
-              <a:buFont typeface="Inter"/>
-              <a:buChar char="•"/>
-            </a:pPr>
-            <a:r>
-              <a:rPr sz="1800" b="0">
-                <a:solidFill>
-                  <a:srgbClr val="FFFFFF"/>
-                </a:solidFill>
-                <a:latin typeface="Inter"/>
-              </a:rPr>
-              <a:t>Cost model: per span, per ingested GB or per host; agent traces are large (prompts, tool results)</a:t>
-            </a:r>
-          </a:p>
-          <a:p>
-            <a:pPr marL="292608" indent="-292608">
-              <a:lnSpc>
-                <a:spcPct val="120000"/>
-              </a:lnSpc>
-              <a:spcAft>
-                <a:spcPts val="1260"/>
-              </a:spcAft>
-              <a:buClr>
-                <a:srgbClr val="00D4AA"/>
-              </a:buClr>
-              <a:buFont typeface="Inter"/>
-              <a:buChar char="•"/>
-            </a:pPr>
-            <a:r>
-              <a:rPr sz="1800" b="0">
-                <a:solidFill>
-                  <a:srgbClr val="FFFFFF"/>
-                </a:solidFill>
-                <a:latin typeface="Inter"/>
-              </a:rPr>
-              <a:t>Sampling pressure: keeping 100% of LLM spans in an APM can cost more than the LLM calls</a:t>
+              <a:t>OpenLLMetry, Datadog and the enterprise APMs</a:t>
+            </a:r>
+          </a:p>
+        </p:txBody>
+      </p:sp>
+      <p:sp>
+        <p:nvSpPr>
+          <p:cNvPr id="6" name="TextBox 5"/>
+          <p:cNvSpPr txBox="1"/>
+          <p:nvPr/>
+        </p:nvSpPr>
+        <p:spPr>
+          <a:xfrm>
+            <a:off x="3566160" y="3703320"/>
+            <a:ext cx="7315200" cy="1097280"/>
+          </a:xfrm>
+          <a:prstGeom prst="rect">
+            <a:avLst/>
+          </a:prstGeom>
+          <a:noFill/>
+        </p:spPr>
+        <p:txBody>
+          <a:bodyPr wrap="square" lIns="45720" rIns="45720" tIns="27432" bIns="27432" anchor="t">
+            <a:spAutoFit/>
+          </a:bodyPr>
+          <a:lstStyle/>
+          <a:p>
+            <a:r>
+              <a:rPr sz="1400" b="0">
+                <a:solidFill>
+                  <a:srgbClr val="94A3B8"/>
+                </a:solidFill>
+                <a:latin typeface="Inter"/>
+              </a:rPr>
+              <a:t>Next, OpenLLMetry, Datadog and the enterprise APMs, and how to live in a hybrid setup without instrumenting twice.</a:t>
             </a:r>
           </a:p>
         </p:txBody>
@@ -9320,8 +10112,77 @@
         </p:nvSpPr>
         <p:spPr>
           <a:xfrm>
-            <a:off x="457200" y="411480"/>
-            <a:ext cx="11247120" cy="868680"/>
+            <a:off x="6675120" y="320040"/>
+            <a:ext cx="5074920" cy="548640"/>
+          </a:xfrm>
+          <a:prstGeom prst="rect">
+            <a:avLst/>
+          </a:prstGeom>
+          <a:noFill/>
+        </p:spPr>
+        <p:txBody>
+          <a:bodyPr wrap="square" lIns="45720" rIns="45720" tIns="27432" bIns="27432" anchor="t">
+            <a:spAutoFit/>
+          </a:bodyPr>
+          <a:lstStyle/>
+          <a:p>
+            <a:pPr algn="r"/>
+            <a:r>
+              <a:rPr sz="1000" b="0">
+                <a:solidFill>
+                  <a:srgbClr val="94A3B8"/>
+                </a:solidFill>
+                <a:latin typeface="Inter"/>
+              </a:rPr>
+              <a:t>SECTION 12 · PORTABILITY AND ALTERNATIVES</a:t>
+            </a:r>
+          </a:p>
+        </p:txBody>
+      </p:sp>
+      <p:sp>
+        <p:nvSpPr>
+          <p:cNvPr id="4" name="TextBox 3"/>
+          <p:cNvSpPr txBox="1"/>
+          <p:nvPr/>
+        </p:nvSpPr>
+        <p:spPr>
+          <a:xfrm>
+            <a:off x="914400" y="1417320"/>
+            <a:ext cx="10332720" cy="457200"/>
+          </a:xfrm>
+          <a:prstGeom prst="rect">
+            <a:avLst/>
+          </a:prstGeom>
+          <a:noFill/>
+        </p:spPr>
+        <p:txBody>
+          <a:bodyPr wrap="square" lIns="45720" rIns="45720" tIns="27432" bIns="27432" anchor="t">
+            <a:spAutoFit/>
+          </a:bodyPr>
+          <a:lstStyle/>
+          <a:p>
+            <a:r>
+              <a:rPr sz="1200" b="1">
+                <a:solidFill>
+                  <a:srgbClr val="00D4AA"/>
+                </a:solidFill>
+                <a:latin typeface="Inter"/>
+              </a:rPr>
+              <a:t>LECTURE 12.4</a:t>
+            </a:r>
+          </a:p>
+        </p:txBody>
+      </p:sp>
+      <p:sp>
+        <p:nvSpPr>
+          <p:cNvPr id="5" name="TextBox 4"/>
+          <p:cNvSpPr txBox="1"/>
+          <p:nvPr/>
+        </p:nvSpPr>
+        <p:spPr>
+          <a:xfrm>
+            <a:off x="914400" y="1874519"/>
+            <a:ext cx="10332720" cy="1645920"/>
           </a:xfrm>
           <a:prstGeom prst="rect">
             <a:avLst/>
@@ -9340,27 +10201,27 @@
               </a:lnSpc>
             </a:pPr>
             <a:r>
-              <a:rPr sz="2600" b="1">
+              <a:rPr sz="3000" b="1">
                 <a:solidFill>
                   <a:srgbClr val="FFFFFF"/>
                 </a:solidFill>
                 <a:latin typeface="Inter"/>
               </a:rPr>
-              <a:t>OpenLLMetry in one line</a:t>
-            </a:r>
-          </a:p>
-        </p:txBody>
-      </p:sp>
-      <p:sp>
-        <p:nvSpPr>
-          <p:cNvPr id="4" name="Rectangle 3"/>
+              <a:t>OpenLLMetry, Datadog and the enterprise APMs</a:t>
+            </a:r>
+          </a:p>
+        </p:txBody>
+      </p:sp>
+      <p:sp>
+        <p:nvSpPr>
+          <p:cNvPr id="6" name="Rectangle 5"/>
           <p:cNvSpPr/>
           <p:nvPr/>
         </p:nvSpPr>
         <p:spPr>
           <a:xfrm>
-            <a:off x="502920" y="1024128"/>
-            <a:ext cx="822960" cy="54864"/>
+            <a:off x="914400" y="3794760"/>
+            <a:ext cx="64008" cy="1143000"/>
           </a:xfrm>
           <a:prstGeom prst="rect">
             <a:avLst/>
@@ -9395,14 +10256,14 @@
       </p:sp>
       <p:sp>
         <p:nvSpPr>
-          <p:cNvPr id="5" name="TextBox 4"/>
+          <p:cNvPr id="7" name="TextBox 6"/>
           <p:cNvSpPr txBox="1"/>
           <p:nvPr/>
         </p:nvSpPr>
         <p:spPr>
           <a:xfrm>
-            <a:off x="457200" y="1325880"/>
-            <a:ext cx="4023360" cy="4983480"/>
+            <a:off x="1188720" y="3749039"/>
+            <a:ext cx="9692640" cy="1280160"/>
           </a:xfrm>
           <a:prstGeom prst="rect">
             <a:avLst/>
@@ -9410,250 +10271,24 @@
           <a:noFill/>
         </p:spPr>
         <p:txBody>
-          <a:bodyPr wrap="square" lIns="45720" rIns="45720" tIns="27432" bIns="27432" anchor="t">
+          <a:bodyPr wrap="square" lIns="45720" rIns="45720" tIns="27432" bIns="27432" anchor="ctr">
             <a:spAutoFit/>
           </a:bodyPr>
           <a:lstStyle/>
           <a:p>
-            <a:pPr marL="292608" indent="-292608">
+            <a:pPr>
               <a:lnSpc>
-                <a:spcPct val="120000"/>
+                <a:spcPct val="130000"/>
               </a:lnSpc>
-              <a:spcAft>
-                <a:spcPts val="1120"/>
-              </a:spcAft>
-              <a:buClr>
-                <a:srgbClr val="00D4AA"/>
-              </a:buClr>
-              <a:buFont typeface="Inter"/>
-              <a:buChar char="•"/>
             </a:pPr>
             <a:r>
               <a:rPr sz="1600" b="0">
                 <a:solidFill>
-                  <a:srgbClr val="FFFFFF"/>
-                </a:solidFill>
-                <a:latin typeface="Inter"/>
-              </a:rPr>
-              <a:t>Emits OTel spans with </a:t>
-            </a:r>
-            <a:r>
-              <a:rPr sz="1472" b="0">
-                <a:solidFill>
-                  <a:srgbClr val="00D4AA"/>
-                </a:solidFill>
-                <a:latin typeface="JetBrains Mono"/>
-              </a:rPr>
-              <a:t>gen_ai.*</a:t>
-            </a:r>
-            <a:r>
-              <a:rPr sz="1600" b="0">
-                <a:solidFill>
-                  <a:srgbClr val="FFFFFF"/>
-                </a:solidFill>
-                <a:latin typeface="Inter"/>
-              </a:rPr>
-              <a:t> attributes to </a:t>
-            </a:r>
-            <a:r>
-              <a:rPr sz="1472" b="0">
-                <a:solidFill>
-                  <a:srgbClr val="00D4AA"/>
-                </a:solidFill>
-                <a:latin typeface="JetBrains Mono"/>
-              </a:rPr>
-              <a:t>OTEL_EXPORTER_OTLP_ENDPOINT</a:t>
-            </a:r>
-          </a:p>
-          <a:p>
-            <a:pPr marL="292608" indent="-292608">
-              <a:lnSpc>
-                <a:spcPct val="120000"/>
-              </a:lnSpc>
-              <a:spcAft>
-                <a:spcPts val="1120"/>
-              </a:spcAft>
-              <a:buClr>
-                <a:srgbClr val="00D4AA"/>
-              </a:buClr>
-              <a:buFont typeface="Inter"/>
-              <a:buChar char="•"/>
-            </a:pPr>
-            <a:r>
-              <a:rPr sz="1600" b="0">
-                <a:solidFill>
-                  <a:srgbClr val="FFFFFF"/>
-                </a:solidFill>
-                <a:latin typeface="Inter"/>
-              </a:rPr>
-              <a:t>Overlaps with OpenInference for OpenAI; pick one auto-instrumentor, not both (Lecture 3.6 double counting)</a:t>
-            </a:r>
-          </a:p>
-        </p:txBody>
-      </p:sp>
-      <p:sp>
-        <p:nvSpPr>
-          <p:cNvPr id="6" name="Rounded Rectangle 5"/>
-          <p:cNvSpPr/>
-          <p:nvPr/>
-        </p:nvSpPr>
-        <p:spPr>
-          <a:xfrm>
-            <a:off x="4663440" y="1325880"/>
-            <a:ext cx="7086600" cy="4983480"/>
-          </a:xfrm>
-          <a:prstGeom prst="roundRect">
-            <a:avLst>
-              <a:gd name="adj" fmla="val 1027"/>
-            </a:avLst>
-          </a:prstGeom>
-          <a:solidFill>
-            <a:srgbClr val="0F1E35"/>
-          </a:solidFill>
-          <a:ln w="19050">
-            <a:solidFill>
-              <a:srgbClr val="1A2742"/>
-            </a:solidFill>
-          </a:ln>
-          <a:effectLst/>
-        </p:spPr>
-        <p:style>
-          <a:lnRef idx="1">
-            <a:schemeClr val="accent1"/>
-          </a:lnRef>
-          <a:fillRef idx="3">
-            <a:schemeClr val="accent1"/>
-          </a:fillRef>
-          <a:effectRef idx="2">
-            <a:schemeClr val="accent1"/>
-          </a:effectRef>
-          <a:fontRef idx="minor">
-            <a:schemeClr val="lt1"/>
-          </a:fontRef>
-        </p:style>
-        <p:txBody>
-          <a:bodyPr rtlCol="0" anchor="ctr"/>
-          <a:lstStyle/>
-          <a:p/>
-        </p:txBody>
-      </p:sp>
-      <p:sp>
-        <p:nvSpPr>
-          <p:cNvPr id="7" name="Rectangle 6"/>
-          <p:cNvSpPr/>
-          <p:nvPr/>
-        </p:nvSpPr>
-        <p:spPr>
-          <a:xfrm>
-            <a:off x="4663440" y="1325880"/>
-            <a:ext cx="54864" cy="4983480"/>
-          </a:xfrm>
-          <a:prstGeom prst="rect">
-            <a:avLst/>
-          </a:prstGeom>
-          <a:solidFill>
-            <a:srgbClr val="00D4AA"/>
-          </a:solidFill>
-          <a:ln>
-            <a:noFill/>
-          </a:ln>
-          <a:effectLst/>
-        </p:spPr>
-        <p:style>
-          <a:lnRef idx="1">
-            <a:schemeClr val="accent1"/>
-          </a:lnRef>
-          <a:fillRef idx="3">
-            <a:schemeClr val="accent1"/>
-          </a:fillRef>
-          <a:effectRef idx="2">
-            <a:schemeClr val="accent1"/>
-          </a:effectRef>
-          <a:fontRef idx="minor">
-            <a:schemeClr val="lt1"/>
-          </a:fontRef>
-        </p:style>
-        <p:txBody>
-          <a:bodyPr rtlCol="0" anchor="ctr"/>
-          <a:lstStyle/>
-          <a:p/>
-        </p:txBody>
-      </p:sp>
-      <p:sp>
-        <p:nvSpPr>
-          <p:cNvPr id="8" name="TextBox 7"/>
-          <p:cNvSpPr txBox="1"/>
-          <p:nvPr/>
-        </p:nvSpPr>
-        <p:spPr>
-          <a:xfrm>
-            <a:off x="4892040" y="1399032"/>
-            <a:ext cx="6720840" cy="320040"/>
-          </a:xfrm>
-          <a:prstGeom prst="rect">
-            <a:avLst/>
-          </a:prstGeom>
-          <a:noFill/>
-        </p:spPr>
-        <p:txBody>
-          <a:bodyPr wrap="square" lIns="45720" rIns="45720" tIns="27432" bIns="27432" anchor="t">
-            <a:spAutoFit/>
-          </a:bodyPr>
-          <a:lstStyle/>
-          <a:p>
-            <a:r>
-              <a:rPr sz="1000" b="0">
-                <a:solidFill>
-                  <a:srgbClr val="94A3B8"/>
-                </a:solidFill>
-                <a:latin typeface="JetBrains Mono"/>
-              </a:rPr>
-              <a:t>python</a:t>
-            </a:r>
-          </a:p>
-        </p:txBody>
-      </p:sp>
-      <p:sp>
-        <p:nvSpPr>
-          <p:cNvPr id="9" name="TextBox 8"/>
-          <p:cNvSpPr txBox="1"/>
-          <p:nvPr/>
-        </p:nvSpPr>
-        <p:spPr>
-          <a:xfrm>
-            <a:off x="4892040" y="1737360"/>
-            <a:ext cx="6720840" cy="4526280"/>
-          </a:xfrm>
-          <a:prstGeom prst="rect">
-            <a:avLst/>
-          </a:prstGeom>
-          <a:noFill/>
-        </p:spPr>
-        <p:txBody>
-          <a:bodyPr wrap="none" lIns="45720" rIns="45720" tIns="27432" bIns="27432" anchor="t">
-            <a:spAutoFit/>
-          </a:bodyPr>
-          <a:lstStyle/>
-          <a:p>
-            <a:r>
-              <a:rPr sz="1200">
-                <a:solidFill>
-                  <a:srgbClr val="FFFFFF"/>
-                </a:solidFill>
-                <a:latin typeface="JetBrains Mono"/>
-              </a:rPr>
-              <a:t>from traceloop.sdk import Traceloop</a:t>
-            </a:r>
-          </a:p>
-          <a:p>
-            <a:r>
-              <a:rPr sz="1200">
-                <a:solidFill>
-                  <a:srgbClr val="FFFFFF"/>
-                </a:solidFill>
-                <a:latin typeface="JetBrains Mono"/>
-              </a:rPr>
-              <a:t>Traceloop.init(app_name="atlas", disable_batch=False)   # verify against current docs</a:t>
+                  <a:srgbClr val="CBD5E1"/>
+                </a:solidFill>
+                <a:latin typeface="Inter"/>
+              </a:rPr>
+              <a:t>Place OpenLLMetry, Datadog LLM Observability and the other APM add-ons in the same layer model as Langfuse, LangSmith and Phoenix.</a:t>
             </a:r>
           </a:p>
         </p:txBody>
@@ -9752,7 +10387,7 @@
                 </a:solidFill>
                 <a:latin typeface="Inter"/>
               </a:rPr>
-              <a:t>The hybrid, with the Collector</a:t>
+              <a:t>Two more families</a:t>
             </a:r>
           </a:p>
         </p:txBody>
@@ -9841,7 +10476,7 @@
                 </a:solidFill>
                 <a:latin typeface="Inter"/>
               </a:rPr>
-              <a:t>Atlas → OTLP → Collector</a:t>
+              <a:t>OpenLLMetry (Traceloop): an open-source SDK that emits OTel spans with GenAI attributes from many LLM libraries; ships to any OTLP backend</a:t>
             </a:r>
           </a:p>
           <a:p>
@@ -9865,7 +10500,7 @@
                 </a:solidFill>
                 <a:latin typeface="Inter"/>
               </a:rPr>
-              <a:t>Exporter 1 → APM: sampled spans, metrics, everything infrastructure and paging needs</a:t>
+              <a:t>APM add-ons: Datadog LLM Observability, New Relic AI Monitoring, Dynatrace, Grafana Cloud, Splunk; LLM views inside the APM you already pay for</a:t>
             </a:r>
           </a:p>
           <a:p>
@@ -9889,55 +10524,7 @@
                 </a:solidFill>
                 <a:latin typeface="Inter"/>
               </a:rPr>
-              <a:t>Exporter 2 → Langfuse (or Phoenix): full LLM spans for prompts, scores, datasets</a:t>
-            </a:r>
-          </a:p>
-          <a:p>
-            <a:pPr marL="292608" indent="-292608">
-              <a:lnSpc>
-                <a:spcPct val="120000"/>
-              </a:lnSpc>
-              <a:spcAft>
-                <a:spcPts val="1260"/>
-              </a:spcAft>
-              <a:buClr>
-                <a:srgbClr val="00D4AA"/>
-              </a:buClr>
-              <a:buFont typeface="Inter"/>
-              <a:buChar char="•"/>
-            </a:pPr>
-            <a:r>
-              <a:rPr sz="1800" b="0">
-                <a:solidFill>
-                  <a:srgbClr val="FFFFFF"/>
-                </a:solidFill>
-                <a:latin typeface="Inter"/>
-              </a:rPr>
-              <a:t>Collector processors: masking once, tail sampling per destination</a:t>
-            </a:r>
-          </a:p>
-          <a:p>
-            <a:pPr marL="292608" indent="-292608">
-              <a:lnSpc>
-                <a:spcPct val="120000"/>
-              </a:lnSpc>
-              <a:spcAft>
-                <a:spcPts val="1260"/>
-              </a:spcAft>
-              <a:buClr>
-                <a:srgbClr val="00D4AA"/>
-              </a:buClr>
-              <a:buFont typeface="Inter"/>
-              <a:buChar char="•"/>
-            </a:pPr>
-            <a:r>
-              <a:rPr sz="1800" b="0">
-                <a:solidFill>
-                  <a:srgbClr val="FFFFFF"/>
-                </a:solidFill>
-                <a:latin typeface="Inter"/>
-              </a:rPr>
-              <a:t>One instrumentation, two audiences</a:t>
+              <a:t>Both sit in the same layers as everything else: instrumentation at the bottom, storage and features at the top</a:t>
             </a:r>
           </a:p>
         </p:txBody>
@@ -10036,7 +10623,7 @@
                 </a:solidFill>
                 <a:latin typeface="Inter"/>
               </a:rPr>
-              <a:t>How to have the conversation</a:t>
+              <a:t>What the APMs do well</a:t>
             </a:r>
           </a:p>
         </p:txBody>
@@ -10125,7 +10712,7 @@
                 </a:solidFill>
                 <a:latin typeface="Inter"/>
               </a:rPr>
-              <a:t>Ask the APM team for the LLM add-on's price per span or per GB, and their retention default</a:t>
+              <a:t>Correlation: the LLM span next to the HTTP span, the database span and the host metrics</a:t>
             </a:r>
           </a:p>
           <a:p>
@@ -10149,7 +10736,7 @@
                 </a:solidFill>
                 <a:latin typeface="Inter"/>
               </a:rPr>
-              <a:t>Bring your span size and daily span count from the Ops Console</a:t>
+              <a:t>Paging: the on-call rotation, escalation policies and runbooks already live there</a:t>
             </a:r>
           </a:p>
           <a:p>
@@ -10173,7 +10760,7 @@
                 </a:solidFill>
                 <a:latin typeface="Inter"/>
               </a:rPr>
-              <a:t>Propose the hybrid with the Collector config from Lecture 13.2</a:t>
+              <a:t>Compliance: retention, access control and audit already approved by security</a:t>
             </a:r>
           </a:p>
           <a:p>
@@ -10197,7 +10784,7 @@
                 </a:solidFill>
                 <a:latin typeface="Inter"/>
               </a:rPr>
-              <a:t>Agree what pages from the APM and what is investigated in the LLM tool</a:t>
+              <a:t>Cost visibility per service across the whole company</a:t>
             </a:r>
           </a:p>
         </p:txBody>
@@ -10270,42 +10857,8 @@
         </p:nvSpPr>
         <p:spPr>
           <a:xfrm>
-            <a:off x="2377440" y="2286000"/>
-            <a:ext cx="1097280" cy="1097280"/>
-          </a:xfrm>
-          <a:prstGeom prst="rect">
-            <a:avLst/>
-          </a:prstGeom>
-          <a:noFill/>
-        </p:spPr>
-        <p:txBody>
-          <a:bodyPr wrap="square" lIns="45720" rIns="45720" tIns="27432" bIns="27432" anchor="ctr">
-            <a:spAutoFit/>
-          </a:bodyPr>
-          <a:lstStyle/>
-          <a:p>
-            <a:r>
-              <a:rPr sz="5400" b="1">
-                <a:solidFill>
-                  <a:srgbClr val="00D4AA"/>
-                </a:solidFill>
-                <a:latin typeface="Inter"/>
-              </a:rPr>
-              <a:t>→</a:t>
-            </a:r>
-          </a:p>
-        </p:txBody>
-      </p:sp>
-      <p:sp>
-        <p:nvSpPr>
-          <p:cNvPr id="4" name="TextBox 3"/>
-          <p:cNvSpPr txBox="1"/>
-          <p:nvPr/>
-        </p:nvSpPr>
-        <p:spPr>
-          <a:xfrm>
-            <a:off x="3566160" y="2148840"/>
-            <a:ext cx="7315200" cy="457200"/>
+            <a:off x="457200" y="411480"/>
+            <a:ext cx="11247120" cy="868680"/>
           </a:xfrm>
           <a:prstGeom prst="rect">
             <a:avLst/>
@@ -10318,16 +10871,63 @@
           </a:bodyPr>
           <a:lstStyle/>
           <a:p>
-            <a:r>
-              <a:rPr sz="1400" b="0">
-                <a:solidFill>
-                  <a:srgbClr val="94A3B8"/>
-                </a:solidFill>
-                <a:latin typeface="Inter"/>
-              </a:rPr>
-              <a:t>Next up:</a:t>
-            </a:r>
-          </a:p>
+            <a:pPr>
+              <a:lnSpc>
+                <a:spcPct val="110000"/>
+              </a:lnSpc>
+            </a:pPr>
+            <a:r>
+              <a:rPr sz="2600" b="1">
+                <a:solidFill>
+                  <a:srgbClr val="FFFFFF"/>
+                </a:solidFill>
+                <a:latin typeface="Inter"/>
+              </a:rPr>
+              <a:t>What you lose or pay for</a:t>
+            </a:r>
+          </a:p>
+        </p:txBody>
+      </p:sp>
+      <p:sp>
+        <p:nvSpPr>
+          <p:cNvPr id="4" name="Rectangle 3"/>
+          <p:cNvSpPr/>
+          <p:nvPr/>
+        </p:nvSpPr>
+        <p:spPr>
+          <a:xfrm>
+            <a:off x="502920" y="1024128"/>
+            <a:ext cx="822960" cy="54864"/>
+          </a:xfrm>
+          <a:prstGeom prst="rect">
+            <a:avLst/>
+          </a:prstGeom>
+          <a:solidFill>
+            <a:srgbClr val="00D4AA"/>
+          </a:solidFill>
+          <a:ln>
+            <a:noFill/>
+          </a:ln>
+          <a:effectLst/>
+        </p:spPr>
+        <p:style>
+          <a:lnRef idx="1">
+            <a:schemeClr val="accent1"/>
+          </a:lnRef>
+          <a:fillRef idx="3">
+            <a:schemeClr val="accent1"/>
+          </a:fillRef>
+          <a:effectRef idx="2">
+            <a:schemeClr val="accent1"/>
+          </a:effectRef>
+          <a:fontRef idx="minor">
+            <a:schemeClr val="lt1"/>
+          </a:fontRef>
+        </p:style>
+        <p:txBody>
+          <a:bodyPr rtlCol="0" anchor="ctr"/>
+          <a:lstStyle/>
+          <a:p/>
         </p:txBody>
       </p:sp>
       <p:sp>
@@ -10338,8 +10938,8 @@
         </p:nvSpPr>
         <p:spPr>
           <a:xfrm>
-            <a:off x="3566160" y="2560320"/>
-            <a:ext cx="7315200" cy="1097280"/>
+            <a:off x="640080" y="1417320"/>
+            <a:ext cx="10881360" cy="4892040"/>
           </a:xfrm>
           <a:prstGeom prst="rect">
             <a:avLst/>
@@ -10352,48 +10952,99 @@
           </a:bodyPr>
           <a:lstStyle/>
           <a:p>
-            <a:r>
-              <a:rPr sz="2600" b="1">
+            <a:pPr marL="292608" indent="-292608">
+              <a:lnSpc>
+                <a:spcPct val="120000"/>
+              </a:lnSpc>
+              <a:spcAft>
+                <a:spcPts val="1260"/>
+              </a:spcAft>
+              <a:buClr>
+                <a:srgbClr val="00D4AA"/>
+              </a:buClr>
+              <a:buFont typeface="Inter"/>
+              <a:buChar char="•"/>
+            </a:pPr>
+            <a:r>
+              <a:rPr sz="1800" b="0">
                 <a:solidFill>
                   <a:srgbClr val="FFFFFF"/>
                 </a:solidFill>
                 <a:latin typeface="Inter"/>
               </a:rPr>
-              <a:t>Decision matrix: choosing your backend</a:t>
-            </a:r>
-          </a:p>
-        </p:txBody>
-      </p:sp>
-      <p:sp>
-        <p:nvSpPr>
-          <p:cNvPr id="6" name="TextBox 5"/>
-          <p:cNvSpPr txBox="1"/>
-          <p:nvPr/>
-        </p:nvSpPr>
-        <p:spPr>
-          <a:xfrm>
-            <a:off x="3566160" y="3703320"/>
-            <a:ext cx="7315200" cy="1097280"/>
-          </a:xfrm>
-          <a:prstGeom prst="rect">
-            <a:avLst/>
-          </a:prstGeom>
-          <a:noFill/>
-        </p:spPr>
-        <p:txBody>
-          <a:bodyPr wrap="square" lIns="45720" rIns="45720" tIns="27432" bIns="27432" anchor="t">
-            <a:spAutoFit/>
-          </a:bodyPr>
-          <a:lstStyle/>
-          <a:p>
-            <a:r>
-              <a:rPr sz="1400" b="0">
-                <a:solidFill>
-                  <a:srgbClr val="94A3B8"/>
-                </a:solidFill>
-                <a:latin typeface="Inter"/>
-              </a:rPr>
-              <a:t>Next, the decision matrix: control, cost, compliance, features and lock-in on one page.</a:t>
+              <a:t>Prompt management with labels: usually missing or thin; verify per vendor</a:t>
+            </a:r>
+          </a:p>
+          <a:p>
+            <a:pPr marL="292608" indent="-292608">
+              <a:lnSpc>
+                <a:spcPct val="120000"/>
+              </a:lnSpc>
+              <a:spcAft>
+                <a:spcPts val="1260"/>
+              </a:spcAft>
+              <a:buClr>
+                <a:srgbClr val="00D4AA"/>
+              </a:buClr>
+              <a:buFont typeface="Inter"/>
+              <a:buChar char="•"/>
+            </a:pPr>
+            <a:r>
+              <a:rPr sz="1800" b="0">
+                <a:solidFill>
+                  <a:srgbClr val="FFFFFF"/>
+                </a:solidFill>
+                <a:latin typeface="Inter"/>
+              </a:rPr>
+              <a:t>Scores and datasets: present in some, shallow in most; the eval loop from Section 8 lives elsewhere</a:t>
+            </a:r>
+          </a:p>
+          <a:p>
+            <a:pPr marL="292608" indent="-292608">
+              <a:lnSpc>
+                <a:spcPct val="120000"/>
+              </a:lnSpc>
+              <a:spcAft>
+                <a:spcPts val="1260"/>
+              </a:spcAft>
+              <a:buClr>
+                <a:srgbClr val="00D4AA"/>
+              </a:buClr>
+              <a:buFont typeface="Inter"/>
+              <a:buChar char="•"/>
+            </a:pPr>
+            <a:r>
+              <a:rPr sz="1800" b="0">
+                <a:solidFill>
+                  <a:srgbClr val="FFFFFF"/>
+                </a:solidFill>
+                <a:latin typeface="Inter"/>
+              </a:rPr>
+              <a:t>Cost model: per span, per ingested GB or per host; agent traces are large (prompts, tool results)</a:t>
+            </a:r>
+          </a:p>
+          <a:p>
+            <a:pPr marL="292608" indent="-292608">
+              <a:lnSpc>
+                <a:spcPct val="120000"/>
+              </a:lnSpc>
+              <a:spcAft>
+                <a:spcPts val="1260"/>
+              </a:spcAft>
+              <a:buClr>
+                <a:srgbClr val="00D4AA"/>
+              </a:buClr>
+              <a:buFont typeface="Inter"/>
+              <a:buChar char="•"/>
+            </a:pPr>
+            <a:r>
+              <a:rPr sz="1800" b="0">
+                <a:solidFill>
+                  <a:srgbClr val="FFFFFF"/>
+                </a:solidFill>
+                <a:latin typeface="Inter"/>
+              </a:rPr>
+              <a:t>Sampling pressure: keeping 100% of LLM spans in an APM can cost more than the LLM calls</a:t>
             </a:r>
           </a:p>
         </p:txBody>
@@ -10453,7 +11104,7 @@
                 </a:solidFill>
                 <a:latin typeface="Inter"/>
               </a:rPr>
-              <a:t>AI Agent Observability &amp; Cost Control · Section 12 · Lecture 12.5</a:t>
+              <a:t>AI Agent Observability &amp; Cost Control · Section 12 · Lecture 12.4</a:t>
             </a:r>
           </a:p>
         </p:txBody>
@@ -10466,77 +11117,8 @@
         </p:nvSpPr>
         <p:spPr>
           <a:xfrm>
-            <a:off x="6675120" y="320040"/>
-            <a:ext cx="5074920" cy="548640"/>
-          </a:xfrm>
-          <a:prstGeom prst="rect">
-            <a:avLst/>
-          </a:prstGeom>
-          <a:noFill/>
-        </p:spPr>
-        <p:txBody>
-          <a:bodyPr wrap="square" lIns="45720" rIns="45720" tIns="27432" bIns="27432" anchor="t">
-            <a:spAutoFit/>
-          </a:bodyPr>
-          <a:lstStyle/>
-          <a:p>
-            <a:pPr algn="r"/>
-            <a:r>
-              <a:rPr sz="1000" b="0">
-                <a:solidFill>
-                  <a:srgbClr val="94A3B8"/>
-                </a:solidFill>
-                <a:latin typeface="Inter"/>
-              </a:rPr>
-              <a:t>SECTION 12 · PORTABILITY AND ALTERNATIVES</a:t>
-            </a:r>
-          </a:p>
-        </p:txBody>
-      </p:sp>
-      <p:sp>
-        <p:nvSpPr>
-          <p:cNvPr id="4" name="TextBox 3"/>
-          <p:cNvSpPr txBox="1"/>
-          <p:nvPr/>
-        </p:nvSpPr>
-        <p:spPr>
-          <a:xfrm>
-            <a:off x="914400" y="1417320"/>
-            <a:ext cx="10332720" cy="457200"/>
-          </a:xfrm>
-          <a:prstGeom prst="rect">
-            <a:avLst/>
-          </a:prstGeom>
-          <a:noFill/>
-        </p:spPr>
-        <p:txBody>
-          <a:bodyPr wrap="square" lIns="45720" rIns="45720" tIns="27432" bIns="27432" anchor="t">
-            <a:spAutoFit/>
-          </a:bodyPr>
-          <a:lstStyle/>
-          <a:p>
-            <a:r>
-              <a:rPr sz="1200" b="1">
-                <a:solidFill>
-                  <a:srgbClr val="00D4AA"/>
-                </a:solidFill>
-                <a:latin typeface="Inter"/>
-              </a:rPr>
-              <a:t>LECTURE 12.5</a:t>
-            </a:r>
-          </a:p>
-        </p:txBody>
-      </p:sp>
-      <p:sp>
-        <p:nvSpPr>
-          <p:cNvPr id="5" name="TextBox 4"/>
-          <p:cNvSpPr txBox="1"/>
-          <p:nvPr/>
-        </p:nvSpPr>
-        <p:spPr>
-          <a:xfrm>
-            <a:off x="914400" y="1874519"/>
-            <a:ext cx="10332720" cy="1645920"/>
+            <a:off x="457200" y="411480"/>
+            <a:ext cx="11247120" cy="868680"/>
           </a:xfrm>
           <a:prstGeom prst="rect">
             <a:avLst/>
@@ -10555,27 +11137,27 @@
               </a:lnSpc>
             </a:pPr>
             <a:r>
-              <a:rPr sz="3000" b="1">
+              <a:rPr sz="2600" b="1">
                 <a:solidFill>
                   <a:srgbClr val="FFFFFF"/>
                 </a:solidFill>
                 <a:latin typeface="Inter"/>
               </a:rPr>
-              <a:t>Decision matrix: choosing your backend</a:t>
-            </a:r>
-          </a:p>
-        </p:txBody>
-      </p:sp>
-      <p:sp>
-        <p:nvSpPr>
-          <p:cNvPr id="6" name="Rectangle 5"/>
+              <a:t>OpenLLMetry in one line</a:t>
+            </a:r>
+          </a:p>
+        </p:txBody>
+      </p:sp>
+      <p:sp>
+        <p:nvSpPr>
+          <p:cNvPr id="4" name="Rectangle 3"/>
           <p:cNvSpPr/>
           <p:nvPr/>
         </p:nvSpPr>
         <p:spPr>
           <a:xfrm>
-            <a:off x="914400" y="3794760"/>
-            <a:ext cx="64008" cy="1143000"/>
+            <a:off x="502920" y="1024128"/>
+            <a:ext cx="822960" cy="54864"/>
           </a:xfrm>
           <a:prstGeom prst="rect">
             <a:avLst/>
@@ -10610,14 +11192,14 @@
       </p:sp>
       <p:sp>
         <p:nvSpPr>
-          <p:cNvPr id="7" name="TextBox 6"/>
+          <p:cNvPr id="5" name="TextBox 4"/>
           <p:cNvSpPr txBox="1"/>
           <p:nvPr/>
         </p:nvSpPr>
         <p:spPr>
           <a:xfrm>
-            <a:off x="1188720" y="3749039"/>
-            <a:ext cx="9692640" cy="1280160"/>
+            <a:off x="457200" y="1325880"/>
+            <a:ext cx="4023360" cy="4983480"/>
           </a:xfrm>
           <a:prstGeom prst="rect">
             <a:avLst/>
@@ -10625,24 +11207,250 @@
           <a:noFill/>
         </p:spPr>
         <p:txBody>
-          <a:bodyPr wrap="square" lIns="45720" rIns="45720" tIns="27432" bIns="27432" anchor="ctr">
+          <a:bodyPr wrap="square" lIns="45720" rIns="45720" tIns="27432" bIns="27432" anchor="t">
             <a:spAutoFit/>
           </a:bodyPr>
           <a:lstStyle/>
           <a:p>
-            <a:pPr>
+            <a:pPr marL="292608" indent="-292608">
               <a:lnSpc>
-                <a:spcPct val="130000"/>
+                <a:spcPct val="120000"/>
               </a:lnSpc>
+              <a:spcAft>
+                <a:spcPts val="1120"/>
+              </a:spcAft>
+              <a:buClr>
+                <a:srgbClr val="00D4AA"/>
+              </a:buClr>
+              <a:buFont typeface="Inter"/>
+              <a:buChar char="•"/>
             </a:pPr>
             <a:r>
               <a:rPr sz="1600" b="0">
                 <a:solidFill>
-                  <a:srgbClr val="CBD5E1"/>
-                </a:solidFill>
-                <a:latin typeface="Inter"/>
-              </a:rPr>
-              <a:t>Score backend options on five criteria: control, cost, compliance, features and lock-in.</a:t>
+                  <a:srgbClr val="FFFFFF"/>
+                </a:solidFill>
+                <a:latin typeface="Inter"/>
+              </a:rPr>
+              <a:t>Emits OTel spans with </a:t>
+            </a:r>
+            <a:r>
+              <a:rPr sz="1472" b="0">
+                <a:solidFill>
+                  <a:srgbClr val="00D4AA"/>
+                </a:solidFill>
+                <a:latin typeface="JetBrains Mono"/>
+              </a:rPr>
+              <a:t>gen_ai.*</a:t>
+            </a:r>
+            <a:r>
+              <a:rPr sz="1600" b="0">
+                <a:solidFill>
+                  <a:srgbClr val="FFFFFF"/>
+                </a:solidFill>
+                <a:latin typeface="Inter"/>
+              </a:rPr>
+              <a:t> attributes to </a:t>
+            </a:r>
+            <a:r>
+              <a:rPr sz="1472" b="0">
+                <a:solidFill>
+                  <a:srgbClr val="00D4AA"/>
+                </a:solidFill>
+                <a:latin typeface="JetBrains Mono"/>
+              </a:rPr>
+              <a:t>OTEL_EXPORTER_OTLP_ENDPOINT</a:t>
+            </a:r>
+          </a:p>
+          <a:p>
+            <a:pPr marL="292608" indent="-292608">
+              <a:lnSpc>
+                <a:spcPct val="120000"/>
+              </a:lnSpc>
+              <a:spcAft>
+                <a:spcPts val="1120"/>
+              </a:spcAft>
+              <a:buClr>
+                <a:srgbClr val="00D4AA"/>
+              </a:buClr>
+              <a:buFont typeface="Inter"/>
+              <a:buChar char="•"/>
+            </a:pPr>
+            <a:r>
+              <a:rPr sz="1600" b="0">
+                <a:solidFill>
+                  <a:srgbClr val="FFFFFF"/>
+                </a:solidFill>
+                <a:latin typeface="Inter"/>
+              </a:rPr>
+              <a:t>Overlaps with OpenInference for OpenAI; pick one auto-instrumentor, not both (Lecture 3.6 double counting)</a:t>
+            </a:r>
+          </a:p>
+        </p:txBody>
+      </p:sp>
+      <p:sp>
+        <p:nvSpPr>
+          <p:cNvPr id="6" name="Rounded Rectangle 5"/>
+          <p:cNvSpPr/>
+          <p:nvPr/>
+        </p:nvSpPr>
+        <p:spPr>
+          <a:xfrm>
+            <a:off x="4663440" y="1325880"/>
+            <a:ext cx="7086600" cy="4983480"/>
+          </a:xfrm>
+          <a:prstGeom prst="roundRect">
+            <a:avLst>
+              <a:gd name="adj" fmla="val 1027"/>
+            </a:avLst>
+          </a:prstGeom>
+          <a:solidFill>
+            <a:srgbClr val="0F1E35"/>
+          </a:solidFill>
+          <a:ln w="19050">
+            <a:solidFill>
+              <a:srgbClr val="1A2742"/>
+            </a:solidFill>
+          </a:ln>
+          <a:effectLst/>
+        </p:spPr>
+        <p:style>
+          <a:lnRef idx="1">
+            <a:schemeClr val="accent1"/>
+          </a:lnRef>
+          <a:fillRef idx="3">
+            <a:schemeClr val="accent1"/>
+          </a:fillRef>
+          <a:effectRef idx="2">
+            <a:schemeClr val="accent1"/>
+          </a:effectRef>
+          <a:fontRef idx="minor">
+            <a:schemeClr val="lt1"/>
+          </a:fontRef>
+        </p:style>
+        <p:txBody>
+          <a:bodyPr rtlCol="0" anchor="ctr"/>
+          <a:lstStyle/>
+          <a:p/>
+        </p:txBody>
+      </p:sp>
+      <p:sp>
+        <p:nvSpPr>
+          <p:cNvPr id="7" name="Rectangle 6"/>
+          <p:cNvSpPr/>
+          <p:nvPr/>
+        </p:nvSpPr>
+        <p:spPr>
+          <a:xfrm>
+            <a:off x="4663440" y="1325880"/>
+            <a:ext cx="54864" cy="4983480"/>
+          </a:xfrm>
+          <a:prstGeom prst="rect">
+            <a:avLst/>
+          </a:prstGeom>
+          <a:solidFill>
+            <a:srgbClr val="00D4AA"/>
+          </a:solidFill>
+          <a:ln>
+            <a:noFill/>
+          </a:ln>
+          <a:effectLst/>
+        </p:spPr>
+        <p:style>
+          <a:lnRef idx="1">
+            <a:schemeClr val="accent1"/>
+          </a:lnRef>
+          <a:fillRef idx="3">
+            <a:schemeClr val="accent1"/>
+          </a:fillRef>
+          <a:effectRef idx="2">
+            <a:schemeClr val="accent1"/>
+          </a:effectRef>
+          <a:fontRef idx="minor">
+            <a:schemeClr val="lt1"/>
+          </a:fontRef>
+        </p:style>
+        <p:txBody>
+          <a:bodyPr rtlCol="0" anchor="ctr"/>
+          <a:lstStyle/>
+          <a:p/>
+        </p:txBody>
+      </p:sp>
+      <p:sp>
+        <p:nvSpPr>
+          <p:cNvPr id="8" name="TextBox 7"/>
+          <p:cNvSpPr txBox="1"/>
+          <p:nvPr/>
+        </p:nvSpPr>
+        <p:spPr>
+          <a:xfrm>
+            <a:off x="4892040" y="1399032"/>
+            <a:ext cx="6720840" cy="320040"/>
+          </a:xfrm>
+          <a:prstGeom prst="rect">
+            <a:avLst/>
+          </a:prstGeom>
+          <a:noFill/>
+        </p:spPr>
+        <p:txBody>
+          <a:bodyPr wrap="square" lIns="45720" rIns="45720" tIns="27432" bIns="27432" anchor="t">
+            <a:spAutoFit/>
+          </a:bodyPr>
+          <a:lstStyle/>
+          <a:p>
+            <a:r>
+              <a:rPr sz="1000" b="0">
+                <a:solidFill>
+                  <a:srgbClr val="94A3B8"/>
+                </a:solidFill>
+                <a:latin typeface="JetBrains Mono"/>
+              </a:rPr>
+              <a:t>python</a:t>
+            </a:r>
+          </a:p>
+        </p:txBody>
+      </p:sp>
+      <p:sp>
+        <p:nvSpPr>
+          <p:cNvPr id="9" name="TextBox 8"/>
+          <p:cNvSpPr txBox="1"/>
+          <p:nvPr/>
+        </p:nvSpPr>
+        <p:spPr>
+          <a:xfrm>
+            <a:off x="4892040" y="1737360"/>
+            <a:ext cx="6720840" cy="4526280"/>
+          </a:xfrm>
+          <a:prstGeom prst="rect">
+            <a:avLst/>
+          </a:prstGeom>
+          <a:noFill/>
+        </p:spPr>
+        <p:txBody>
+          <a:bodyPr wrap="none" lIns="45720" rIns="45720" tIns="27432" bIns="27432" anchor="t">
+            <a:spAutoFit/>
+          </a:bodyPr>
+          <a:lstStyle/>
+          <a:p>
+            <a:r>
+              <a:rPr sz="1200">
+                <a:solidFill>
+                  <a:srgbClr val="FFFFFF"/>
+                </a:solidFill>
+                <a:latin typeface="JetBrains Mono"/>
+              </a:rPr>
+              <a:t>from traceloop.sdk import Traceloop</a:t>
+            </a:r>
+          </a:p>
+          <a:p>
+            <a:r>
+              <a:rPr sz="1200">
+                <a:solidFill>
+                  <a:srgbClr val="FFFFFF"/>
+                </a:solidFill>
+                <a:latin typeface="JetBrains Mono"/>
+              </a:rPr>
+              <a:t>Traceloop.init(app_name="atlas", disable_batch=False)   # verify against current docs</a:t>
             </a:r>
           </a:p>
         </p:txBody>
@@ -10702,7 +11510,7 @@
                 </a:solidFill>
                 <a:latin typeface="Inter"/>
               </a:rPr>
-              <a:t>AI Agent Observability &amp; Cost Control · Section 12 · Lecture 12.5</a:t>
+              <a:t>AI Agent Observability &amp; Cost Control · Section 12 · Lecture 12.4</a:t>
             </a:r>
           </a:p>
         </p:txBody>
@@ -10741,7 +11549,7 @@
                 </a:solidFill>
                 <a:latin typeface="Inter"/>
               </a:rPr>
-              <a:t>Five criteria</a:t>
+              <a:t>The hybrid, with the Collector</a:t>
             </a:r>
           </a:p>
         </p:txBody>
@@ -10830,7 +11638,7 @@
                 </a:solidFill>
                 <a:latin typeface="Inter"/>
               </a:rPr>
-              <a:t>Control: can you self-host, and who owns the data?</a:t>
+              <a:t>Atlas → OTLP → Collector</a:t>
             </a:r>
           </a:p>
           <a:p>
@@ -10854,7 +11662,7 @@
                 </a:solidFill>
                 <a:latin typeface="Inter"/>
               </a:rPr>
-              <a:t>Cost: pricing unit (span, GB, seat, host), free tier, and what 100% LLM sampling costs</a:t>
+              <a:t>Exporter 1 → APM: sampled spans, metrics, everything infrastructure and paging needs</a:t>
             </a:r>
           </a:p>
           <a:p>
@@ -10878,7 +11686,7 @@
                 </a:solidFill>
                 <a:latin typeface="Inter"/>
               </a:rPr>
-              <a:t>Compliance: data residency, retention control, masking before egress, audit trail</a:t>
+              <a:t>Exporter 2 → Langfuse (or Phoenix): full LLM spans for prompts, scores, datasets</a:t>
             </a:r>
           </a:p>
           <a:p>
@@ -10902,7 +11710,7 @@
                 </a:solidFill>
                 <a:latin typeface="Inter"/>
               </a:rPr>
-              <a:t>Features: tracing, sessions, prompts with labels, scores, datasets, dashboards, alerting</a:t>
+              <a:t>Collector processors: masking once, tail sampling per destination</a:t>
             </a:r>
           </a:p>
           <a:p>
@@ -10926,7 +11734,7 @@
                 </a:solidFill>
                 <a:latin typeface="Inter"/>
               </a:rPr>
-              <a:t>Lock-in: OTLP in, export out, how many files change if you leave</a:t>
+              <a:t>One instrumentation, two audiences</a:t>
             </a:r>
           </a:p>
         </p:txBody>
@@ -10940,6 +11748,1864 @@
 </file>
 
 <file path=ppt/slides/slide26.xml><?xml version="1.0" encoding="utf-8"?>
+<p:sld xmlns:a="http://schemas.openxmlformats.org/drawingml/2006/main" xmlns:p="http://schemas.openxmlformats.org/presentationml/2006/main" xmlns:r="http://schemas.openxmlformats.org/officeDocument/2006/relationships">
+  <p:cSld>
+    <p:bg>
+      <p:bgPr>
+        <a:solidFill>
+          <a:srgbClr val="0A1628"/>
+        </a:solidFill>
+        <a:effectLst/>
+      </p:bgPr>
+    </p:bg>
+    <p:spTree>
+      <p:nvGrpSpPr>
+        <p:cNvPr id="1" name=""/>
+        <p:cNvGrpSpPr/>
+        <p:nvPr/>
+      </p:nvGrpSpPr>
+      <p:grpSpPr/>
+      <p:sp>
+        <p:nvSpPr>
+          <p:cNvPr id="2" name="TextBox 1"/>
+          <p:cNvSpPr txBox="1"/>
+          <p:nvPr/>
+        </p:nvSpPr>
+        <p:spPr>
+          <a:xfrm>
+            <a:off x="457200" y="6419088"/>
+            <a:ext cx="8686800" cy="320040"/>
+          </a:xfrm>
+          <a:prstGeom prst="rect">
+            <a:avLst/>
+          </a:prstGeom>
+          <a:noFill/>
+        </p:spPr>
+        <p:txBody>
+          <a:bodyPr wrap="square" lIns="45720" rIns="45720" tIns="27432" bIns="27432" anchor="t">
+            <a:spAutoFit/>
+          </a:bodyPr>
+          <a:lstStyle/>
+          <a:p>
+            <a:r>
+              <a:rPr sz="900" b="0">
+                <a:solidFill>
+                  <a:srgbClr val="64748B"/>
+                </a:solidFill>
+                <a:latin typeface="Inter"/>
+              </a:rPr>
+              <a:t>AI Agent Observability &amp; Cost Control · Section 12 · Lecture 12.4</a:t>
+            </a:r>
+          </a:p>
+        </p:txBody>
+      </p:sp>
+      <p:sp>
+        <p:nvSpPr>
+          <p:cNvPr id="3" name="TextBox 2"/>
+          <p:cNvSpPr txBox="1"/>
+          <p:nvPr/>
+        </p:nvSpPr>
+        <p:spPr>
+          <a:xfrm>
+            <a:off x="457200" y="411480"/>
+            <a:ext cx="11247120" cy="868680"/>
+          </a:xfrm>
+          <a:prstGeom prst="rect">
+            <a:avLst/>
+          </a:prstGeom>
+          <a:noFill/>
+        </p:spPr>
+        <p:txBody>
+          <a:bodyPr wrap="square" lIns="45720" rIns="45720" tIns="27432" bIns="27432" anchor="t">
+            <a:spAutoFit/>
+          </a:bodyPr>
+          <a:lstStyle/>
+          <a:p>
+            <a:pPr>
+              <a:lnSpc>
+                <a:spcPct val="110000"/>
+              </a:lnSpc>
+            </a:pPr>
+            <a:r>
+              <a:rPr sz="2600" b="1">
+                <a:solidFill>
+                  <a:srgbClr val="FFFFFF"/>
+                </a:solidFill>
+                <a:latin typeface="Inter"/>
+              </a:rPr>
+              <a:t>How to have the conversation</a:t>
+            </a:r>
+          </a:p>
+        </p:txBody>
+      </p:sp>
+      <p:sp>
+        <p:nvSpPr>
+          <p:cNvPr id="4" name="Rectangle 3"/>
+          <p:cNvSpPr/>
+          <p:nvPr/>
+        </p:nvSpPr>
+        <p:spPr>
+          <a:xfrm>
+            <a:off x="502920" y="1024128"/>
+            <a:ext cx="822960" cy="54864"/>
+          </a:xfrm>
+          <a:prstGeom prst="rect">
+            <a:avLst/>
+          </a:prstGeom>
+          <a:solidFill>
+            <a:srgbClr val="00D4AA"/>
+          </a:solidFill>
+          <a:ln>
+            <a:noFill/>
+          </a:ln>
+          <a:effectLst/>
+        </p:spPr>
+        <p:style>
+          <a:lnRef idx="1">
+            <a:schemeClr val="accent1"/>
+          </a:lnRef>
+          <a:fillRef idx="3">
+            <a:schemeClr val="accent1"/>
+          </a:fillRef>
+          <a:effectRef idx="2">
+            <a:schemeClr val="accent1"/>
+          </a:effectRef>
+          <a:fontRef idx="minor">
+            <a:schemeClr val="lt1"/>
+          </a:fontRef>
+        </p:style>
+        <p:txBody>
+          <a:bodyPr rtlCol="0" anchor="ctr"/>
+          <a:lstStyle/>
+          <a:p/>
+        </p:txBody>
+      </p:sp>
+      <p:sp>
+        <p:nvSpPr>
+          <p:cNvPr id="5" name="TextBox 4"/>
+          <p:cNvSpPr txBox="1"/>
+          <p:nvPr/>
+        </p:nvSpPr>
+        <p:spPr>
+          <a:xfrm>
+            <a:off x="640080" y="1417320"/>
+            <a:ext cx="10881360" cy="4892040"/>
+          </a:xfrm>
+          <a:prstGeom prst="rect">
+            <a:avLst/>
+          </a:prstGeom>
+          <a:noFill/>
+        </p:spPr>
+        <p:txBody>
+          <a:bodyPr wrap="square" lIns="45720" rIns="45720" tIns="27432" bIns="27432" anchor="t">
+            <a:spAutoFit/>
+          </a:bodyPr>
+          <a:lstStyle/>
+          <a:p>
+            <a:pPr marL="292608" indent="-292608">
+              <a:lnSpc>
+                <a:spcPct val="120000"/>
+              </a:lnSpc>
+              <a:spcAft>
+                <a:spcPts val="1260"/>
+              </a:spcAft>
+              <a:buClr>
+                <a:srgbClr val="00D4AA"/>
+              </a:buClr>
+              <a:buFont typeface="Inter"/>
+              <a:buChar char="•"/>
+            </a:pPr>
+            <a:r>
+              <a:rPr sz="1800" b="0">
+                <a:solidFill>
+                  <a:srgbClr val="FFFFFF"/>
+                </a:solidFill>
+                <a:latin typeface="Inter"/>
+              </a:rPr>
+              <a:t>Ask the APM team for the LLM add-on's price per span or per GB, and their retention default</a:t>
+            </a:r>
+          </a:p>
+          <a:p>
+            <a:pPr marL="292608" indent="-292608">
+              <a:lnSpc>
+                <a:spcPct val="120000"/>
+              </a:lnSpc>
+              <a:spcAft>
+                <a:spcPts val="1260"/>
+              </a:spcAft>
+              <a:buClr>
+                <a:srgbClr val="00D4AA"/>
+              </a:buClr>
+              <a:buFont typeface="Inter"/>
+              <a:buChar char="•"/>
+            </a:pPr>
+            <a:r>
+              <a:rPr sz="1800" b="0">
+                <a:solidFill>
+                  <a:srgbClr val="FFFFFF"/>
+                </a:solidFill>
+                <a:latin typeface="Inter"/>
+              </a:rPr>
+              <a:t>Bring your span size and daily span count from the Ops Console</a:t>
+            </a:r>
+          </a:p>
+          <a:p>
+            <a:pPr marL="292608" indent="-292608">
+              <a:lnSpc>
+                <a:spcPct val="120000"/>
+              </a:lnSpc>
+              <a:spcAft>
+                <a:spcPts val="1260"/>
+              </a:spcAft>
+              <a:buClr>
+                <a:srgbClr val="00D4AA"/>
+              </a:buClr>
+              <a:buFont typeface="Inter"/>
+              <a:buChar char="•"/>
+            </a:pPr>
+            <a:r>
+              <a:rPr sz="1800" b="0">
+                <a:solidFill>
+                  <a:srgbClr val="FFFFFF"/>
+                </a:solidFill>
+                <a:latin typeface="Inter"/>
+              </a:rPr>
+              <a:t>Propose the hybrid with the Collector config from Lecture 13.2</a:t>
+            </a:r>
+          </a:p>
+          <a:p>
+            <a:pPr marL="292608" indent="-292608">
+              <a:lnSpc>
+                <a:spcPct val="120000"/>
+              </a:lnSpc>
+              <a:spcAft>
+                <a:spcPts val="1260"/>
+              </a:spcAft>
+              <a:buClr>
+                <a:srgbClr val="00D4AA"/>
+              </a:buClr>
+              <a:buFont typeface="Inter"/>
+              <a:buChar char="•"/>
+            </a:pPr>
+            <a:r>
+              <a:rPr sz="1800" b="0">
+                <a:solidFill>
+                  <a:srgbClr val="FFFFFF"/>
+                </a:solidFill>
+                <a:latin typeface="Inter"/>
+              </a:rPr>
+              <a:t>Agree what pages from the APM and what is investigated in the LLM tool</a:t>
+            </a:r>
+          </a:p>
+        </p:txBody>
+      </p:sp>
+    </p:spTree>
+  </p:cSld>
+  <p:clrMapOvr>
+    <a:masterClrMapping/>
+  </p:clrMapOvr>
+</p:sld>
+</file>
+
+<file path=ppt/slides/slide27.xml><?xml version="1.0" encoding="utf-8"?>
+<p:sld xmlns:a="http://schemas.openxmlformats.org/drawingml/2006/main" xmlns:p="http://schemas.openxmlformats.org/presentationml/2006/main" xmlns:r="http://schemas.openxmlformats.org/officeDocument/2006/relationships">
+  <p:cSld>
+    <p:bg>
+      <p:bgPr>
+        <a:solidFill>
+          <a:srgbClr val="0A1628"/>
+        </a:solidFill>
+        <a:effectLst/>
+      </p:bgPr>
+    </p:bg>
+    <p:spTree>
+      <p:nvGrpSpPr>
+        <p:cNvPr id="1" name=""/>
+        <p:cNvGrpSpPr/>
+        <p:nvPr/>
+      </p:nvGrpSpPr>
+      <p:grpSpPr/>
+      <p:sp>
+        <p:nvSpPr>
+          <p:cNvPr id="2" name="TextBox 1"/>
+          <p:cNvSpPr txBox="1"/>
+          <p:nvPr/>
+        </p:nvSpPr>
+        <p:spPr>
+          <a:xfrm>
+            <a:off x="457200" y="6419088"/>
+            <a:ext cx="8686800" cy="320040"/>
+          </a:xfrm>
+          <a:prstGeom prst="rect">
+            <a:avLst/>
+          </a:prstGeom>
+          <a:noFill/>
+        </p:spPr>
+        <p:txBody>
+          <a:bodyPr wrap="square" lIns="45720" rIns="45720" tIns="27432" bIns="27432" anchor="t">
+            <a:spAutoFit/>
+          </a:bodyPr>
+          <a:lstStyle/>
+          <a:p>
+            <a:r>
+              <a:rPr sz="900" b="0">
+                <a:solidFill>
+                  <a:srgbClr val="64748B"/>
+                </a:solidFill>
+                <a:latin typeface="Inter"/>
+              </a:rPr>
+              <a:t>AI Agent Observability &amp; Cost Control · Section 12 · Lecture 12.4</a:t>
+            </a:r>
+          </a:p>
+        </p:txBody>
+      </p:sp>
+      <p:sp>
+        <p:nvSpPr>
+          <p:cNvPr id="3" name="TextBox 2"/>
+          <p:cNvSpPr txBox="1"/>
+          <p:nvPr/>
+        </p:nvSpPr>
+        <p:spPr>
+          <a:xfrm>
+            <a:off x="1371600" y="822960"/>
+            <a:ext cx="9418320" cy="457200"/>
+          </a:xfrm>
+          <a:prstGeom prst="rect">
+            <a:avLst/>
+          </a:prstGeom>
+          <a:noFill/>
+        </p:spPr>
+        <p:txBody>
+          <a:bodyPr wrap="square" lIns="45720" rIns="45720" tIns="27432" bIns="27432" anchor="t">
+            <a:spAutoFit/>
+          </a:bodyPr>
+          <a:lstStyle/>
+          <a:p>
+            <a:pPr algn="ctr"/>
+            <a:r>
+              <a:rPr sz="1200" b="1">
+                <a:solidFill>
+                  <a:srgbClr val="00D4AA"/>
+                </a:solidFill>
+                <a:latin typeface="Inter"/>
+              </a:rPr>
+              <a:t>RECAP</a:t>
+            </a:r>
+          </a:p>
+        </p:txBody>
+      </p:sp>
+      <p:sp>
+        <p:nvSpPr>
+          <p:cNvPr id="4" name="TextBox 3"/>
+          <p:cNvSpPr txBox="1"/>
+          <p:nvPr/>
+        </p:nvSpPr>
+        <p:spPr>
+          <a:xfrm>
+            <a:off x="1371600" y="1234440"/>
+            <a:ext cx="9418320" cy="822960"/>
+          </a:xfrm>
+          <a:prstGeom prst="rect">
+            <a:avLst/>
+          </a:prstGeom>
+          <a:noFill/>
+        </p:spPr>
+        <p:txBody>
+          <a:bodyPr wrap="square" lIns="45720" rIns="45720" tIns="27432" bIns="27432" anchor="t">
+            <a:spAutoFit/>
+          </a:bodyPr>
+          <a:lstStyle/>
+          <a:p>
+            <a:pPr algn="ctr"/>
+            <a:r>
+              <a:rPr sz="2600" b="1">
+                <a:solidFill>
+                  <a:srgbClr val="FFFFFF"/>
+                </a:solidFill>
+                <a:latin typeface="Inter"/>
+              </a:rPr>
+              <a:t>Key takeaways</a:t>
+            </a:r>
+          </a:p>
+        </p:txBody>
+      </p:sp>
+      <p:sp>
+        <p:nvSpPr>
+          <p:cNvPr id="5" name="Rounded Rectangle 4"/>
+          <p:cNvSpPr/>
+          <p:nvPr/>
+        </p:nvSpPr>
+        <p:spPr>
+          <a:xfrm>
+            <a:off x="2011680" y="2514600"/>
+            <a:ext cx="8138160" cy="777240"/>
+          </a:xfrm>
+          <a:prstGeom prst="roundRect">
+            <a:avLst>
+              <a:gd name="adj" fmla="val 6588"/>
+            </a:avLst>
+          </a:prstGeom>
+          <a:solidFill>
+            <a:srgbClr val="1A2742"/>
+          </a:solidFill>
+          <a:ln>
+            <a:noFill/>
+          </a:ln>
+          <a:effectLst/>
+        </p:spPr>
+        <p:style>
+          <a:lnRef idx="1">
+            <a:schemeClr val="accent1"/>
+          </a:lnRef>
+          <a:fillRef idx="3">
+            <a:schemeClr val="accent1"/>
+          </a:fillRef>
+          <a:effectRef idx="2">
+            <a:schemeClr val="accent1"/>
+          </a:effectRef>
+          <a:fontRef idx="minor">
+            <a:schemeClr val="lt1"/>
+          </a:fontRef>
+        </p:style>
+        <p:txBody>
+          <a:bodyPr rtlCol="0" anchor="ctr"/>
+          <a:lstStyle/>
+          <a:p/>
+        </p:txBody>
+      </p:sp>
+      <p:sp>
+        <p:nvSpPr>
+          <p:cNvPr id="6" name="TextBox 5"/>
+          <p:cNvSpPr txBox="1"/>
+          <p:nvPr/>
+        </p:nvSpPr>
+        <p:spPr>
+          <a:xfrm>
+            <a:off x="2194560" y="2514600"/>
+            <a:ext cx="548640" cy="777240"/>
+          </a:xfrm>
+          <a:prstGeom prst="rect">
+            <a:avLst/>
+          </a:prstGeom>
+          <a:noFill/>
+        </p:spPr>
+        <p:txBody>
+          <a:bodyPr wrap="square" lIns="45720" rIns="45720" tIns="27432" bIns="27432" anchor="ctr">
+            <a:spAutoFit/>
+          </a:bodyPr>
+          <a:lstStyle/>
+          <a:p>
+            <a:r>
+              <a:rPr sz="2200" b="1">
+                <a:solidFill>
+                  <a:srgbClr val="00D4AA"/>
+                </a:solidFill>
+                <a:latin typeface="Inter"/>
+              </a:rPr>
+              <a:t>✓</a:t>
+            </a:r>
+          </a:p>
+        </p:txBody>
+      </p:sp>
+      <p:sp>
+        <p:nvSpPr>
+          <p:cNvPr id="7" name="TextBox 6"/>
+          <p:cNvSpPr txBox="1"/>
+          <p:nvPr/>
+        </p:nvSpPr>
+        <p:spPr>
+          <a:xfrm>
+            <a:off x="2788920" y="2514600"/>
+            <a:ext cx="7223760" cy="777240"/>
+          </a:xfrm>
+          <a:prstGeom prst="rect">
+            <a:avLst/>
+          </a:prstGeom>
+          <a:noFill/>
+        </p:spPr>
+        <p:txBody>
+          <a:bodyPr wrap="square" lIns="45720" rIns="45720" tIns="27432" bIns="27432" anchor="ctr">
+            <a:spAutoFit/>
+          </a:bodyPr>
+          <a:lstStyle/>
+          <a:p>
+            <a:r>
+              <a:rPr sz="1800" b="1">
+                <a:solidFill>
+                  <a:srgbClr val="FFFFFF"/>
+                </a:solidFill>
+                <a:latin typeface="Inter"/>
+              </a:rPr>
+              <a:t>APMs win correlation, paging, compliance</a:t>
+            </a:r>
+          </a:p>
+        </p:txBody>
+      </p:sp>
+      <p:sp>
+        <p:nvSpPr>
+          <p:cNvPr id="8" name="Rounded Rectangle 7"/>
+          <p:cNvSpPr/>
+          <p:nvPr/>
+        </p:nvSpPr>
+        <p:spPr>
+          <a:xfrm>
+            <a:off x="2011680" y="3474720"/>
+            <a:ext cx="8138160" cy="777240"/>
+          </a:xfrm>
+          <a:prstGeom prst="roundRect">
+            <a:avLst>
+              <a:gd name="adj" fmla="val 6588"/>
+            </a:avLst>
+          </a:prstGeom>
+          <a:solidFill>
+            <a:srgbClr val="1A2742"/>
+          </a:solidFill>
+          <a:ln>
+            <a:noFill/>
+          </a:ln>
+          <a:effectLst/>
+        </p:spPr>
+        <p:style>
+          <a:lnRef idx="1">
+            <a:schemeClr val="accent1"/>
+          </a:lnRef>
+          <a:fillRef idx="3">
+            <a:schemeClr val="accent1"/>
+          </a:fillRef>
+          <a:effectRef idx="2">
+            <a:schemeClr val="accent1"/>
+          </a:effectRef>
+          <a:fontRef idx="minor">
+            <a:schemeClr val="lt1"/>
+          </a:fontRef>
+        </p:style>
+        <p:txBody>
+          <a:bodyPr rtlCol="0" anchor="ctr"/>
+          <a:lstStyle/>
+          <a:p/>
+        </p:txBody>
+      </p:sp>
+      <p:sp>
+        <p:nvSpPr>
+          <p:cNvPr id="9" name="TextBox 8"/>
+          <p:cNvSpPr txBox="1"/>
+          <p:nvPr/>
+        </p:nvSpPr>
+        <p:spPr>
+          <a:xfrm>
+            <a:off x="2194560" y="3474720"/>
+            <a:ext cx="548640" cy="777240"/>
+          </a:xfrm>
+          <a:prstGeom prst="rect">
+            <a:avLst/>
+          </a:prstGeom>
+          <a:noFill/>
+        </p:spPr>
+        <p:txBody>
+          <a:bodyPr wrap="square" lIns="45720" rIns="45720" tIns="27432" bIns="27432" anchor="ctr">
+            <a:spAutoFit/>
+          </a:bodyPr>
+          <a:lstStyle/>
+          <a:p>
+            <a:r>
+              <a:rPr sz="2200" b="1">
+                <a:solidFill>
+                  <a:srgbClr val="00D4AA"/>
+                </a:solidFill>
+                <a:latin typeface="Inter"/>
+              </a:rPr>
+              <a:t>✓</a:t>
+            </a:r>
+          </a:p>
+        </p:txBody>
+      </p:sp>
+      <p:sp>
+        <p:nvSpPr>
+          <p:cNvPr id="10" name="TextBox 9"/>
+          <p:cNvSpPr txBox="1"/>
+          <p:nvPr/>
+        </p:nvSpPr>
+        <p:spPr>
+          <a:xfrm>
+            <a:off x="2788920" y="3474720"/>
+            <a:ext cx="7223760" cy="777240"/>
+          </a:xfrm>
+          <a:prstGeom prst="rect">
+            <a:avLst/>
+          </a:prstGeom>
+          <a:noFill/>
+        </p:spPr>
+        <p:txBody>
+          <a:bodyPr wrap="square" lIns="45720" rIns="45720" tIns="27432" bIns="27432" anchor="ctr">
+            <a:spAutoFit/>
+          </a:bodyPr>
+          <a:lstStyle/>
+          <a:p>
+            <a:r>
+              <a:rPr sz="1800" b="1">
+                <a:solidFill>
+                  <a:srgbClr val="FFFFFF"/>
+                </a:solidFill>
+                <a:latin typeface="Inter"/>
+              </a:rPr>
+              <a:t>LLM tools win prompts, evals, datasets</a:t>
+            </a:r>
+          </a:p>
+        </p:txBody>
+      </p:sp>
+      <p:sp>
+        <p:nvSpPr>
+          <p:cNvPr id="11" name="Rounded Rectangle 10"/>
+          <p:cNvSpPr/>
+          <p:nvPr/>
+        </p:nvSpPr>
+        <p:spPr>
+          <a:xfrm>
+            <a:off x="2011680" y="4434840"/>
+            <a:ext cx="8138160" cy="777240"/>
+          </a:xfrm>
+          <a:prstGeom prst="roundRect">
+            <a:avLst>
+              <a:gd name="adj" fmla="val 6588"/>
+            </a:avLst>
+          </a:prstGeom>
+          <a:solidFill>
+            <a:srgbClr val="1A2742"/>
+          </a:solidFill>
+          <a:ln>
+            <a:noFill/>
+          </a:ln>
+          <a:effectLst/>
+        </p:spPr>
+        <p:style>
+          <a:lnRef idx="1">
+            <a:schemeClr val="accent1"/>
+          </a:lnRef>
+          <a:fillRef idx="3">
+            <a:schemeClr val="accent1"/>
+          </a:fillRef>
+          <a:effectRef idx="2">
+            <a:schemeClr val="accent1"/>
+          </a:effectRef>
+          <a:fontRef idx="minor">
+            <a:schemeClr val="lt1"/>
+          </a:fontRef>
+        </p:style>
+        <p:txBody>
+          <a:bodyPr rtlCol="0" anchor="ctr"/>
+          <a:lstStyle/>
+          <a:p/>
+        </p:txBody>
+      </p:sp>
+      <p:sp>
+        <p:nvSpPr>
+          <p:cNvPr id="12" name="TextBox 11"/>
+          <p:cNvSpPr txBox="1"/>
+          <p:nvPr/>
+        </p:nvSpPr>
+        <p:spPr>
+          <a:xfrm>
+            <a:off x="2194560" y="4434840"/>
+            <a:ext cx="548640" cy="777240"/>
+          </a:xfrm>
+          <a:prstGeom prst="rect">
+            <a:avLst/>
+          </a:prstGeom>
+          <a:noFill/>
+        </p:spPr>
+        <p:txBody>
+          <a:bodyPr wrap="square" lIns="45720" rIns="45720" tIns="27432" bIns="27432" anchor="ctr">
+            <a:spAutoFit/>
+          </a:bodyPr>
+          <a:lstStyle/>
+          <a:p>
+            <a:r>
+              <a:rPr sz="2200" b="1">
+                <a:solidFill>
+                  <a:srgbClr val="00D4AA"/>
+                </a:solidFill>
+                <a:latin typeface="Inter"/>
+              </a:rPr>
+              <a:t>✓</a:t>
+            </a:r>
+          </a:p>
+        </p:txBody>
+      </p:sp>
+      <p:sp>
+        <p:nvSpPr>
+          <p:cNvPr id="13" name="TextBox 12"/>
+          <p:cNvSpPr txBox="1"/>
+          <p:nvPr/>
+        </p:nvSpPr>
+        <p:spPr>
+          <a:xfrm>
+            <a:off x="2788920" y="4434840"/>
+            <a:ext cx="7223760" cy="777240"/>
+          </a:xfrm>
+          <a:prstGeom prst="rect">
+            <a:avLst/>
+          </a:prstGeom>
+          <a:noFill/>
+        </p:spPr>
+        <p:txBody>
+          <a:bodyPr wrap="square" lIns="45720" rIns="45720" tIns="27432" bIns="27432" anchor="ctr">
+            <a:spAutoFit/>
+          </a:bodyPr>
+          <a:lstStyle/>
+          <a:p>
+            <a:r>
+              <a:rPr sz="1800" b="1">
+                <a:solidFill>
+                  <a:srgbClr val="FFFFFF"/>
+                </a:solidFill>
+                <a:latin typeface="Inter"/>
+              </a:rPr>
+              <a:t>One Collector, two exporters: the hybrid</a:t>
+            </a:r>
+          </a:p>
+        </p:txBody>
+      </p:sp>
+    </p:spTree>
+  </p:cSld>
+  <p:clrMapOvr>
+    <a:masterClrMapping/>
+  </p:clrMapOvr>
+</p:sld>
+</file>
+
+<file path=ppt/slides/slide28.xml><?xml version="1.0" encoding="utf-8"?>
+<p:sld xmlns:a="http://schemas.openxmlformats.org/drawingml/2006/main" xmlns:p="http://schemas.openxmlformats.org/presentationml/2006/main" xmlns:r="http://schemas.openxmlformats.org/officeDocument/2006/relationships">
+  <p:cSld>
+    <p:bg>
+      <p:bgPr>
+        <a:solidFill>
+          <a:srgbClr val="0A1628"/>
+        </a:solidFill>
+        <a:effectLst/>
+      </p:bgPr>
+    </p:bg>
+    <p:spTree>
+      <p:nvGrpSpPr>
+        <p:cNvPr id="1" name=""/>
+        <p:cNvGrpSpPr/>
+        <p:nvPr/>
+      </p:nvGrpSpPr>
+      <p:grpSpPr/>
+      <p:sp>
+        <p:nvSpPr>
+          <p:cNvPr id="2" name="TextBox 1"/>
+          <p:cNvSpPr txBox="1"/>
+          <p:nvPr/>
+        </p:nvSpPr>
+        <p:spPr>
+          <a:xfrm>
+            <a:off x="457200" y="6419088"/>
+            <a:ext cx="8686800" cy="320040"/>
+          </a:xfrm>
+          <a:prstGeom prst="rect">
+            <a:avLst/>
+          </a:prstGeom>
+          <a:noFill/>
+        </p:spPr>
+        <p:txBody>
+          <a:bodyPr wrap="square" lIns="45720" rIns="45720" tIns="27432" bIns="27432" anchor="t">
+            <a:spAutoFit/>
+          </a:bodyPr>
+          <a:lstStyle/>
+          <a:p>
+            <a:r>
+              <a:rPr sz="900" b="0">
+                <a:solidFill>
+                  <a:srgbClr val="64748B"/>
+                </a:solidFill>
+                <a:latin typeface="Inter"/>
+              </a:rPr>
+              <a:t>AI Agent Observability &amp; Cost Control · Section 12 · Lecture 12.4</a:t>
+            </a:r>
+          </a:p>
+        </p:txBody>
+      </p:sp>
+      <p:sp>
+        <p:nvSpPr>
+          <p:cNvPr id="3" name="TextBox 2"/>
+          <p:cNvSpPr txBox="1"/>
+          <p:nvPr/>
+        </p:nvSpPr>
+        <p:spPr>
+          <a:xfrm>
+            <a:off x="2377440" y="2286000"/>
+            <a:ext cx="1097280" cy="1097280"/>
+          </a:xfrm>
+          <a:prstGeom prst="rect">
+            <a:avLst/>
+          </a:prstGeom>
+          <a:noFill/>
+        </p:spPr>
+        <p:txBody>
+          <a:bodyPr wrap="square" lIns="45720" rIns="45720" tIns="27432" bIns="27432" anchor="ctr">
+            <a:spAutoFit/>
+          </a:bodyPr>
+          <a:lstStyle/>
+          <a:p>
+            <a:r>
+              <a:rPr sz="5400" b="1">
+                <a:solidFill>
+                  <a:srgbClr val="00D4AA"/>
+                </a:solidFill>
+                <a:latin typeface="Inter"/>
+              </a:rPr>
+              <a:t>→</a:t>
+            </a:r>
+          </a:p>
+        </p:txBody>
+      </p:sp>
+      <p:sp>
+        <p:nvSpPr>
+          <p:cNvPr id="4" name="TextBox 3"/>
+          <p:cNvSpPr txBox="1"/>
+          <p:nvPr/>
+        </p:nvSpPr>
+        <p:spPr>
+          <a:xfrm>
+            <a:off x="3566160" y="2148840"/>
+            <a:ext cx="7315200" cy="457200"/>
+          </a:xfrm>
+          <a:prstGeom prst="rect">
+            <a:avLst/>
+          </a:prstGeom>
+          <a:noFill/>
+        </p:spPr>
+        <p:txBody>
+          <a:bodyPr wrap="square" lIns="45720" rIns="45720" tIns="27432" bIns="27432" anchor="t">
+            <a:spAutoFit/>
+          </a:bodyPr>
+          <a:lstStyle/>
+          <a:p>
+            <a:r>
+              <a:rPr sz="1400" b="0">
+                <a:solidFill>
+                  <a:srgbClr val="94A3B8"/>
+                </a:solidFill>
+                <a:latin typeface="Inter"/>
+              </a:rPr>
+              <a:t>Next up:</a:t>
+            </a:r>
+          </a:p>
+        </p:txBody>
+      </p:sp>
+      <p:sp>
+        <p:nvSpPr>
+          <p:cNvPr id="5" name="TextBox 4"/>
+          <p:cNvSpPr txBox="1"/>
+          <p:nvPr/>
+        </p:nvSpPr>
+        <p:spPr>
+          <a:xfrm>
+            <a:off x="3566160" y="2560320"/>
+            <a:ext cx="7315200" cy="1097280"/>
+          </a:xfrm>
+          <a:prstGeom prst="rect">
+            <a:avLst/>
+          </a:prstGeom>
+          <a:noFill/>
+        </p:spPr>
+        <p:txBody>
+          <a:bodyPr wrap="square" lIns="45720" rIns="45720" tIns="27432" bIns="27432" anchor="t">
+            <a:spAutoFit/>
+          </a:bodyPr>
+          <a:lstStyle/>
+          <a:p>
+            <a:r>
+              <a:rPr sz="2600" b="1">
+                <a:solidFill>
+                  <a:srgbClr val="FFFFFF"/>
+                </a:solidFill>
+                <a:latin typeface="Inter"/>
+              </a:rPr>
+              <a:t>Decision matrix: choosing your backend</a:t>
+            </a:r>
+          </a:p>
+        </p:txBody>
+      </p:sp>
+      <p:sp>
+        <p:nvSpPr>
+          <p:cNvPr id="6" name="TextBox 5"/>
+          <p:cNvSpPr txBox="1"/>
+          <p:nvPr/>
+        </p:nvSpPr>
+        <p:spPr>
+          <a:xfrm>
+            <a:off x="3566160" y="3703320"/>
+            <a:ext cx="7315200" cy="1097280"/>
+          </a:xfrm>
+          <a:prstGeom prst="rect">
+            <a:avLst/>
+          </a:prstGeom>
+          <a:noFill/>
+        </p:spPr>
+        <p:txBody>
+          <a:bodyPr wrap="square" lIns="45720" rIns="45720" tIns="27432" bIns="27432" anchor="t">
+            <a:spAutoFit/>
+          </a:bodyPr>
+          <a:lstStyle/>
+          <a:p>
+            <a:r>
+              <a:rPr sz="1400" b="0">
+                <a:solidFill>
+                  <a:srgbClr val="94A3B8"/>
+                </a:solidFill>
+                <a:latin typeface="Inter"/>
+              </a:rPr>
+              <a:t>Next, the decision matrix: control, cost, compliance, features and lock-in on one page.</a:t>
+            </a:r>
+          </a:p>
+        </p:txBody>
+      </p:sp>
+    </p:spTree>
+  </p:cSld>
+  <p:clrMapOvr>
+    <a:masterClrMapping/>
+  </p:clrMapOvr>
+</p:sld>
+</file>
+
+<file path=ppt/slides/slide29.xml><?xml version="1.0" encoding="utf-8"?>
+<p:sld xmlns:a="http://schemas.openxmlformats.org/drawingml/2006/main" xmlns:p="http://schemas.openxmlformats.org/presentationml/2006/main" xmlns:r="http://schemas.openxmlformats.org/officeDocument/2006/relationships">
+  <p:cSld>
+    <p:bg>
+      <p:bgPr>
+        <a:solidFill>
+          <a:srgbClr val="0A1628"/>
+        </a:solidFill>
+        <a:effectLst/>
+      </p:bgPr>
+    </p:bg>
+    <p:spTree>
+      <p:nvGrpSpPr>
+        <p:cNvPr id="1" name=""/>
+        <p:cNvGrpSpPr/>
+        <p:nvPr/>
+      </p:nvGrpSpPr>
+      <p:grpSpPr/>
+      <p:sp>
+        <p:nvSpPr>
+          <p:cNvPr id="2" name="TextBox 1"/>
+          <p:cNvSpPr txBox="1"/>
+          <p:nvPr/>
+        </p:nvSpPr>
+        <p:spPr>
+          <a:xfrm>
+            <a:off x="457200" y="6419088"/>
+            <a:ext cx="8686800" cy="320040"/>
+          </a:xfrm>
+          <a:prstGeom prst="rect">
+            <a:avLst/>
+          </a:prstGeom>
+          <a:noFill/>
+        </p:spPr>
+        <p:txBody>
+          <a:bodyPr wrap="square" lIns="45720" rIns="45720" tIns="27432" bIns="27432" anchor="t">
+            <a:spAutoFit/>
+          </a:bodyPr>
+          <a:lstStyle/>
+          <a:p>
+            <a:r>
+              <a:rPr sz="900" b="0">
+                <a:solidFill>
+                  <a:srgbClr val="64748B"/>
+                </a:solidFill>
+                <a:latin typeface="Inter"/>
+              </a:rPr>
+              <a:t>AI Agent Observability &amp; Cost Control · Section 12 · Lecture 12.5</a:t>
+            </a:r>
+          </a:p>
+        </p:txBody>
+      </p:sp>
+      <p:sp>
+        <p:nvSpPr>
+          <p:cNvPr id="3" name="TextBox 2"/>
+          <p:cNvSpPr txBox="1"/>
+          <p:nvPr/>
+        </p:nvSpPr>
+        <p:spPr>
+          <a:xfrm>
+            <a:off x="6675120" y="320040"/>
+            <a:ext cx="5074920" cy="548640"/>
+          </a:xfrm>
+          <a:prstGeom prst="rect">
+            <a:avLst/>
+          </a:prstGeom>
+          <a:noFill/>
+        </p:spPr>
+        <p:txBody>
+          <a:bodyPr wrap="square" lIns="45720" rIns="45720" tIns="27432" bIns="27432" anchor="t">
+            <a:spAutoFit/>
+          </a:bodyPr>
+          <a:lstStyle/>
+          <a:p>
+            <a:pPr algn="r"/>
+            <a:r>
+              <a:rPr sz="1000" b="0">
+                <a:solidFill>
+                  <a:srgbClr val="94A3B8"/>
+                </a:solidFill>
+                <a:latin typeface="Inter"/>
+              </a:rPr>
+              <a:t>SECTION 12 · PORTABILITY AND ALTERNATIVES</a:t>
+            </a:r>
+          </a:p>
+        </p:txBody>
+      </p:sp>
+      <p:sp>
+        <p:nvSpPr>
+          <p:cNvPr id="4" name="TextBox 3"/>
+          <p:cNvSpPr txBox="1"/>
+          <p:nvPr/>
+        </p:nvSpPr>
+        <p:spPr>
+          <a:xfrm>
+            <a:off x="914400" y="1417320"/>
+            <a:ext cx="10332720" cy="457200"/>
+          </a:xfrm>
+          <a:prstGeom prst="rect">
+            <a:avLst/>
+          </a:prstGeom>
+          <a:noFill/>
+        </p:spPr>
+        <p:txBody>
+          <a:bodyPr wrap="square" lIns="45720" rIns="45720" tIns="27432" bIns="27432" anchor="t">
+            <a:spAutoFit/>
+          </a:bodyPr>
+          <a:lstStyle/>
+          <a:p>
+            <a:r>
+              <a:rPr sz="1200" b="1">
+                <a:solidFill>
+                  <a:srgbClr val="00D4AA"/>
+                </a:solidFill>
+                <a:latin typeface="Inter"/>
+              </a:rPr>
+              <a:t>LECTURE 12.5</a:t>
+            </a:r>
+          </a:p>
+        </p:txBody>
+      </p:sp>
+      <p:sp>
+        <p:nvSpPr>
+          <p:cNvPr id="5" name="TextBox 4"/>
+          <p:cNvSpPr txBox="1"/>
+          <p:nvPr/>
+        </p:nvSpPr>
+        <p:spPr>
+          <a:xfrm>
+            <a:off x="914400" y="1874519"/>
+            <a:ext cx="10332720" cy="1645920"/>
+          </a:xfrm>
+          <a:prstGeom prst="rect">
+            <a:avLst/>
+          </a:prstGeom>
+          <a:noFill/>
+        </p:spPr>
+        <p:txBody>
+          <a:bodyPr wrap="square" lIns="45720" rIns="45720" tIns="27432" bIns="27432" anchor="t">
+            <a:spAutoFit/>
+          </a:bodyPr>
+          <a:lstStyle/>
+          <a:p>
+            <a:pPr>
+              <a:lnSpc>
+                <a:spcPct val="110000"/>
+              </a:lnSpc>
+            </a:pPr>
+            <a:r>
+              <a:rPr sz="3000" b="1">
+                <a:solidFill>
+                  <a:srgbClr val="FFFFFF"/>
+                </a:solidFill>
+                <a:latin typeface="Inter"/>
+              </a:rPr>
+              <a:t>Decision matrix: choosing your backend</a:t>
+            </a:r>
+          </a:p>
+        </p:txBody>
+      </p:sp>
+      <p:sp>
+        <p:nvSpPr>
+          <p:cNvPr id="6" name="Rectangle 5"/>
+          <p:cNvSpPr/>
+          <p:nvPr/>
+        </p:nvSpPr>
+        <p:spPr>
+          <a:xfrm>
+            <a:off x="914400" y="3794760"/>
+            <a:ext cx="64008" cy="1143000"/>
+          </a:xfrm>
+          <a:prstGeom prst="rect">
+            <a:avLst/>
+          </a:prstGeom>
+          <a:solidFill>
+            <a:srgbClr val="00D4AA"/>
+          </a:solidFill>
+          <a:ln>
+            <a:noFill/>
+          </a:ln>
+          <a:effectLst/>
+        </p:spPr>
+        <p:style>
+          <a:lnRef idx="1">
+            <a:schemeClr val="accent1"/>
+          </a:lnRef>
+          <a:fillRef idx="3">
+            <a:schemeClr val="accent1"/>
+          </a:fillRef>
+          <a:effectRef idx="2">
+            <a:schemeClr val="accent1"/>
+          </a:effectRef>
+          <a:fontRef idx="minor">
+            <a:schemeClr val="lt1"/>
+          </a:fontRef>
+        </p:style>
+        <p:txBody>
+          <a:bodyPr rtlCol="0" anchor="ctr"/>
+          <a:lstStyle/>
+          <a:p/>
+        </p:txBody>
+      </p:sp>
+      <p:sp>
+        <p:nvSpPr>
+          <p:cNvPr id="7" name="TextBox 6"/>
+          <p:cNvSpPr txBox="1"/>
+          <p:nvPr/>
+        </p:nvSpPr>
+        <p:spPr>
+          <a:xfrm>
+            <a:off x="1188720" y="3749039"/>
+            <a:ext cx="9692640" cy="1280160"/>
+          </a:xfrm>
+          <a:prstGeom prst="rect">
+            <a:avLst/>
+          </a:prstGeom>
+          <a:noFill/>
+        </p:spPr>
+        <p:txBody>
+          <a:bodyPr wrap="square" lIns="45720" rIns="45720" tIns="27432" bIns="27432" anchor="ctr">
+            <a:spAutoFit/>
+          </a:bodyPr>
+          <a:lstStyle/>
+          <a:p>
+            <a:pPr>
+              <a:lnSpc>
+                <a:spcPct val="130000"/>
+              </a:lnSpc>
+            </a:pPr>
+            <a:r>
+              <a:rPr sz="1600" b="0">
+                <a:solidFill>
+                  <a:srgbClr val="CBD5E1"/>
+                </a:solidFill>
+                <a:latin typeface="Inter"/>
+              </a:rPr>
+              <a:t>Score backend options on five criteria: control, cost, compliance, features and lock-in.</a:t>
+            </a:r>
+          </a:p>
+        </p:txBody>
+      </p:sp>
+    </p:spTree>
+  </p:cSld>
+  <p:clrMapOvr>
+    <a:masterClrMapping/>
+  </p:clrMapOvr>
+</p:sld>
+</file>
+
+<file path=ppt/slides/slide3.xml><?xml version="1.0" encoding="utf-8"?>
+<p:sld xmlns:a="http://schemas.openxmlformats.org/drawingml/2006/main" xmlns:p="http://schemas.openxmlformats.org/presentationml/2006/main" xmlns:r="http://schemas.openxmlformats.org/officeDocument/2006/relationships">
+  <p:cSld>
+    <p:bg>
+      <p:bgPr>
+        <a:solidFill>
+          <a:srgbClr val="0A1628"/>
+        </a:solidFill>
+        <a:effectLst/>
+      </p:bgPr>
+    </p:bg>
+    <p:spTree>
+      <p:nvGrpSpPr>
+        <p:cNvPr id="1" name=""/>
+        <p:cNvGrpSpPr/>
+        <p:nvPr/>
+      </p:nvGrpSpPr>
+      <p:grpSpPr/>
+      <p:sp>
+        <p:nvSpPr>
+          <p:cNvPr id="2" name="TextBox 1"/>
+          <p:cNvSpPr txBox="1"/>
+          <p:nvPr/>
+        </p:nvSpPr>
+        <p:spPr>
+          <a:xfrm>
+            <a:off x="457200" y="6419088"/>
+            <a:ext cx="8686800" cy="320040"/>
+          </a:xfrm>
+          <a:prstGeom prst="rect">
+            <a:avLst/>
+          </a:prstGeom>
+          <a:noFill/>
+        </p:spPr>
+        <p:txBody>
+          <a:bodyPr wrap="square" lIns="45720" rIns="45720" tIns="27432" bIns="27432" anchor="t">
+            <a:spAutoFit/>
+          </a:bodyPr>
+          <a:lstStyle/>
+          <a:p>
+            <a:r>
+              <a:rPr sz="900" b="0">
+                <a:solidFill>
+                  <a:srgbClr val="64748B"/>
+                </a:solidFill>
+                <a:latin typeface="Inter"/>
+              </a:rPr>
+              <a:t>AI Agent Observability &amp; Cost Control · Section 12 · Lecture 12.1</a:t>
+            </a:r>
+          </a:p>
+        </p:txBody>
+      </p:sp>
+      <p:sp>
+        <p:nvSpPr>
+          <p:cNvPr id="3" name="TextBox 2"/>
+          <p:cNvSpPr txBox="1"/>
+          <p:nvPr/>
+        </p:nvSpPr>
+        <p:spPr>
+          <a:xfrm>
+            <a:off x="457200" y="411480"/>
+            <a:ext cx="11247120" cy="868680"/>
+          </a:xfrm>
+          <a:prstGeom prst="rect">
+            <a:avLst/>
+          </a:prstGeom>
+          <a:noFill/>
+        </p:spPr>
+        <p:txBody>
+          <a:bodyPr wrap="square" lIns="45720" rIns="45720" tIns="27432" bIns="27432" anchor="t">
+            <a:spAutoFit/>
+          </a:bodyPr>
+          <a:lstStyle/>
+          <a:p>
+            <a:pPr>
+              <a:lnSpc>
+                <a:spcPct val="110000"/>
+              </a:lnSpc>
+            </a:pPr>
+            <a:r>
+              <a:rPr sz="2600" b="1">
+                <a:solidFill>
+                  <a:srgbClr val="FFFFFF"/>
+                </a:solidFill>
+                <a:latin typeface="Inter"/>
+              </a:rPr>
+              <a:t>What moves for free</a:t>
+            </a:r>
+          </a:p>
+        </p:txBody>
+      </p:sp>
+      <p:sp>
+        <p:nvSpPr>
+          <p:cNvPr id="4" name="Rectangle 3"/>
+          <p:cNvSpPr/>
+          <p:nvPr/>
+        </p:nvSpPr>
+        <p:spPr>
+          <a:xfrm>
+            <a:off x="502920" y="1024128"/>
+            <a:ext cx="822960" cy="54864"/>
+          </a:xfrm>
+          <a:prstGeom prst="rect">
+            <a:avLst/>
+          </a:prstGeom>
+          <a:solidFill>
+            <a:srgbClr val="00D4AA"/>
+          </a:solidFill>
+          <a:ln>
+            <a:noFill/>
+          </a:ln>
+          <a:effectLst/>
+        </p:spPr>
+        <p:style>
+          <a:lnRef idx="1">
+            <a:schemeClr val="accent1"/>
+          </a:lnRef>
+          <a:fillRef idx="3">
+            <a:schemeClr val="accent1"/>
+          </a:fillRef>
+          <a:effectRef idx="2">
+            <a:schemeClr val="accent1"/>
+          </a:effectRef>
+          <a:fontRef idx="minor">
+            <a:schemeClr val="lt1"/>
+          </a:fontRef>
+        </p:style>
+        <p:txBody>
+          <a:bodyPr rtlCol="0" anchor="ctr"/>
+          <a:lstStyle/>
+          <a:p/>
+        </p:txBody>
+      </p:sp>
+      <p:sp>
+        <p:nvSpPr>
+          <p:cNvPr id="5" name="TextBox 4"/>
+          <p:cNvSpPr txBox="1"/>
+          <p:nvPr/>
+        </p:nvSpPr>
+        <p:spPr>
+          <a:xfrm>
+            <a:off x="457200" y="1325880"/>
+            <a:ext cx="4343400" cy="4983480"/>
+          </a:xfrm>
+          <a:prstGeom prst="rect">
+            <a:avLst/>
+          </a:prstGeom>
+          <a:noFill/>
+        </p:spPr>
+        <p:txBody>
+          <a:bodyPr wrap="square" lIns="45720" rIns="45720" tIns="27432" bIns="27432" anchor="t">
+            <a:spAutoFit/>
+          </a:bodyPr>
+          <a:lstStyle/>
+          <a:p>
+            <a:pPr marL="292608" indent="-292608">
+              <a:lnSpc>
+                <a:spcPct val="120000"/>
+              </a:lnSpc>
+              <a:spcAft>
+                <a:spcPts val="1120"/>
+              </a:spcAft>
+              <a:buClr>
+                <a:srgbClr val="00D4AA"/>
+              </a:buClr>
+              <a:buFont typeface="Inter"/>
+              <a:buChar char="•"/>
+            </a:pPr>
+            <a:r>
+              <a:rPr sz="1600" b="0">
+                <a:solidFill>
+                  <a:srgbClr val="FFFFFF"/>
+                </a:solidFill>
+                <a:latin typeface="Inter"/>
+              </a:rPr>
+              <a:t>Traces, spans, attributes, events, status: yes, via OTLP</a:t>
+            </a:r>
+          </a:p>
+          <a:p>
+            <a:pPr marL="292608" indent="-292608">
+              <a:lnSpc>
+                <a:spcPct val="120000"/>
+              </a:lnSpc>
+              <a:spcAft>
+                <a:spcPts val="1120"/>
+              </a:spcAft>
+              <a:buClr>
+                <a:srgbClr val="00D4AA"/>
+              </a:buClr>
+              <a:buFont typeface="Inter"/>
+              <a:buChar char="•"/>
+            </a:pPr>
+            <a:r>
+              <a:rPr sz="1600" b="0">
+                <a:solidFill>
+                  <a:srgbClr val="FFFFFF"/>
+                </a:solidFill>
+                <a:latin typeface="Inter"/>
+              </a:rPr>
+              <a:t>GenAI attributes: </a:t>
+            </a:r>
+            <a:r>
+              <a:rPr sz="1472" b="0">
+                <a:solidFill>
+                  <a:srgbClr val="00D4AA"/>
+                </a:solidFill>
+                <a:latin typeface="JetBrains Mono"/>
+              </a:rPr>
+              <a:t>gen_ai.usage.*</a:t>
+            </a:r>
+            <a:r>
+              <a:rPr sz="1600" b="0">
+                <a:solidFill>
+                  <a:srgbClr val="FFFFFF"/>
+                </a:solidFill>
+                <a:latin typeface="Inter"/>
+              </a:rPr>
+              <a:t>, </a:t>
+            </a:r>
+            <a:r>
+              <a:rPr sz="1472" b="0">
+                <a:solidFill>
+                  <a:srgbClr val="00D4AA"/>
+                </a:solidFill>
+                <a:latin typeface="JetBrains Mono"/>
+              </a:rPr>
+              <a:t>gen_ai.request.model</a:t>
+            </a:r>
+            <a:r>
+              <a:rPr sz="1600" b="0">
+                <a:solidFill>
+                  <a:srgbClr val="FFFFFF"/>
+                </a:solidFill>
+                <a:latin typeface="Inter"/>
+              </a:rPr>
+              <a:t>, </a:t>
+            </a:r>
+            <a:r>
+              <a:rPr sz="1472" b="0">
+                <a:solidFill>
+                  <a:srgbClr val="00D4AA"/>
+                </a:solidFill>
+                <a:latin typeface="JetBrains Mono"/>
+              </a:rPr>
+              <a:t>gen_ai.tool.name</a:t>
+            </a:r>
+            <a:r>
+              <a:rPr sz="1600" b="0">
+                <a:solidFill>
+                  <a:srgbClr val="FFFFFF"/>
+                </a:solidFill>
+                <a:latin typeface="Inter"/>
+              </a:rPr>
+              <a:t>: yes</a:t>
+            </a:r>
+          </a:p>
+          <a:p>
+            <a:pPr marL="292608" indent="-292608">
+              <a:lnSpc>
+                <a:spcPct val="120000"/>
+              </a:lnSpc>
+              <a:spcAft>
+                <a:spcPts val="1120"/>
+              </a:spcAft>
+              <a:buClr>
+                <a:srgbClr val="00D4AA"/>
+              </a:buClr>
+              <a:buFont typeface="Inter"/>
+              <a:buChar char="•"/>
+            </a:pPr>
+            <a:r>
+              <a:rPr sz="1600" b="0">
+                <a:solidFill>
+                  <a:srgbClr val="FFFFFF"/>
+                </a:solidFill>
+                <a:latin typeface="Inter"/>
+              </a:rPr>
+              <a:t>Resource attributes: </a:t>
+            </a:r>
+            <a:r>
+              <a:rPr sz="1472" b="0">
+                <a:solidFill>
+                  <a:srgbClr val="00D4AA"/>
+                </a:solidFill>
+                <a:latin typeface="JetBrains Mono"/>
+              </a:rPr>
+              <a:t>service.name</a:t>
+            </a:r>
+            <a:r>
+              <a:rPr sz="1600" b="0">
+                <a:solidFill>
+                  <a:srgbClr val="FFFFFF"/>
+                </a:solidFill>
+                <a:latin typeface="Inter"/>
+              </a:rPr>
+              <a:t>, </a:t>
+            </a:r>
+            <a:r>
+              <a:rPr sz="1472" b="0">
+                <a:solidFill>
+                  <a:srgbClr val="00D4AA"/>
+                </a:solidFill>
+                <a:latin typeface="JetBrains Mono"/>
+              </a:rPr>
+              <a:t>deployment.environment</a:t>
+            </a:r>
+            <a:r>
+              <a:rPr sz="1600" b="0">
+                <a:solidFill>
+                  <a:srgbClr val="FFFFFF"/>
+                </a:solidFill>
+                <a:latin typeface="Inter"/>
+              </a:rPr>
+              <a:t>, release: yes</a:t>
+            </a:r>
+          </a:p>
+          <a:p>
+            <a:pPr marL="292608" indent="-292608">
+              <a:lnSpc>
+                <a:spcPct val="120000"/>
+              </a:lnSpc>
+              <a:spcAft>
+                <a:spcPts val="1120"/>
+              </a:spcAft>
+              <a:buClr>
+                <a:srgbClr val="00D4AA"/>
+              </a:buClr>
+              <a:buFont typeface="Inter"/>
+              <a:buChar char="•"/>
+            </a:pPr>
+            <a:r>
+              <a:rPr sz="1600" b="0">
+                <a:solidFill>
+                  <a:srgbClr val="FFFFFF"/>
+                </a:solidFill>
+                <a:latin typeface="Inter"/>
+              </a:rPr>
+              <a:t>Session, user and tenant: yes, if they are span attributes, not SDK-only calls</a:t>
+            </a:r>
+          </a:p>
+          <a:p>
+            <a:pPr marL="292608" indent="-292608">
+              <a:lnSpc>
+                <a:spcPct val="120000"/>
+              </a:lnSpc>
+              <a:spcAft>
+                <a:spcPts val="1120"/>
+              </a:spcAft>
+              <a:buClr>
+                <a:srgbClr val="00D4AA"/>
+              </a:buClr>
+              <a:buFont typeface="Inter"/>
+              <a:buChar char="•"/>
+            </a:pPr>
+            <a:r>
+              <a:rPr sz="1600" b="0">
+                <a:solidFill>
+                  <a:srgbClr val="FFFFFF"/>
+                </a:solidFill>
+                <a:latin typeface="Inter"/>
+              </a:rPr>
+              <a:t>Prometheus metrics and Grafana: unaffected, they never touched the LLM backend</a:t>
+            </a:r>
+          </a:p>
+        </p:txBody>
+      </p:sp>
+      <p:pic>
+        <p:nvPicPr>
+          <p:cNvPr id="6" name="Picture 5" descr="D4-langfuse-on-otel-notitle.png"/>
+          <p:cNvPicPr>
+            <a:picLocks noChangeAspect="1"/>
+          </p:cNvPicPr>
+          <p:nvPr/>
+        </p:nvPicPr>
+        <p:blipFill>
+          <a:blip r:embed="rId3"/>
+          <a:stretch>
+            <a:fillRect/>
+          </a:stretch>
+        </p:blipFill>
+        <p:spPr>
+          <a:xfrm>
+            <a:off x="4983480" y="2231707"/>
+            <a:ext cx="6766560" cy="3171825"/>
+          </a:xfrm>
+          <a:prstGeom prst="rect">
+            <a:avLst/>
+          </a:prstGeom>
+          <a:ln>
+            <a:solidFill>
+              <a:srgbClr val="1A2742"/>
+            </a:solidFill>
+          </a:ln>
+        </p:spPr>
+      </p:pic>
+    </p:spTree>
+  </p:cSld>
+  <p:clrMapOvr>
+    <a:masterClrMapping/>
+  </p:clrMapOvr>
+</p:sld>
+</file>
+
+<file path=ppt/slides/slide30.xml><?xml version="1.0" encoding="utf-8"?>
+<p:sld xmlns:a="http://schemas.openxmlformats.org/drawingml/2006/main" xmlns:p="http://schemas.openxmlformats.org/presentationml/2006/main" xmlns:r="http://schemas.openxmlformats.org/officeDocument/2006/relationships">
+  <p:cSld>
+    <p:bg>
+      <p:bgPr>
+        <a:solidFill>
+          <a:srgbClr val="0A1628"/>
+        </a:solidFill>
+        <a:effectLst/>
+      </p:bgPr>
+    </p:bg>
+    <p:spTree>
+      <p:nvGrpSpPr>
+        <p:cNvPr id="1" name=""/>
+        <p:cNvGrpSpPr/>
+        <p:nvPr/>
+      </p:nvGrpSpPr>
+      <p:grpSpPr/>
+      <p:sp>
+        <p:nvSpPr>
+          <p:cNvPr id="2" name="TextBox 1"/>
+          <p:cNvSpPr txBox="1"/>
+          <p:nvPr/>
+        </p:nvSpPr>
+        <p:spPr>
+          <a:xfrm>
+            <a:off x="457200" y="6419088"/>
+            <a:ext cx="8686800" cy="320040"/>
+          </a:xfrm>
+          <a:prstGeom prst="rect">
+            <a:avLst/>
+          </a:prstGeom>
+          <a:noFill/>
+        </p:spPr>
+        <p:txBody>
+          <a:bodyPr wrap="square" lIns="45720" rIns="45720" tIns="27432" bIns="27432" anchor="t">
+            <a:spAutoFit/>
+          </a:bodyPr>
+          <a:lstStyle/>
+          <a:p>
+            <a:r>
+              <a:rPr sz="900" b="0">
+                <a:solidFill>
+                  <a:srgbClr val="64748B"/>
+                </a:solidFill>
+                <a:latin typeface="Inter"/>
+              </a:rPr>
+              <a:t>AI Agent Observability &amp; Cost Control · Section 12 · Lecture 12.5</a:t>
+            </a:r>
+          </a:p>
+        </p:txBody>
+      </p:sp>
+      <p:sp>
+        <p:nvSpPr>
+          <p:cNvPr id="3" name="TextBox 2"/>
+          <p:cNvSpPr txBox="1"/>
+          <p:nvPr/>
+        </p:nvSpPr>
+        <p:spPr>
+          <a:xfrm>
+            <a:off x="457200" y="411480"/>
+            <a:ext cx="11247120" cy="868680"/>
+          </a:xfrm>
+          <a:prstGeom prst="rect">
+            <a:avLst/>
+          </a:prstGeom>
+          <a:noFill/>
+        </p:spPr>
+        <p:txBody>
+          <a:bodyPr wrap="square" lIns="45720" rIns="45720" tIns="27432" bIns="27432" anchor="t">
+            <a:spAutoFit/>
+          </a:bodyPr>
+          <a:lstStyle/>
+          <a:p>
+            <a:pPr>
+              <a:lnSpc>
+                <a:spcPct val="110000"/>
+              </a:lnSpc>
+            </a:pPr>
+            <a:r>
+              <a:rPr sz="2600" b="1">
+                <a:solidFill>
+                  <a:srgbClr val="FFFFFF"/>
+                </a:solidFill>
+                <a:latin typeface="Inter"/>
+              </a:rPr>
+              <a:t>Five criteria</a:t>
+            </a:r>
+          </a:p>
+        </p:txBody>
+      </p:sp>
+      <p:sp>
+        <p:nvSpPr>
+          <p:cNvPr id="4" name="Rectangle 3"/>
+          <p:cNvSpPr/>
+          <p:nvPr/>
+        </p:nvSpPr>
+        <p:spPr>
+          <a:xfrm>
+            <a:off x="502920" y="1024128"/>
+            <a:ext cx="822960" cy="54864"/>
+          </a:xfrm>
+          <a:prstGeom prst="rect">
+            <a:avLst/>
+          </a:prstGeom>
+          <a:solidFill>
+            <a:srgbClr val="00D4AA"/>
+          </a:solidFill>
+          <a:ln>
+            <a:noFill/>
+          </a:ln>
+          <a:effectLst/>
+        </p:spPr>
+        <p:style>
+          <a:lnRef idx="1">
+            <a:schemeClr val="accent1"/>
+          </a:lnRef>
+          <a:fillRef idx="3">
+            <a:schemeClr val="accent1"/>
+          </a:fillRef>
+          <a:effectRef idx="2">
+            <a:schemeClr val="accent1"/>
+          </a:effectRef>
+          <a:fontRef idx="minor">
+            <a:schemeClr val="lt1"/>
+          </a:fontRef>
+        </p:style>
+        <p:txBody>
+          <a:bodyPr rtlCol="0" anchor="ctr"/>
+          <a:lstStyle/>
+          <a:p/>
+        </p:txBody>
+      </p:sp>
+      <p:sp>
+        <p:nvSpPr>
+          <p:cNvPr id="5" name="TextBox 4"/>
+          <p:cNvSpPr txBox="1"/>
+          <p:nvPr/>
+        </p:nvSpPr>
+        <p:spPr>
+          <a:xfrm>
+            <a:off x="640080" y="1417320"/>
+            <a:ext cx="10881360" cy="4892040"/>
+          </a:xfrm>
+          <a:prstGeom prst="rect">
+            <a:avLst/>
+          </a:prstGeom>
+          <a:noFill/>
+        </p:spPr>
+        <p:txBody>
+          <a:bodyPr wrap="square" lIns="45720" rIns="45720" tIns="27432" bIns="27432" anchor="t">
+            <a:spAutoFit/>
+          </a:bodyPr>
+          <a:lstStyle/>
+          <a:p>
+            <a:pPr marL="292608" indent="-292608">
+              <a:lnSpc>
+                <a:spcPct val="120000"/>
+              </a:lnSpc>
+              <a:spcAft>
+                <a:spcPts val="1260"/>
+              </a:spcAft>
+              <a:buClr>
+                <a:srgbClr val="00D4AA"/>
+              </a:buClr>
+              <a:buFont typeface="Inter"/>
+              <a:buChar char="•"/>
+            </a:pPr>
+            <a:r>
+              <a:rPr sz="1800" b="0">
+                <a:solidFill>
+                  <a:srgbClr val="FFFFFF"/>
+                </a:solidFill>
+                <a:latin typeface="Inter"/>
+              </a:rPr>
+              <a:t>Control: can you self-host, and who owns the data?</a:t>
+            </a:r>
+          </a:p>
+          <a:p>
+            <a:pPr marL="292608" indent="-292608">
+              <a:lnSpc>
+                <a:spcPct val="120000"/>
+              </a:lnSpc>
+              <a:spcAft>
+                <a:spcPts val="1260"/>
+              </a:spcAft>
+              <a:buClr>
+                <a:srgbClr val="00D4AA"/>
+              </a:buClr>
+              <a:buFont typeface="Inter"/>
+              <a:buChar char="•"/>
+            </a:pPr>
+            <a:r>
+              <a:rPr sz="1800" b="0">
+                <a:solidFill>
+                  <a:srgbClr val="FFFFFF"/>
+                </a:solidFill>
+                <a:latin typeface="Inter"/>
+              </a:rPr>
+              <a:t>Cost: pricing unit (span, GB, seat, host), free tier, and what 100% LLM sampling costs</a:t>
+            </a:r>
+          </a:p>
+          <a:p>
+            <a:pPr marL="292608" indent="-292608">
+              <a:lnSpc>
+                <a:spcPct val="120000"/>
+              </a:lnSpc>
+              <a:spcAft>
+                <a:spcPts val="1260"/>
+              </a:spcAft>
+              <a:buClr>
+                <a:srgbClr val="00D4AA"/>
+              </a:buClr>
+              <a:buFont typeface="Inter"/>
+              <a:buChar char="•"/>
+            </a:pPr>
+            <a:r>
+              <a:rPr sz="1800" b="0">
+                <a:solidFill>
+                  <a:srgbClr val="FFFFFF"/>
+                </a:solidFill>
+                <a:latin typeface="Inter"/>
+              </a:rPr>
+              <a:t>Compliance: data residency, retention control, masking before egress, audit trail</a:t>
+            </a:r>
+          </a:p>
+          <a:p>
+            <a:pPr marL="292608" indent="-292608">
+              <a:lnSpc>
+                <a:spcPct val="120000"/>
+              </a:lnSpc>
+              <a:spcAft>
+                <a:spcPts val="1260"/>
+              </a:spcAft>
+              <a:buClr>
+                <a:srgbClr val="00D4AA"/>
+              </a:buClr>
+              <a:buFont typeface="Inter"/>
+              <a:buChar char="•"/>
+            </a:pPr>
+            <a:r>
+              <a:rPr sz="1800" b="0">
+                <a:solidFill>
+                  <a:srgbClr val="FFFFFF"/>
+                </a:solidFill>
+                <a:latin typeface="Inter"/>
+              </a:rPr>
+              <a:t>Features: tracing, sessions, prompts with labels, scores, datasets, dashboards, alerting</a:t>
+            </a:r>
+          </a:p>
+          <a:p>
+            <a:pPr marL="292608" indent="-292608">
+              <a:lnSpc>
+                <a:spcPct val="120000"/>
+              </a:lnSpc>
+              <a:spcAft>
+                <a:spcPts val="1260"/>
+              </a:spcAft>
+              <a:buClr>
+                <a:srgbClr val="00D4AA"/>
+              </a:buClr>
+              <a:buFont typeface="Inter"/>
+              <a:buChar char="•"/>
+            </a:pPr>
+            <a:r>
+              <a:rPr sz="1800" b="0">
+                <a:solidFill>
+                  <a:srgbClr val="FFFFFF"/>
+                </a:solidFill>
+                <a:latin typeface="Inter"/>
+              </a:rPr>
+              <a:t>Lock-in: OTLP in, export out, how many files change if you leave</a:t>
+            </a:r>
+          </a:p>
+        </p:txBody>
+      </p:sp>
+    </p:spTree>
+  </p:cSld>
+  <p:clrMapOvr>
+    <a:masterClrMapping/>
+  </p:clrMapOvr>
+</p:sld>
+</file>
+
+<file path=ppt/slides/slide31.xml><?xml version="1.0" encoding="utf-8"?>
 <p:sld xmlns:a="http://schemas.openxmlformats.org/drawingml/2006/main" xmlns:p="http://schemas.openxmlformats.org/presentationml/2006/main" xmlns:r="http://schemas.openxmlformats.org/officeDocument/2006/relationships">
   <p:cSld>
     <p:bg>
@@ -11883,7 +14549,7 @@
 </p:sld>
 </file>
 
-<file path=ppt/slides/slide27.xml><?xml version="1.0" encoding="utf-8"?>
+<file path=ppt/slides/slide32.xml><?xml version="1.0" encoding="utf-8"?>
 <p:sld xmlns:a="http://schemas.openxmlformats.org/drawingml/2006/main" xmlns:p="http://schemas.openxmlformats.org/presentationml/2006/main" xmlns:r="http://schemas.openxmlformats.org/officeDocument/2006/relationships">
   <p:cSld>
     <p:bg>
@@ -12119,7 +14785,7 @@
 </p:sld>
 </file>
 
-<file path=ppt/slides/slide28.xml><?xml version="1.0" encoding="utf-8"?>
+<file path=ppt/slides/slide33.xml><?xml version="1.0" encoding="utf-8"?>
 <p:sld xmlns:a="http://schemas.openxmlformats.org/drawingml/2006/main" xmlns:p="http://schemas.openxmlformats.org/presentationml/2006/main" xmlns:r="http://schemas.openxmlformats.org/officeDocument/2006/relationships">
   <p:cSld>
     <p:bg>
@@ -12364,7 +15030,7 @@
 </p:sld>
 </file>
 
-<file path=ppt/slides/slide29.xml><?xml version="1.0" encoding="utf-8"?>
+<file path=ppt/slides/slide34.xml><?xml version="1.0" encoding="utf-8"?>
 <p:sld xmlns:a="http://schemas.openxmlformats.org/drawingml/2006/main" xmlns:p="http://schemas.openxmlformats.org/presentationml/2006/main" xmlns:r="http://schemas.openxmlformats.org/officeDocument/2006/relationships">
   <p:cSld>
     <p:bg>
@@ -12424,8 +15090,122 @@
         </p:nvSpPr>
         <p:spPr>
           <a:xfrm>
-            <a:off x="2377440" y="2286000"/>
-            <a:ext cx="1097280" cy="1097280"/>
+            <a:off x="1371600" y="822960"/>
+            <a:ext cx="9418320" cy="457200"/>
+          </a:xfrm>
+          <a:prstGeom prst="rect">
+            <a:avLst/>
+          </a:prstGeom>
+          <a:noFill/>
+        </p:spPr>
+        <p:txBody>
+          <a:bodyPr wrap="square" lIns="45720" rIns="45720" tIns="27432" bIns="27432" anchor="t">
+            <a:spAutoFit/>
+          </a:bodyPr>
+          <a:lstStyle/>
+          <a:p>
+            <a:pPr algn="ctr"/>
+            <a:r>
+              <a:rPr sz="1200" b="1">
+                <a:solidFill>
+                  <a:srgbClr val="00D4AA"/>
+                </a:solidFill>
+                <a:latin typeface="Inter"/>
+              </a:rPr>
+              <a:t>RECAP</a:t>
+            </a:r>
+          </a:p>
+        </p:txBody>
+      </p:sp>
+      <p:sp>
+        <p:nvSpPr>
+          <p:cNvPr id="4" name="TextBox 3"/>
+          <p:cNvSpPr txBox="1"/>
+          <p:nvPr/>
+        </p:nvSpPr>
+        <p:spPr>
+          <a:xfrm>
+            <a:off x="1371600" y="1234440"/>
+            <a:ext cx="9418320" cy="822960"/>
+          </a:xfrm>
+          <a:prstGeom prst="rect">
+            <a:avLst/>
+          </a:prstGeom>
+          <a:noFill/>
+        </p:spPr>
+        <p:txBody>
+          <a:bodyPr wrap="square" lIns="45720" rIns="45720" tIns="27432" bIns="27432" anchor="t">
+            <a:spAutoFit/>
+          </a:bodyPr>
+          <a:lstStyle/>
+          <a:p>
+            <a:pPr algn="ctr"/>
+            <a:r>
+              <a:rPr sz="2600" b="1">
+                <a:solidFill>
+                  <a:srgbClr val="FFFFFF"/>
+                </a:solidFill>
+                <a:latin typeface="Inter"/>
+              </a:rPr>
+              <a:t>Key takeaways</a:t>
+            </a:r>
+          </a:p>
+        </p:txBody>
+      </p:sp>
+      <p:sp>
+        <p:nvSpPr>
+          <p:cNvPr id="5" name="Rounded Rectangle 4"/>
+          <p:cNvSpPr/>
+          <p:nvPr/>
+        </p:nvSpPr>
+        <p:spPr>
+          <a:xfrm>
+            <a:off x="2011680" y="2514600"/>
+            <a:ext cx="8138160" cy="777240"/>
+          </a:xfrm>
+          <a:prstGeom prst="roundRect">
+            <a:avLst>
+              <a:gd name="adj" fmla="val 6588"/>
+            </a:avLst>
+          </a:prstGeom>
+          <a:solidFill>
+            <a:srgbClr val="1A2742"/>
+          </a:solidFill>
+          <a:ln>
+            <a:noFill/>
+          </a:ln>
+          <a:effectLst/>
+        </p:spPr>
+        <p:style>
+          <a:lnRef idx="1">
+            <a:schemeClr val="accent1"/>
+          </a:lnRef>
+          <a:fillRef idx="3">
+            <a:schemeClr val="accent1"/>
+          </a:fillRef>
+          <a:effectRef idx="2">
+            <a:schemeClr val="accent1"/>
+          </a:effectRef>
+          <a:fontRef idx="minor">
+            <a:schemeClr val="lt1"/>
+          </a:fontRef>
+        </p:style>
+        <p:txBody>
+          <a:bodyPr rtlCol="0" anchor="ctr"/>
+          <a:lstStyle/>
+          <a:p/>
+        </p:txBody>
+      </p:sp>
+      <p:sp>
+        <p:nvSpPr>
+          <p:cNvPr id="6" name="TextBox 5"/>
+          <p:cNvSpPr txBox="1"/>
+          <p:nvPr/>
+        </p:nvSpPr>
+        <p:spPr>
+          <a:xfrm>
+            <a:off x="2194560" y="2514600"/>
+            <a:ext cx="548640" cy="777240"/>
           </a:xfrm>
           <a:prstGeom prst="rect">
             <a:avLst/>
@@ -12439,27 +15219,27 @@
           <a:lstStyle/>
           <a:p>
             <a:r>
-              <a:rPr sz="5400" b="1">
+              <a:rPr sz="2200" b="1">
                 <a:solidFill>
                   <a:srgbClr val="00D4AA"/>
                 </a:solidFill>
                 <a:latin typeface="Inter"/>
               </a:rPr>
-              <a:t>→</a:t>
-            </a:r>
-          </a:p>
-        </p:txBody>
-      </p:sp>
-      <p:sp>
-        <p:nvSpPr>
-          <p:cNvPr id="4" name="TextBox 3"/>
+              <a:t>✓</a:t>
+            </a:r>
+          </a:p>
+        </p:txBody>
+      </p:sp>
+      <p:sp>
+        <p:nvSpPr>
+          <p:cNvPr id="7" name="TextBox 6"/>
           <p:cNvSpPr txBox="1"/>
           <p:nvPr/>
         </p:nvSpPr>
         <p:spPr>
           <a:xfrm>
-            <a:off x="3566160" y="2148840"/>
-            <a:ext cx="7315200" cy="457200"/>
+            <a:off x="2788920" y="2514600"/>
+            <a:ext cx="7223760" cy="777240"/>
           </a:xfrm>
           <a:prstGeom prst="rect">
             <a:avLst/>
@@ -12467,33 +15247,77 @@
           <a:noFill/>
         </p:spPr>
         <p:txBody>
-          <a:bodyPr wrap="square" lIns="45720" rIns="45720" tIns="27432" bIns="27432" anchor="t">
+          <a:bodyPr wrap="square" lIns="45720" rIns="45720" tIns="27432" bIns="27432" anchor="ctr">
             <a:spAutoFit/>
           </a:bodyPr>
           <a:lstStyle/>
           <a:p>
             <a:r>
-              <a:rPr sz="1400" b="0">
-                <a:solidFill>
-                  <a:srgbClr val="94A3B8"/>
-                </a:solidFill>
-                <a:latin typeface="Inter"/>
-              </a:rPr>
-              <a:t>Next up:</a:t>
-            </a:r>
-          </a:p>
-        </p:txBody>
-      </p:sp>
-      <p:sp>
-        <p:nvSpPr>
-          <p:cNvPr id="5" name="TextBox 4"/>
+              <a:rPr sz="1800" b="1">
+                <a:solidFill>
+                  <a:srgbClr val="FFFFFF"/>
+                </a:solidFill>
+                <a:latin typeface="Inter"/>
+              </a:rPr>
+              <a:t>Weight five criteria before scoring</a:t>
+            </a:r>
+          </a:p>
+        </p:txBody>
+      </p:sp>
+      <p:sp>
+        <p:nvSpPr>
+          <p:cNvPr id="8" name="Rounded Rectangle 7"/>
+          <p:cNvSpPr/>
+          <p:nvPr/>
+        </p:nvSpPr>
+        <p:spPr>
+          <a:xfrm>
+            <a:off x="2011680" y="3474720"/>
+            <a:ext cx="8138160" cy="777240"/>
+          </a:xfrm>
+          <a:prstGeom prst="roundRect">
+            <a:avLst>
+              <a:gd name="adj" fmla="val 6588"/>
+            </a:avLst>
+          </a:prstGeom>
+          <a:solidFill>
+            <a:srgbClr val="1A2742"/>
+          </a:solidFill>
+          <a:ln>
+            <a:noFill/>
+          </a:ln>
+          <a:effectLst/>
+        </p:spPr>
+        <p:style>
+          <a:lnRef idx="1">
+            <a:schemeClr val="accent1"/>
+          </a:lnRef>
+          <a:fillRef idx="3">
+            <a:schemeClr val="accent1"/>
+          </a:fillRef>
+          <a:effectRef idx="2">
+            <a:schemeClr val="accent1"/>
+          </a:effectRef>
+          <a:fontRef idx="minor">
+            <a:schemeClr val="lt1"/>
+          </a:fontRef>
+        </p:style>
+        <p:txBody>
+          <a:bodyPr rtlCol="0" anchor="ctr"/>
+          <a:lstStyle/>
+          <a:p/>
+        </p:txBody>
+      </p:sp>
+      <p:sp>
+        <p:nvSpPr>
+          <p:cNvPr id="9" name="TextBox 8"/>
           <p:cNvSpPr txBox="1"/>
           <p:nvPr/>
         </p:nvSpPr>
         <p:spPr>
           <a:xfrm>
-            <a:off x="3566160" y="2560320"/>
-            <a:ext cx="7315200" cy="1097280"/>
+            <a:off x="2194560" y="3474720"/>
+            <a:ext cx="548640" cy="777240"/>
           </a:xfrm>
           <a:prstGeom prst="rect">
             <a:avLst/>
@@ -12501,33 +15325,33 @@
           <a:noFill/>
         </p:spPr>
         <p:txBody>
-          <a:bodyPr wrap="square" lIns="45720" rIns="45720" tIns="27432" bIns="27432" anchor="t">
+          <a:bodyPr wrap="square" lIns="45720" rIns="45720" tIns="27432" bIns="27432" anchor="ctr">
             <a:spAutoFit/>
           </a:bodyPr>
           <a:lstStyle/>
           <a:p>
             <a:r>
-              <a:rPr sz="2600" b="1">
-                <a:solidFill>
-                  <a:srgbClr val="FFFFFF"/>
-                </a:solidFill>
-                <a:latin typeface="Inter"/>
-              </a:rPr>
-              <a:t>Quiz: Portability</a:t>
-            </a:r>
-          </a:p>
-        </p:txBody>
-      </p:sp>
-      <p:sp>
-        <p:nvSpPr>
-          <p:cNvPr id="6" name="TextBox 5"/>
+              <a:rPr sz="2200" b="1">
+                <a:solidFill>
+                  <a:srgbClr val="00D4AA"/>
+                </a:solidFill>
+                <a:latin typeface="Inter"/>
+              </a:rPr>
+              <a:t>✓</a:t>
+            </a:r>
+          </a:p>
+        </p:txBody>
+      </p:sp>
+      <p:sp>
+        <p:nvSpPr>
+          <p:cNvPr id="10" name="TextBox 9"/>
           <p:cNvSpPr txBox="1"/>
           <p:nvPr/>
         </p:nvSpPr>
         <p:spPr>
           <a:xfrm>
-            <a:off x="3566160" y="3703320"/>
-            <a:ext cx="7315200" cy="1097280"/>
+            <a:off x="2788920" y="3474720"/>
+            <a:ext cx="7223760" cy="777240"/>
           </a:xfrm>
           <a:prstGeom prst="rect">
             <a:avLst/>
@@ -12535,19 +15359,131 @@
           <a:noFill/>
         </p:spPr>
         <p:txBody>
-          <a:bodyPr wrap="square" lIns="45720" rIns="45720" tIns="27432" bIns="27432" anchor="t">
+          <a:bodyPr wrap="square" lIns="45720" rIns="45720" tIns="27432" bIns="27432" anchor="ctr">
             <a:spAutoFit/>
           </a:bodyPr>
           <a:lstStyle/>
           <a:p>
             <a:r>
-              <a:rPr sz="1400" b="0">
-                <a:solidFill>
-                  <a:srgbClr val="94A3B8"/>
-                </a:solidFill>
-                <a:latin typeface="Inter"/>
-              </a:rPr>
-              <a:t>A short quiz on portability, then Section 13, where you self-host the whole stack and gate pull requests…</a:t>
+              <a:rPr sz="1800" b="1">
+                <a:solidFill>
+                  <a:srgbClr val="FFFFFF"/>
+                </a:solidFill>
+                <a:latin typeface="Inter"/>
+              </a:rPr>
+              <a:t>Regulation, APM mandate, team size decide first</a:t>
+            </a:r>
+          </a:p>
+        </p:txBody>
+      </p:sp>
+      <p:sp>
+        <p:nvSpPr>
+          <p:cNvPr id="11" name="Rounded Rectangle 10"/>
+          <p:cNvSpPr/>
+          <p:nvPr/>
+        </p:nvSpPr>
+        <p:spPr>
+          <a:xfrm>
+            <a:off x="2011680" y="4434840"/>
+            <a:ext cx="8138160" cy="777240"/>
+          </a:xfrm>
+          <a:prstGeom prst="roundRect">
+            <a:avLst>
+              <a:gd name="adj" fmla="val 6588"/>
+            </a:avLst>
+          </a:prstGeom>
+          <a:solidFill>
+            <a:srgbClr val="1A2742"/>
+          </a:solidFill>
+          <a:ln>
+            <a:noFill/>
+          </a:ln>
+          <a:effectLst/>
+        </p:spPr>
+        <p:style>
+          <a:lnRef idx="1">
+            <a:schemeClr val="accent1"/>
+          </a:lnRef>
+          <a:fillRef idx="3">
+            <a:schemeClr val="accent1"/>
+          </a:fillRef>
+          <a:effectRef idx="2">
+            <a:schemeClr val="accent1"/>
+          </a:effectRef>
+          <a:fontRef idx="minor">
+            <a:schemeClr val="lt1"/>
+          </a:fontRef>
+        </p:style>
+        <p:txBody>
+          <a:bodyPr rtlCol="0" anchor="ctr"/>
+          <a:lstStyle/>
+          <a:p/>
+        </p:txBody>
+      </p:sp>
+      <p:sp>
+        <p:nvSpPr>
+          <p:cNvPr id="12" name="TextBox 11"/>
+          <p:cNvSpPr txBox="1"/>
+          <p:nvPr/>
+        </p:nvSpPr>
+        <p:spPr>
+          <a:xfrm>
+            <a:off x="2194560" y="4434840"/>
+            <a:ext cx="548640" cy="777240"/>
+          </a:xfrm>
+          <a:prstGeom prst="rect">
+            <a:avLst/>
+          </a:prstGeom>
+          <a:noFill/>
+        </p:spPr>
+        <p:txBody>
+          <a:bodyPr wrap="square" lIns="45720" rIns="45720" tIns="27432" bIns="27432" anchor="ctr">
+            <a:spAutoFit/>
+          </a:bodyPr>
+          <a:lstStyle/>
+          <a:p>
+            <a:r>
+              <a:rPr sz="2200" b="1">
+                <a:solidFill>
+                  <a:srgbClr val="00D4AA"/>
+                </a:solidFill>
+                <a:latin typeface="Inter"/>
+              </a:rPr>
+              <a:t>✓</a:t>
+            </a:r>
+          </a:p>
+        </p:txBody>
+      </p:sp>
+      <p:sp>
+        <p:nvSpPr>
+          <p:cNvPr id="13" name="TextBox 12"/>
+          <p:cNvSpPr txBox="1"/>
+          <p:nvPr/>
+        </p:nvSpPr>
+        <p:spPr>
+          <a:xfrm>
+            <a:off x="2788920" y="4434840"/>
+            <a:ext cx="7223760" cy="777240"/>
+          </a:xfrm>
+          <a:prstGeom prst="rect">
+            <a:avLst/>
+          </a:prstGeom>
+          <a:noFill/>
+        </p:spPr>
+        <p:txBody>
+          <a:bodyPr wrap="square" lIns="45720" rIns="45720" tIns="27432" bIns="27432" anchor="ctr">
+            <a:spAutoFit/>
+          </a:bodyPr>
+          <a:lstStyle/>
+          <a:p>
+            <a:r>
+              <a:rPr sz="1800" b="1">
+                <a:solidFill>
+                  <a:srgbClr val="FFFFFF"/>
+                </a:solidFill>
+                <a:latin typeface="Inter"/>
+              </a:rPr>
+              <a:t>One paragraph: decision plus two triggers</a:t>
             </a:r>
           </a:p>
         </p:txBody>
@@ -12560,7 +15496,7 @@
 </p:sld>
 </file>
 
-<file path=ppt/slides/slide3.xml><?xml version="1.0" encoding="utf-8"?>
+<file path=ppt/slides/slide35.xml><?xml version="1.0" encoding="utf-8"?>
 <p:sld xmlns:a="http://schemas.openxmlformats.org/drawingml/2006/main" xmlns:p="http://schemas.openxmlformats.org/presentationml/2006/main" xmlns:r="http://schemas.openxmlformats.org/officeDocument/2006/relationships">
   <p:cSld>
     <p:bg>
@@ -12607,7 +15543,7 @@
                 </a:solidFill>
                 <a:latin typeface="Inter"/>
               </a:rPr>
-              <a:t>AI Agent Observability &amp; Cost Control · Section 12 · Lecture 12.1</a:t>
+              <a:t>AI Agent Observability &amp; Cost Control · Section 12 · Lecture 12.5</a:t>
             </a:r>
           </a:p>
         </p:txBody>
@@ -12620,8 +15556,8 @@
         </p:nvSpPr>
         <p:spPr>
           <a:xfrm>
-            <a:off x="457200" y="411480"/>
-            <a:ext cx="11247120" cy="868680"/>
+            <a:off x="1371600" y="822960"/>
+            <a:ext cx="9418320" cy="457200"/>
           </a:xfrm>
           <a:prstGeom prst="rect">
             <a:avLst/>
@@ -12634,11 +15570,42 @@
           </a:bodyPr>
           <a:lstStyle/>
           <a:p>
-            <a:pPr>
-              <a:lnSpc>
-                <a:spcPct val="110000"/>
-              </a:lnSpc>
-            </a:pPr>
+            <a:pPr algn="ctr"/>
+            <a:r>
+              <a:rPr sz="1200" b="1">
+                <a:solidFill>
+                  <a:srgbClr val="00D4AA"/>
+                </a:solidFill>
+                <a:latin typeface="Inter"/>
+              </a:rPr>
+              <a:t>SECTION COMPLETE</a:t>
+            </a:r>
+          </a:p>
+        </p:txBody>
+      </p:sp>
+      <p:sp>
+        <p:nvSpPr>
+          <p:cNvPr id="4" name="TextBox 3"/>
+          <p:cNvSpPr txBox="1"/>
+          <p:nvPr/>
+        </p:nvSpPr>
+        <p:spPr>
+          <a:xfrm>
+            <a:off x="1371600" y="1234440"/>
+            <a:ext cx="9418320" cy="822960"/>
+          </a:xfrm>
+          <a:prstGeom prst="rect">
+            <a:avLst/>
+          </a:prstGeom>
+          <a:noFill/>
+        </p:spPr>
+        <p:txBody>
+          <a:bodyPr wrap="square" lIns="45720" rIns="45720" tIns="27432" bIns="27432" anchor="t">
+            <a:spAutoFit/>
+          </a:bodyPr>
+          <a:lstStyle/>
+          <a:p>
+            <a:pPr algn="ctr"/>
             <a:r>
               <a:rPr sz="2600" b="1">
                 <a:solidFill>
@@ -12646,27 +15613,29 @@
                 </a:solidFill>
                 <a:latin typeface="Inter"/>
               </a:rPr>
-              <a:t>What moves for free</a:t>
-            </a:r>
-          </a:p>
-        </p:txBody>
-      </p:sp>
-      <p:sp>
-        <p:nvSpPr>
-          <p:cNvPr id="4" name="Rectangle 3"/>
+              <a:t>You can now</a:t>
+            </a:r>
+          </a:p>
+        </p:txBody>
+      </p:sp>
+      <p:sp>
+        <p:nvSpPr>
+          <p:cNvPr id="5" name="Rounded Rectangle 4"/>
           <p:cNvSpPr/>
           <p:nvPr/>
         </p:nvSpPr>
         <p:spPr>
           <a:xfrm>
-            <a:off x="502920" y="1024128"/>
-            <a:ext cx="822960" cy="54864"/>
-          </a:xfrm>
-          <a:prstGeom prst="rect">
-            <a:avLst/>
+            <a:off x="2011680" y="2514600"/>
+            <a:ext cx="8138160" cy="777240"/>
+          </a:xfrm>
+          <a:prstGeom prst="roundRect">
+            <a:avLst>
+              <a:gd name="adj" fmla="val 6588"/>
+            </a:avLst>
           </a:prstGeom>
           <a:solidFill>
-            <a:srgbClr val="00D4AA"/>
+            <a:srgbClr val="1A2742"/>
           </a:solidFill>
           <a:ln>
             <a:noFill/>
@@ -12695,14 +15664,14 @@
       </p:sp>
       <p:sp>
         <p:nvSpPr>
-          <p:cNvPr id="5" name="TextBox 4"/>
+          <p:cNvPr id="6" name="TextBox 5"/>
           <p:cNvSpPr txBox="1"/>
           <p:nvPr/>
         </p:nvSpPr>
         <p:spPr>
           <a:xfrm>
-            <a:off x="457200" y="1325880"/>
-            <a:ext cx="4343400" cy="4983480"/>
+            <a:off x="2194560" y="2514600"/>
+            <a:ext cx="548640" cy="777240"/>
           </a:xfrm>
           <a:prstGeom prst="rect">
             <a:avLst/>
@@ -12710,251 +15679,281 @@
           <a:noFill/>
         </p:spPr>
         <p:txBody>
-          <a:bodyPr wrap="square" lIns="45720" rIns="45720" tIns="27432" bIns="27432" anchor="t">
+          <a:bodyPr wrap="square" lIns="45720" rIns="45720" tIns="27432" bIns="27432" anchor="ctr">
             <a:spAutoFit/>
           </a:bodyPr>
           <a:lstStyle/>
           <a:p>
-            <a:pPr marL="292608" indent="-292608">
-              <a:lnSpc>
-                <a:spcPct val="120000"/>
-              </a:lnSpc>
-              <a:spcAft>
-                <a:spcPts val="1120"/>
-              </a:spcAft>
-              <a:buClr>
-                <a:srgbClr val="00D4AA"/>
-              </a:buClr>
-              <a:buFont typeface="Inter"/>
-              <a:buChar char="•"/>
-            </a:pPr>
-            <a:r>
-              <a:rPr sz="1600" b="0">
+            <a:r>
+              <a:rPr sz="2200" b="1">
+                <a:solidFill>
+                  <a:srgbClr val="00D4AA"/>
+                </a:solidFill>
+                <a:latin typeface="Inter"/>
+              </a:rPr>
+              <a:t>✓</a:t>
+            </a:r>
+          </a:p>
+        </p:txBody>
+      </p:sp>
+      <p:sp>
+        <p:nvSpPr>
+          <p:cNvPr id="7" name="TextBox 6"/>
+          <p:cNvSpPr txBox="1"/>
+          <p:nvPr/>
+        </p:nvSpPr>
+        <p:spPr>
+          <a:xfrm>
+            <a:off x="2788920" y="2514600"/>
+            <a:ext cx="7223760" cy="777240"/>
+          </a:xfrm>
+          <a:prstGeom prst="rect">
+            <a:avLst/>
+          </a:prstGeom>
+          <a:noFill/>
+        </p:spPr>
+        <p:txBody>
+          <a:bodyPr wrap="square" lIns="45720" rIns="45720" tIns="27432" bIns="27432" anchor="ctr">
+            <a:spAutoFit/>
+          </a:bodyPr>
+          <a:lstStyle/>
+          <a:p>
+            <a:r>
+              <a:rPr sz="1800" b="1">
                 <a:solidFill>
                   <a:srgbClr val="FFFFFF"/>
                 </a:solidFill>
                 <a:latin typeface="Inter"/>
               </a:rPr>
-              <a:t>Traces, spans, attributes, events, status: yes, via OTLP</a:t>
-            </a:r>
-          </a:p>
-          <a:p>
-            <a:pPr marL="292608" indent="-292608">
-              <a:lnSpc>
-                <a:spcPct val="120000"/>
-              </a:lnSpc>
-              <a:spcAft>
-                <a:spcPts val="1120"/>
-              </a:spcAft>
-              <a:buClr>
-                <a:srgbClr val="00D4AA"/>
-              </a:buClr>
-              <a:buFont typeface="Inter"/>
-              <a:buChar char="•"/>
-            </a:pPr>
-            <a:r>
-              <a:rPr sz="1600" b="0">
+              <a:t>Separate portable telemetry from vendor features</a:t>
+            </a:r>
+          </a:p>
+        </p:txBody>
+      </p:sp>
+      <p:sp>
+        <p:nvSpPr>
+          <p:cNvPr id="8" name="Rounded Rectangle 7"/>
+          <p:cNvSpPr/>
+          <p:nvPr/>
+        </p:nvSpPr>
+        <p:spPr>
+          <a:xfrm>
+            <a:off x="2011680" y="3474720"/>
+            <a:ext cx="8138160" cy="777240"/>
+          </a:xfrm>
+          <a:prstGeom prst="roundRect">
+            <a:avLst>
+              <a:gd name="adj" fmla="val 6588"/>
+            </a:avLst>
+          </a:prstGeom>
+          <a:solidFill>
+            <a:srgbClr val="1A2742"/>
+          </a:solidFill>
+          <a:ln>
+            <a:noFill/>
+          </a:ln>
+          <a:effectLst/>
+        </p:spPr>
+        <p:style>
+          <a:lnRef idx="1">
+            <a:schemeClr val="accent1"/>
+          </a:lnRef>
+          <a:fillRef idx="3">
+            <a:schemeClr val="accent1"/>
+          </a:fillRef>
+          <a:effectRef idx="2">
+            <a:schemeClr val="accent1"/>
+          </a:effectRef>
+          <a:fontRef idx="minor">
+            <a:schemeClr val="lt1"/>
+          </a:fontRef>
+        </p:style>
+        <p:txBody>
+          <a:bodyPr rtlCol="0" anchor="ctr"/>
+          <a:lstStyle/>
+          <a:p/>
+        </p:txBody>
+      </p:sp>
+      <p:sp>
+        <p:nvSpPr>
+          <p:cNvPr id="9" name="TextBox 8"/>
+          <p:cNvSpPr txBox="1"/>
+          <p:nvPr/>
+        </p:nvSpPr>
+        <p:spPr>
+          <a:xfrm>
+            <a:off x="2194560" y="3474720"/>
+            <a:ext cx="548640" cy="777240"/>
+          </a:xfrm>
+          <a:prstGeom prst="rect">
+            <a:avLst/>
+          </a:prstGeom>
+          <a:noFill/>
+        </p:spPr>
+        <p:txBody>
+          <a:bodyPr wrap="square" lIns="45720" rIns="45720" tIns="27432" bIns="27432" anchor="ctr">
+            <a:spAutoFit/>
+          </a:bodyPr>
+          <a:lstStyle/>
+          <a:p>
+            <a:r>
+              <a:rPr sz="2200" b="1">
+                <a:solidFill>
+                  <a:srgbClr val="00D4AA"/>
+                </a:solidFill>
+                <a:latin typeface="Inter"/>
+              </a:rPr>
+              <a:t>✓</a:t>
+            </a:r>
+          </a:p>
+        </p:txBody>
+      </p:sp>
+      <p:sp>
+        <p:nvSpPr>
+          <p:cNvPr id="10" name="TextBox 9"/>
+          <p:cNvSpPr txBox="1"/>
+          <p:nvPr/>
+        </p:nvSpPr>
+        <p:spPr>
+          <a:xfrm>
+            <a:off x="2788920" y="3474720"/>
+            <a:ext cx="7223760" cy="777240"/>
+          </a:xfrm>
+          <a:prstGeom prst="rect">
+            <a:avLst/>
+          </a:prstGeom>
+          <a:noFill/>
+        </p:spPr>
+        <p:txBody>
+          <a:bodyPr wrap="square" lIns="45720" rIns="45720" tIns="27432" bIns="27432" anchor="ctr">
+            <a:spAutoFit/>
+          </a:bodyPr>
+          <a:lstStyle/>
+          <a:p>
+            <a:r>
+              <a:rPr sz="1800" b="1">
                 <a:solidFill>
                   <a:srgbClr val="FFFFFF"/>
                 </a:solidFill>
                 <a:latin typeface="Inter"/>
               </a:rPr>
-              <a:t>GenAI attributes: </a:t>
-            </a:r>
-            <a:r>
-              <a:rPr sz="1472" b="0">
+              <a:t>Trace Atlas to LangSmith or Phoenix</a:t>
+            </a:r>
+          </a:p>
+        </p:txBody>
+      </p:sp>
+      <p:sp>
+        <p:nvSpPr>
+          <p:cNvPr id="11" name="Rounded Rectangle 10"/>
+          <p:cNvSpPr/>
+          <p:nvPr/>
+        </p:nvSpPr>
+        <p:spPr>
+          <a:xfrm>
+            <a:off x="2011680" y="4434840"/>
+            <a:ext cx="8138160" cy="777240"/>
+          </a:xfrm>
+          <a:prstGeom prst="roundRect">
+            <a:avLst>
+              <a:gd name="adj" fmla="val 6588"/>
+            </a:avLst>
+          </a:prstGeom>
+          <a:solidFill>
+            <a:srgbClr val="1A2742"/>
+          </a:solidFill>
+          <a:ln>
+            <a:noFill/>
+          </a:ln>
+          <a:effectLst/>
+        </p:spPr>
+        <p:style>
+          <a:lnRef idx="1">
+            <a:schemeClr val="accent1"/>
+          </a:lnRef>
+          <a:fillRef idx="3">
+            <a:schemeClr val="accent1"/>
+          </a:fillRef>
+          <a:effectRef idx="2">
+            <a:schemeClr val="accent1"/>
+          </a:effectRef>
+          <a:fontRef idx="minor">
+            <a:schemeClr val="lt1"/>
+          </a:fontRef>
+        </p:style>
+        <p:txBody>
+          <a:bodyPr rtlCol="0" anchor="ctr"/>
+          <a:lstStyle/>
+          <a:p/>
+        </p:txBody>
+      </p:sp>
+      <p:sp>
+        <p:nvSpPr>
+          <p:cNvPr id="12" name="TextBox 11"/>
+          <p:cNvSpPr txBox="1"/>
+          <p:nvPr/>
+        </p:nvSpPr>
+        <p:spPr>
+          <a:xfrm>
+            <a:off x="2194560" y="4434840"/>
+            <a:ext cx="548640" cy="777240"/>
+          </a:xfrm>
+          <a:prstGeom prst="rect">
+            <a:avLst/>
+          </a:prstGeom>
+          <a:noFill/>
+        </p:spPr>
+        <p:txBody>
+          <a:bodyPr wrap="square" lIns="45720" rIns="45720" tIns="27432" bIns="27432" anchor="ctr">
+            <a:spAutoFit/>
+          </a:bodyPr>
+          <a:lstStyle/>
+          <a:p>
+            <a:r>
+              <a:rPr sz="2200" b="1">
                 <a:solidFill>
                   <a:srgbClr val="00D4AA"/>
                 </a:solidFill>
-                <a:latin typeface="JetBrains Mono"/>
-              </a:rPr>
-              <a:t>gen_ai.usage.*</a:t>
-            </a:r>
-            <a:r>
-              <a:rPr sz="1600" b="0">
+                <a:latin typeface="Inter"/>
+              </a:rPr>
+              <a:t>✓</a:t>
+            </a:r>
+          </a:p>
+        </p:txBody>
+      </p:sp>
+      <p:sp>
+        <p:nvSpPr>
+          <p:cNvPr id="13" name="TextBox 12"/>
+          <p:cNvSpPr txBox="1"/>
+          <p:nvPr/>
+        </p:nvSpPr>
+        <p:spPr>
+          <a:xfrm>
+            <a:off x="2788920" y="4434840"/>
+            <a:ext cx="7223760" cy="777240"/>
+          </a:xfrm>
+          <a:prstGeom prst="rect">
+            <a:avLst/>
+          </a:prstGeom>
+          <a:noFill/>
+        </p:spPr>
+        <p:txBody>
+          <a:bodyPr wrap="square" lIns="45720" rIns="45720" tIns="27432" bIns="27432" anchor="ctr">
+            <a:spAutoFit/>
+          </a:bodyPr>
+          <a:lstStyle/>
+          <a:p>
+            <a:r>
+              <a:rPr sz="1800" b="1">
                 <a:solidFill>
                   <a:srgbClr val="FFFFFF"/>
                 </a:solidFill>
                 <a:latin typeface="Inter"/>
               </a:rPr>
-              <a:t>, </a:t>
-            </a:r>
-            <a:r>
-              <a:rPr sz="1472" b="0">
-                <a:solidFill>
-                  <a:srgbClr val="00D4AA"/>
-                </a:solidFill>
-                <a:latin typeface="JetBrains Mono"/>
-              </a:rPr>
-              <a:t>gen_ai.request.model</a:t>
-            </a:r>
-            <a:r>
-              <a:rPr sz="1600" b="0">
-                <a:solidFill>
-                  <a:srgbClr val="FFFFFF"/>
-                </a:solidFill>
-                <a:latin typeface="Inter"/>
-              </a:rPr>
-              <a:t>, </a:t>
-            </a:r>
-            <a:r>
-              <a:rPr sz="1472" b="0">
-                <a:solidFill>
-                  <a:srgbClr val="00D4AA"/>
-                </a:solidFill>
-                <a:latin typeface="JetBrains Mono"/>
-              </a:rPr>
-              <a:t>gen_ai.tool.name</a:t>
-            </a:r>
-            <a:r>
-              <a:rPr sz="1600" b="0">
-                <a:solidFill>
-                  <a:srgbClr val="FFFFFF"/>
-                </a:solidFill>
-                <a:latin typeface="Inter"/>
-              </a:rPr>
-              <a:t>: yes</a:t>
-            </a:r>
-          </a:p>
-          <a:p>
-            <a:pPr marL="292608" indent="-292608">
-              <a:lnSpc>
-                <a:spcPct val="120000"/>
-              </a:lnSpc>
-              <a:spcAft>
-                <a:spcPts val="1120"/>
-              </a:spcAft>
-              <a:buClr>
-                <a:srgbClr val="00D4AA"/>
-              </a:buClr>
-              <a:buFont typeface="Inter"/>
-              <a:buChar char="•"/>
-            </a:pPr>
-            <a:r>
-              <a:rPr sz="1600" b="0">
-                <a:solidFill>
-                  <a:srgbClr val="FFFFFF"/>
-                </a:solidFill>
-                <a:latin typeface="Inter"/>
-              </a:rPr>
-              <a:t>Resource attributes: </a:t>
-            </a:r>
-            <a:r>
-              <a:rPr sz="1472" b="0">
-                <a:solidFill>
-                  <a:srgbClr val="00D4AA"/>
-                </a:solidFill>
-                <a:latin typeface="JetBrains Mono"/>
-              </a:rPr>
-              <a:t>service.name</a:t>
-            </a:r>
-            <a:r>
-              <a:rPr sz="1600" b="0">
-                <a:solidFill>
-                  <a:srgbClr val="FFFFFF"/>
-                </a:solidFill>
-                <a:latin typeface="Inter"/>
-              </a:rPr>
-              <a:t>, </a:t>
-            </a:r>
-            <a:r>
-              <a:rPr sz="1472" b="0">
-                <a:solidFill>
-                  <a:srgbClr val="00D4AA"/>
-                </a:solidFill>
-                <a:latin typeface="JetBrains Mono"/>
-              </a:rPr>
-              <a:t>deployment.environment</a:t>
-            </a:r>
-            <a:r>
-              <a:rPr sz="1600" b="0">
-                <a:solidFill>
-                  <a:srgbClr val="FFFFFF"/>
-                </a:solidFill>
-                <a:latin typeface="Inter"/>
-              </a:rPr>
-              <a:t>, release: yes</a:t>
-            </a:r>
-          </a:p>
-          <a:p>
-            <a:pPr marL="292608" indent="-292608">
-              <a:lnSpc>
-                <a:spcPct val="120000"/>
-              </a:lnSpc>
-              <a:spcAft>
-                <a:spcPts val="1120"/>
-              </a:spcAft>
-              <a:buClr>
-                <a:srgbClr val="00D4AA"/>
-              </a:buClr>
-              <a:buFont typeface="Inter"/>
-              <a:buChar char="•"/>
-            </a:pPr>
-            <a:r>
-              <a:rPr sz="1600" b="0">
-                <a:solidFill>
-                  <a:srgbClr val="FFFFFF"/>
-                </a:solidFill>
-                <a:latin typeface="Inter"/>
-              </a:rPr>
-              <a:t>Session, user and tenant: yes, if they are span attributes, not SDK-only calls</a:t>
-            </a:r>
-          </a:p>
-          <a:p>
-            <a:pPr marL="292608" indent="-292608">
-              <a:lnSpc>
-                <a:spcPct val="120000"/>
-              </a:lnSpc>
-              <a:spcAft>
-                <a:spcPts val="1120"/>
-              </a:spcAft>
-              <a:buClr>
-                <a:srgbClr val="00D4AA"/>
-              </a:buClr>
-              <a:buFont typeface="Inter"/>
-              <a:buChar char="•"/>
-            </a:pPr>
-            <a:r>
-              <a:rPr sz="1600" b="0">
-                <a:solidFill>
-                  <a:srgbClr val="FFFFFF"/>
-                </a:solidFill>
-                <a:latin typeface="Inter"/>
-              </a:rPr>
-              <a:t>Prometheus metrics and Grafana: unaffected, they never touched the LLM backend</a:t>
-            </a:r>
-          </a:p>
-        </p:txBody>
-      </p:sp>
-      <p:pic>
-        <p:nvPicPr>
-          <p:cNvPr id="6" name="Picture 5" descr="D4-langfuse-on-otel-notitle.png"/>
-          <p:cNvPicPr>
-            <a:picLocks noChangeAspect="1"/>
-          </p:cNvPicPr>
-          <p:nvPr/>
-        </p:nvPicPr>
-        <p:blipFill>
-          <a:blip r:embed="rId3"/>
-          <a:stretch>
-            <a:fillRect/>
-          </a:stretch>
-        </p:blipFill>
-        <p:spPr>
-          <a:xfrm>
-            <a:off x="4983480" y="2231707"/>
-            <a:ext cx="6766560" cy="3171825"/>
-          </a:xfrm>
-          <a:prstGeom prst="rect">
-            <a:avLst/>
-          </a:prstGeom>
-          <a:ln>
-            <a:solidFill>
-              <a:srgbClr val="1A2742"/>
-            </a:solidFill>
-          </a:ln>
-        </p:spPr>
-      </p:pic>
+              <a:t>Choose and defend a backend in one paragraph</a:t>
+            </a:r>
+          </a:p>
+        </p:txBody>
+      </p:sp>
     </p:spTree>
   </p:cSld>
   <p:clrMapOvr>
@@ -12963,7 +15962,7 @@
 </p:sld>
 </file>
 
-<file path=ppt/slides/slide30.xml><?xml version="1.0" encoding="utf-8"?>
+<file path=ppt/slides/slide36.xml><?xml version="1.0" encoding="utf-8"?>
 <p:sld xmlns:a="http://schemas.openxmlformats.org/drawingml/2006/main" xmlns:p="http://schemas.openxmlformats.org/presentationml/2006/main" xmlns:r="http://schemas.openxmlformats.org/officeDocument/2006/relationships">
   <p:cSld>
     <p:bg>
@@ -13010,7 +16009,7 @@
                 </a:solidFill>
                 <a:latin typeface="Inter"/>
               </a:rPr>
-              <a:t>AI Agent Observability &amp; Cost Control · Section 12 · Lecture 12.6</a:t>
+              <a:t>AI Agent Observability &amp; Cost Control · Section 12 · Lecture 12.5</a:t>
             </a:r>
           </a:p>
         </p:txBody>
@@ -13023,8 +16022,42 @@
         </p:nvSpPr>
         <p:spPr>
           <a:xfrm>
-            <a:off x="6675120" y="320040"/>
-            <a:ext cx="5074920" cy="548640"/>
+            <a:off x="2377440" y="2286000"/>
+            <a:ext cx="1097280" cy="1097280"/>
+          </a:xfrm>
+          <a:prstGeom prst="rect">
+            <a:avLst/>
+          </a:prstGeom>
+          <a:noFill/>
+        </p:spPr>
+        <p:txBody>
+          <a:bodyPr wrap="square" lIns="45720" rIns="45720" tIns="27432" bIns="27432" anchor="ctr">
+            <a:spAutoFit/>
+          </a:bodyPr>
+          <a:lstStyle/>
+          <a:p>
+            <a:r>
+              <a:rPr sz="5400" b="1">
+                <a:solidFill>
+                  <a:srgbClr val="00D4AA"/>
+                </a:solidFill>
+                <a:latin typeface="Inter"/>
+              </a:rPr>
+              <a:t>→</a:t>
+            </a:r>
+          </a:p>
+        </p:txBody>
+      </p:sp>
+      <p:sp>
+        <p:nvSpPr>
+          <p:cNvPr id="4" name="TextBox 3"/>
+          <p:cNvSpPr txBox="1"/>
+          <p:nvPr/>
+        </p:nvSpPr>
+        <p:spPr>
+          <a:xfrm>
+            <a:off x="3566160" y="2148840"/>
+            <a:ext cx="7315200" cy="457200"/>
           </a:xfrm>
           <a:prstGeom prst="rect">
             <a:avLst/>
@@ -13037,29 +16070,28 @@
           </a:bodyPr>
           <a:lstStyle/>
           <a:p>
-            <a:pPr algn="r"/>
-            <a:r>
-              <a:rPr sz="1000" b="0">
+            <a:r>
+              <a:rPr sz="1400" b="0">
                 <a:solidFill>
                   <a:srgbClr val="94A3B8"/>
                 </a:solidFill>
                 <a:latin typeface="Inter"/>
               </a:rPr>
-              <a:t>SECTION 12 · PORTABILITY AND ALTERNATIVES</a:t>
-            </a:r>
-          </a:p>
-        </p:txBody>
-      </p:sp>
-      <p:sp>
-        <p:nvSpPr>
-          <p:cNvPr id="4" name="TextBox 3"/>
+              <a:t>Next up:</a:t>
+            </a:r>
+          </a:p>
+        </p:txBody>
+      </p:sp>
+      <p:sp>
+        <p:nvSpPr>
+          <p:cNvPr id="5" name="TextBox 4"/>
           <p:cNvSpPr txBox="1"/>
           <p:nvPr/>
         </p:nvSpPr>
         <p:spPr>
           <a:xfrm>
-            <a:off x="914400" y="1417320"/>
-            <a:ext cx="10332720" cy="457200"/>
+            <a:off x="3566160" y="2560320"/>
+            <a:ext cx="7315200" cy="1097280"/>
           </a:xfrm>
           <a:prstGeom prst="rect">
             <a:avLst/>
@@ -13073,27 +16105,27 @@
           <a:lstStyle/>
           <a:p>
             <a:r>
-              <a:rPr sz="1200" b="1">
-                <a:solidFill>
-                  <a:srgbClr val="00D4AA"/>
-                </a:solidFill>
-                <a:latin typeface="Inter"/>
-              </a:rPr>
-              <a:t>LECTURE 12.6</a:t>
-            </a:r>
-          </a:p>
-        </p:txBody>
-      </p:sp>
-      <p:sp>
-        <p:nvSpPr>
-          <p:cNvPr id="5" name="TextBox 4"/>
+              <a:rPr sz="2600" b="1">
+                <a:solidFill>
+                  <a:srgbClr val="FFFFFF"/>
+                </a:solidFill>
+                <a:latin typeface="Inter"/>
+              </a:rPr>
+              <a:t>Quiz: Portability</a:t>
+            </a:r>
+          </a:p>
+        </p:txBody>
+      </p:sp>
+      <p:sp>
+        <p:nvSpPr>
+          <p:cNvPr id="6" name="TextBox 5"/>
           <p:cNvSpPr txBox="1"/>
           <p:nvPr/>
         </p:nvSpPr>
         <p:spPr>
           <a:xfrm>
-            <a:off x="914400" y="1874519"/>
-            <a:ext cx="10332720" cy="1645920"/>
+            <a:off x="3566160" y="3703320"/>
+            <a:ext cx="7315200" cy="1097280"/>
           </a:xfrm>
           <a:prstGeom prst="rect">
             <a:avLst/>
@@ -13106,100 +16138,14 @@
           </a:bodyPr>
           <a:lstStyle/>
           <a:p>
-            <a:pPr>
-              <a:lnSpc>
-                <a:spcPct val="110000"/>
-              </a:lnSpc>
-            </a:pPr>
-            <a:r>
-              <a:rPr sz="3000" b="1">
-                <a:solidFill>
-                  <a:srgbClr val="FFFFFF"/>
-                </a:solidFill>
-                <a:latin typeface="Inter"/>
-              </a:rPr>
-              <a:t>Quiz: Portability</a:t>
-            </a:r>
-          </a:p>
-        </p:txBody>
-      </p:sp>
-      <p:sp>
-        <p:nvSpPr>
-          <p:cNvPr id="6" name="Rectangle 5"/>
-          <p:cNvSpPr/>
-          <p:nvPr/>
-        </p:nvSpPr>
-        <p:spPr>
-          <a:xfrm>
-            <a:off x="914400" y="3794760"/>
-            <a:ext cx="64008" cy="1143000"/>
-          </a:xfrm>
-          <a:prstGeom prst="rect">
-            <a:avLst/>
-          </a:prstGeom>
-          <a:solidFill>
-            <a:srgbClr val="00D4AA"/>
-          </a:solidFill>
-          <a:ln>
-            <a:noFill/>
-          </a:ln>
-          <a:effectLst/>
-        </p:spPr>
-        <p:style>
-          <a:lnRef idx="1">
-            <a:schemeClr val="accent1"/>
-          </a:lnRef>
-          <a:fillRef idx="3">
-            <a:schemeClr val="accent1"/>
-          </a:fillRef>
-          <a:effectRef idx="2">
-            <a:schemeClr val="accent1"/>
-          </a:effectRef>
-          <a:fontRef idx="minor">
-            <a:schemeClr val="lt1"/>
-          </a:fontRef>
-        </p:style>
-        <p:txBody>
-          <a:bodyPr rtlCol="0" anchor="ctr"/>
-          <a:lstStyle/>
-          <a:p/>
-        </p:txBody>
-      </p:sp>
-      <p:sp>
-        <p:nvSpPr>
-          <p:cNvPr id="7" name="TextBox 6"/>
-          <p:cNvSpPr txBox="1"/>
-          <p:nvPr/>
-        </p:nvSpPr>
-        <p:spPr>
-          <a:xfrm>
-            <a:off x="1188720" y="3749039"/>
-            <a:ext cx="9692640" cy="1280160"/>
-          </a:xfrm>
-          <a:prstGeom prst="rect">
-            <a:avLst/>
-          </a:prstGeom>
-          <a:noFill/>
-        </p:spPr>
-        <p:txBody>
-          <a:bodyPr wrap="square" lIns="45720" rIns="45720" tIns="27432" bIns="27432" anchor="ctr">
-            <a:spAutoFit/>
-          </a:bodyPr>
-          <a:lstStyle/>
-          <a:p>
-            <a:pPr>
-              <a:lnSpc>
-                <a:spcPct val="130000"/>
-              </a:lnSpc>
-            </a:pPr>
-            <a:r>
-              <a:rPr sz="1600" b="0">
-                <a:solidFill>
-                  <a:srgbClr val="CBD5E1"/>
-                </a:solidFill>
-                <a:latin typeface="Inter"/>
-              </a:rPr>
-              <a:t>Check what is and is not portable across backends.</a:t>
+            <a:r>
+              <a:rPr sz="1400" b="0">
+                <a:solidFill>
+                  <a:srgbClr val="94A3B8"/>
+                </a:solidFill>
+                <a:latin typeface="Inter"/>
+              </a:rPr>
+              <a:t>A short quiz on portability, then Section 13, where you self-host the whole stack and gate pull requests…</a:t>
             </a:r>
           </a:p>
         </p:txBody>
@@ -13212,7 +16158,7 @@
 </p:sld>
 </file>
 
-<file path=ppt/slides/slide31.xml><?xml version="1.0" encoding="utf-8"?>
+<file path=ppt/slides/slide37.xml><?xml version="1.0" encoding="utf-8"?>
 <p:sld xmlns:a="http://schemas.openxmlformats.org/drawingml/2006/main" xmlns:p="http://schemas.openxmlformats.org/presentationml/2006/main" xmlns:r="http://schemas.openxmlformats.org/officeDocument/2006/relationships">
   <p:cSld>
     <p:bg>
@@ -13272,8 +16218,77 @@
         </p:nvSpPr>
         <p:spPr>
           <a:xfrm>
-            <a:off x="457200" y="411480"/>
-            <a:ext cx="11247120" cy="868680"/>
+            <a:off x="6675120" y="320040"/>
+            <a:ext cx="5074920" cy="548640"/>
+          </a:xfrm>
+          <a:prstGeom prst="rect">
+            <a:avLst/>
+          </a:prstGeom>
+          <a:noFill/>
+        </p:spPr>
+        <p:txBody>
+          <a:bodyPr wrap="square" lIns="45720" rIns="45720" tIns="27432" bIns="27432" anchor="t">
+            <a:spAutoFit/>
+          </a:bodyPr>
+          <a:lstStyle/>
+          <a:p>
+            <a:pPr algn="r"/>
+            <a:r>
+              <a:rPr sz="1000" b="0">
+                <a:solidFill>
+                  <a:srgbClr val="94A3B8"/>
+                </a:solidFill>
+                <a:latin typeface="Inter"/>
+              </a:rPr>
+              <a:t>SECTION 12 · PORTABILITY AND ALTERNATIVES</a:t>
+            </a:r>
+          </a:p>
+        </p:txBody>
+      </p:sp>
+      <p:sp>
+        <p:nvSpPr>
+          <p:cNvPr id="4" name="TextBox 3"/>
+          <p:cNvSpPr txBox="1"/>
+          <p:nvPr/>
+        </p:nvSpPr>
+        <p:spPr>
+          <a:xfrm>
+            <a:off x="914400" y="1417320"/>
+            <a:ext cx="10332720" cy="457200"/>
+          </a:xfrm>
+          <a:prstGeom prst="rect">
+            <a:avLst/>
+          </a:prstGeom>
+          <a:noFill/>
+        </p:spPr>
+        <p:txBody>
+          <a:bodyPr wrap="square" lIns="45720" rIns="45720" tIns="27432" bIns="27432" anchor="t">
+            <a:spAutoFit/>
+          </a:bodyPr>
+          <a:lstStyle/>
+          <a:p>
+            <a:r>
+              <a:rPr sz="1200" b="1">
+                <a:solidFill>
+                  <a:srgbClr val="00D4AA"/>
+                </a:solidFill>
+                <a:latin typeface="Inter"/>
+              </a:rPr>
+              <a:t>LECTURE 12.6</a:t>
+            </a:r>
+          </a:p>
+        </p:txBody>
+      </p:sp>
+      <p:sp>
+        <p:nvSpPr>
+          <p:cNvPr id="5" name="TextBox 4"/>
+          <p:cNvSpPr txBox="1"/>
+          <p:nvPr/>
+        </p:nvSpPr>
+        <p:spPr>
+          <a:xfrm>
+            <a:off x="914400" y="1874519"/>
+            <a:ext cx="10332720" cy="1645920"/>
           </a:xfrm>
           <a:prstGeom prst="rect">
             <a:avLst/>
@@ -13292,7 +16307,7 @@
               </a:lnSpc>
             </a:pPr>
             <a:r>
-              <a:rPr sz="2600" b="1">
+              <a:rPr sz="3000" b="1">
                 <a:solidFill>
                   <a:srgbClr val="FFFFFF"/>
                 </a:solidFill>
@@ -13305,14 +16320,14 @@
       </p:sp>
       <p:sp>
         <p:nvSpPr>
-          <p:cNvPr id="4" name="Rectangle 3"/>
+          <p:cNvPr id="6" name="Rectangle 5"/>
           <p:cNvSpPr/>
           <p:nvPr/>
         </p:nvSpPr>
         <p:spPr>
           <a:xfrm>
-            <a:off x="502920" y="1024128"/>
-            <a:ext cx="822960" cy="54864"/>
+            <a:off x="914400" y="3794760"/>
+            <a:ext cx="64008" cy="1143000"/>
           </a:xfrm>
           <a:prstGeom prst="rect">
             <a:avLst/>
@@ -13347,6 +16362,186 @@
       </p:sp>
       <p:sp>
         <p:nvSpPr>
+          <p:cNvPr id="7" name="TextBox 6"/>
+          <p:cNvSpPr txBox="1"/>
+          <p:nvPr/>
+        </p:nvSpPr>
+        <p:spPr>
+          <a:xfrm>
+            <a:off x="1188720" y="3749039"/>
+            <a:ext cx="9692640" cy="1280160"/>
+          </a:xfrm>
+          <a:prstGeom prst="rect">
+            <a:avLst/>
+          </a:prstGeom>
+          <a:noFill/>
+        </p:spPr>
+        <p:txBody>
+          <a:bodyPr wrap="square" lIns="45720" rIns="45720" tIns="27432" bIns="27432" anchor="ctr">
+            <a:spAutoFit/>
+          </a:bodyPr>
+          <a:lstStyle/>
+          <a:p>
+            <a:pPr>
+              <a:lnSpc>
+                <a:spcPct val="130000"/>
+              </a:lnSpc>
+            </a:pPr>
+            <a:r>
+              <a:rPr sz="1600" b="0">
+                <a:solidFill>
+                  <a:srgbClr val="CBD5E1"/>
+                </a:solidFill>
+                <a:latin typeface="Inter"/>
+              </a:rPr>
+              <a:t>Check what is and is not portable across backends.</a:t>
+            </a:r>
+          </a:p>
+        </p:txBody>
+      </p:sp>
+    </p:spTree>
+  </p:cSld>
+  <p:clrMapOvr>
+    <a:masterClrMapping/>
+  </p:clrMapOvr>
+</p:sld>
+</file>
+
+<file path=ppt/slides/slide38.xml><?xml version="1.0" encoding="utf-8"?>
+<p:sld xmlns:a="http://schemas.openxmlformats.org/drawingml/2006/main" xmlns:p="http://schemas.openxmlformats.org/presentationml/2006/main" xmlns:r="http://schemas.openxmlformats.org/officeDocument/2006/relationships">
+  <p:cSld>
+    <p:bg>
+      <p:bgPr>
+        <a:solidFill>
+          <a:srgbClr val="0A1628"/>
+        </a:solidFill>
+        <a:effectLst/>
+      </p:bgPr>
+    </p:bg>
+    <p:spTree>
+      <p:nvGrpSpPr>
+        <p:cNvPr id="1" name=""/>
+        <p:cNvGrpSpPr/>
+        <p:nvPr/>
+      </p:nvGrpSpPr>
+      <p:grpSpPr/>
+      <p:sp>
+        <p:nvSpPr>
+          <p:cNvPr id="2" name="TextBox 1"/>
+          <p:cNvSpPr txBox="1"/>
+          <p:nvPr/>
+        </p:nvSpPr>
+        <p:spPr>
+          <a:xfrm>
+            <a:off x="457200" y="6419088"/>
+            <a:ext cx="8686800" cy="320040"/>
+          </a:xfrm>
+          <a:prstGeom prst="rect">
+            <a:avLst/>
+          </a:prstGeom>
+          <a:noFill/>
+        </p:spPr>
+        <p:txBody>
+          <a:bodyPr wrap="square" lIns="45720" rIns="45720" tIns="27432" bIns="27432" anchor="t">
+            <a:spAutoFit/>
+          </a:bodyPr>
+          <a:lstStyle/>
+          <a:p>
+            <a:r>
+              <a:rPr sz="900" b="0">
+                <a:solidFill>
+                  <a:srgbClr val="64748B"/>
+                </a:solidFill>
+                <a:latin typeface="Inter"/>
+              </a:rPr>
+              <a:t>AI Agent Observability &amp; Cost Control · Section 12 · Lecture 12.6</a:t>
+            </a:r>
+          </a:p>
+        </p:txBody>
+      </p:sp>
+      <p:sp>
+        <p:nvSpPr>
+          <p:cNvPr id="3" name="TextBox 2"/>
+          <p:cNvSpPr txBox="1"/>
+          <p:nvPr/>
+        </p:nvSpPr>
+        <p:spPr>
+          <a:xfrm>
+            <a:off x="457200" y="411480"/>
+            <a:ext cx="11247120" cy="868680"/>
+          </a:xfrm>
+          <a:prstGeom prst="rect">
+            <a:avLst/>
+          </a:prstGeom>
+          <a:noFill/>
+        </p:spPr>
+        <p:txBody>
+          <a:bodyPr wrap="square" lIns="45720" rIns="45720" tIns="27432" bIns="27432" anchor="t">
+            <a:spAutoFit/>
+          </a:bodyPr>
+          <a:lstStyle/>
+          <a:p>
+            <a:pPr>
+              <a:lnSpc>
+                <a:spcPct val="110000"/>
+              </a:lnSpc>
+            </a:pPr>
+            <a:r>
+              <a:rPr sz="2600" b="1">
+                <a:solidFill>
+                  <a:srgbClr val="FFFFFF"/>
+                </a:solidFill>
+                <a:latin typeface="Inter"/>
+              </a:rPr>
+              <a:t>Quiz: Portability</a:t>
+            </a:r>
+          </a:p>
+        </p:txBody>
+      </p:sp>
+      <p:sp>
+        <p:nvSpPr>
+          <p:cNvPr id="4" name="Rectangle 3"/>
+          <p:cNvSpPr/>
+          <p:nvPr/>
+        </p:nvSpPr>
+        <p:spPr>
+          <a:xfrm>
+            <a:off x="502920" y="1024128"/>
+            <a:ext cx="822960" cy="54864"/>
+          </a:xfrm>
+          <a:prstGeom prst="rect">
+            <a:avLst/>
+          </a:prstGeom>
+          <a:solidFill>
+            <a:srgbClr val="00D4AA"/>
+          </a:solidFill>
+          <a:ln>
+            <a:noFill/>
+          </a:ln>
+          <a:effectLst/>
+        </p:spPr>
+        <p:style>
+          <a:lnRef idx="1">
+            <a:schemeClr val="accent1"/>
+          </a:lnRef>
+          <a:fillRef idx="3">
+            <a:schemeClr val="accent1"/>
+          </a:fillRef>
+          <a:effectRef idx="2">
+            <a:schemeClr val="accent1"/>
+          </a:effectRef>
+          <a:fontRef idx="minor">
+            <a:schemeClr val="lt1"/>
+          </a:fontRef>
+        </p:style>
+        <p:txBody>
+          <a:bodyPr rtlCol="0" anchor="ctr"/>
+          <a:lstStyle/>
+          <a:p/>
+        </p:txBody>
+      </p:sp>
+      <p:sp>
+        <p:nvSpPr>
           <p:cNvPr id="5" name="TextBox 4"/>
           <p:cNvSpPr txBox="1"/>
           <p:nvPr/>
@@ -13514,7 +16709,7 @@
 </p:sld>
 </file>
 
-<file path=ppt/slides/slide32.xml><?xml version="1.0" encoding="utf-8"?>
+<file path=ppt/slides/slide39.xml><?xml version="1.0" encoding="utf-8"?>
 <p:sld xmlns:a="http://schemas.openxmlformats.org/drawingml/2006/main" xmlns:p="http://schemas.openxmlformats.org/presentationml/2006/main" xmlns:r="http://schemas.openxmlformats.org/officeDocument/2006/relationships">
   <p:cSld>
     <p:bg>
@@ -15690,8 +18885,122 @@
         </p:nvSpPr>
         <p:spPr>
           <a:xfrm>
-            <a:off x="2377440" y="2286000"/>
-            <a:ext cx="1097280" cy="1097280"/>
+            <a:off x="1371600" y="822960"/>
+            <a:ext cx="9418320" cy="457200"/>
+          </a:xfrm>
+          <a:prstGeom prst="rect">
+            <a:avLst/>
+          </a:prstGeom>
+          <a:noFill/>
+        </p:spPr>
+        <p:txBody>
+          <a:bodyPr wrap="square" lIns="45720" rIns="45720" tIns="27432" bIns="27432" anchor="t">
+            <a:spAutoFit/>
+          </a:bodyPr>
+          <a:lstStyle/>
+          <a:p>
+            <a:pPr algn="ctr"/>
+            <a:r>
+              <a:rPr sz="1200" b="1">
+                <a:solidFill>
+                  <a:srgbClr val="00D4AA"/>
+                </a:solidFill>
+                <a:latin typeface="Inter"/>
+              </a:rPr>
+              <a:t>RECAP</a:t>
+            </a:r>
+          </a:p>
+        </p:txBody>
+      </p:sp>
+      <p:sp>
+        <p:nvSpPr>
+          <p:cNvPr id="4" name="TextBox 3"/>
+          <p:cNvSpPr txBox="1"/>
+          <p:nvPr/>
+        </p:nvSpPr>
+        <p:spPr>
+          <a:xfrm>
+            <a:off x="1371600" y="1234440"/>
+            <a:ext cx="9418320" cy="822960"/>
+          </a:xfrm>
+          <a:prstGeom prst="rect">
+            <a:avLst/>
+          </a:prstGeom>
+          <a:noFill/>
+        </p:spPr>
+        <p:txBody>
+          <a:bodyPr wrap="square" lIns="45720" rIns="45720" tIns="27432" bIns="27432" anchor="t">
+            <a:spAutoFit/>
+          </a:bodyPr>
+          <a:lstStyle/>
+          <a:p>
+            <a:pPr algn="ctr"/>
+            <a:r>
+              <a:rPr sz="2600" b="1">
+                <a:solidFill>
+                  <a:srgbClr val="FFFFFF"/>
+                </a:solidFill>
+                <a:latin typeface="Inter"/>
+              </a:rPr>
+              <a:t>Key takeaways</a:t>
+            </a:r>
+          </a:p>
+        </p:txBody>
+      </p:sp>
+      <p:sp>
+        <p:nvSpPr>
+          <p:cNvPr id="5" name="Rounded Rectangle 4"/>
+          <p:cNvSpPr/>
+          <p:nvPr/>
+        </p:nvSpPr>
+        <p:spPr>
+          <a:xfrm>
+            <a:off x="2011680" y="2514600"/>
+            <a:ext cx="8138160" cy="777240"/>
+          </a:xfrm>
+          <a:prstGeom prst="roundRect">
+            <a:avLst>
+              <a:gd name="adj" fmla="val 6588"/>
+            </a:avLst>
+          </a:prstGeom>
+          <a:solidFill>
+            <a:srgbClr val="1A2742"/>
+          </a:solidFill>
+          <a:ln>
+            <a:noFill/>
+          </a:ln>
+          <a:effectLst/>
+        </p:spPr>
+        <p:style>
+          <a:lnRef idx="1">
+            <a:schemeClr val="accent1"/>
+          </a:lnRef>
+          <a:fillRef idx="3">
+            <a:schemeClr val="accent1"/>
+          </a:fillRef>
+          <a:effectRef idx="2">
+            <a:schemeClr val="accent1"/>
+          </a:effectRef>
+          <a:fontRef idx="minor">
+            <a:schemeClr val="lt1"/>
+          </a:fontRef>
+        </p:style>
+        <p:txBody>
+          <a:bodyPr rtlCol="0" anchor="ctr"/>
+          <a:lstStyle/>
+          <a:p/>
+        </p:txBody>
+      </p:sp>
+      <p:sp>
+        <p:nvSpPr>
+          <p:cNvPr id="6" name="TextBox 5"/>
+          <p:cNvSpPr txBox="1"/>
+          <p:nvPr/>
+        </p:nvSpPr>
+        <p:spPr>
+          <a:xfrm>
+            <a:off x="2194560" y="2514600"/>
+            <a:ext cx="548640" cy="777240"/>
           </a:xfrm>
           <a:prstGeom prst="rect">
             <a:avLst/>
@@ -15705,27 +19014,27 @@
           <a:lstStyle/>
           <a:p>
             <a:r>
-              <a:rPr sz="5400" b="1">
+              <a:rPr sz="2200" b="1">
                 <a:solidFill>
                   <a:srgbClr val="00D4AA"/>
                 </a:solidFill>
                 <a:latin typeface="Inter"/>
               </a:rPr>
-              <a:t>→</a:t>
-            </a:r>
-          </a:p>
-        </p:txBody>
-      </p:sp>
-      <p:sp>
-        <p:nvSpPr>
-          <p:cNvPr id="4" name="TextBox 3"/>
+              <a:t>✓</a:t>
+            </a:r>
+          </a:p>
+        </p:txBody>
+      </p:sp>
+      <p:sp>
+        <p:nvSpPr>
+          <p:cNvPr id="7" name="TextBox 6"/>
           <p:cNvSpPr txBox="1"/>
           <p:nvPr/>
         </p:nvSpPr>
         <p:spPr>
           <a:xfrm>
-            <a:off x="3566160" y="2148840"/>
-            <a:ext cx="7315200" cy="457200"/>
+            <a:off x="2788920" y="2514600"/>
+            <a:ext cx="7223760" cy="777240"/>
           </a:xfrm>
           <a:prstGeom prst="rect">
             <a:avLst/>
@@ -15733,33 +19042,77 @@
           <a:noFill/>
         </p:spPr>
         <p:txBody>
-          <a:bodyPr wrap="square" lIns="45720" rIns="45720" tIns="27432" bIns="27432" anchor="t">
+          <a:bodyPr wrap="square" lIns="45720" rIns="45720" tIns="27432" bIns="27432" anchor="ctr">
             <a:spAutoFit/>
           </a:bodyPr>
           <a:lstStyle/>
           <a:p>
             <a:r>
-              <a:rPr sz="1400" b="0">
-                <a:solidFill>
-                  <a:srgbClr val="94A3B8"/>
-                </a:solidFill>
-                <a:latin typeface="Inter"/>
-              </a:rPr>
-              <a:t>Next up:</a:t>
-            </a:r>
-          </a:p>
-        </p:txBody>
-      </p:sp>
-      <p:sp>
-        <p:nvSpPr>
-          <p:cNvPr id="5" name="TextBox 4"/>
+              <a:rPr sz="1800" b="1">
+                <a:solidFill>
+                  <a:srgbClr val="FFFFFF"/>
+                </a:solidFill>
+                <a:latin typeface="Inter"/>
+              </a:rPr>
+              <a:t>Spans and GenAI attributes move over OTLP</a:t>
+            </a:r>
+          </a:p>
+        </p:txBody>
+      </p:sp>
+      <p:sp>
+        <p:nvSpPr>
+          <p:cNvPr id="8" name="Rounded Rectangle 7"/>
+          <p:cNvSpPr/>
+          <p:nvPr/>
+        </p:nvSpPr>
+        <p:spPr>
+          <a:xfrm>
+            <a:off x="2011680" y="3474720"/>
+            <a:ext cx="8138160" cy="777240"/>
+          </a:xfrm>
+          <a:prstGeom prst="roundRect">
+            <a:avLst>
+              <a:gd name="adj" fmla="val 6588"/>
+            </a:avLst>
+          </a:prstGeom>
+          <a:solidFill>
+            <a:srgbClr val="1A2742"/>
+          </a:solidFill>
+          <a:ln>
+            <a:noFill/>
+          </a:ln>
+          <a:effectLst/>
+        </p:spPr>
+        <p:style>
+          <a:lnRef idx="1">
+            <a:schemeClr val="accent1"/>
+          </a:lnRef>
+          <a:fillRef idx="3">
+            <a:schemeClr val="accent1"/>
+          </a:fillRef>
+          <a:effectRef idx="2">
+            <a:schemeClr val="accent1"/>
+          </a:effectRef>
+          <a:fontRef idx="minor">
+            <a:schemeClr val="lt1"/>
+          </a:fontRef>
+        </p:style>
+        <p:txBody>
+          <a:bodyPr rtlCol="0" anchor="ctr"/>
+          <a:lstStyle/>
+          <a:p/>
+        </p:txBody>
+      </p:sp>
+      <p:sp>
+        <p:nvSpPr>
+          <p:cNvPr id="9" name="TextBox 8"/>
           <p:cNvSpPr txBox="1"/>
           <p:nvPr/>
         </p:nvSpPr>
         <p:spPr>
           <a:xfrm>
-            <a:off x="3566160" y="2560320"/>
-            <a:ext cx="7315200" cy="1097280"/>
+            <a:off x="2194560" y="3474720"/>
+            <a:ext cx="548640" cy="777240"/>
           </a:xfrm>
           <a:prstGeom prst="rect">
             <a:avLst/>
@@ -15767,33 +19120,33 @@
           <a:noFill/>
         </p:spPr>
         <p:txBody>
-          <a:bodyPr wrap="square" lIns="45720" rIns="45720" tIns="27432" bIns="27432" anchor="t">
+          <a:bodyPr wrap="square" lIns="45720" rIns="45720" tIns="27432" bIns="27432" anchor="ctr">
             <a:spAutoFit/>
           </a:bodyPr>
           <a:lstStyle/>
           <a:p>
             <a:r>
-              <a:rPr sz="2600" b="1">
-                <a:solidFill>
-                  <a:srgbClr val="FFFFFF"/>
-                </a:solidFill>
-                <a:latin typeface="Inter"/>
-              </a:rPr>
-              <a:t>Code-along: same Atlas, traced to LangSmith</a:t>
-            </a:r>
-          </a:p>
-        </p:txBody>
-      </p:sp>
-      <p:sp>
-        <p:nvSpPr>
-          <p:cNvPr id="6" name="TextBox 5"/>
+              <a:rPr sz="2200" b="1">
+                <a:solidFill>
+                  <a:srgbClr val="00D4AA"/>
+                </a:solidFill>
+                <a:latin typeface="Inter"/>
+              </a:rPr>
+              <a:t>✓</a:t>
+            </a:r>
+          </a:p>
+        </p:txBody>
+      </p:sp>
+      <p:sp>
+        <p:nvSpPr>
+          <p:cNvPr id="10" name="TextBox 9"/>
           <p:cNvSpPr txBox="1"/>
           <p:nvPr/>
         </p:nvSpPr>
         <p:spPr>
           <a:xfrm>
-            <a:off x="3566160" y="3703320"/>
-            <a:ext cx="7315200" cy="1097280"/>
+            <a:off x="2788920" y="3474720"/>
+            <a:ext cx="7223760" cy="777240"/>
           </a:xfrm>
           <a:prstGeom prst="rect">
             <a:avLst/>
@@ -15801,55 +19154,131 @@
           <a:noFill/>
         </p:spPr>
         <p:txBody>
-          <a:bodyPr wrap="square" lIns="45720" rIns="45720" tIns="27432" bIns="27432" anchor="t">
+          <a:bodyPr wrap="square" lIns="45720" rIns="45720" tIns="27432" bIns="27432" anchor="ctr">
             <a:spAutoFit/>
           </a:bodyPr>
           <a:lstStyle/>
           <a:p>
             <a:r>
-              <a:rPr sz="1400" b="0">
-                <a:solidFill>
-                  <a:srgbClr val="94A3B8"/>
-                </a:solidFill>
-                <a:latin typeface="Inter"/>
-              </a:rPr>
-              <a:t>Next, the same Atlas traced to LangSmith with </a:t>
-            </a:r>
-            <a:r>
-              <a:rPr sz="1288" b="0">
+              <a:rPr sz="1800" b="1">
+                <a:solidFill>
+                  <a:srgbClr val="FFFFFF"/>
+                </a:solidFill>
+                <a:latin typeface="Inter"/>
+              </a:rPr>
+              <a:t>Scores, prompts, datasets, dashboards stay behind</a:t>
+            </a:r>
+          </a:p>
+        </p:txBody>
+      </p:sp>
+      <p:sp>
+        <p:nvSpPr>
+          <p:cNvPr id="11" name="Rounded Rectangle 10"/>
+          <p:cNvSpPr/>
+          <p:nvPr/>
+        </p:nvSpPr>
+        <p:spPr>
+          <a:xfrm>
+            <a:off x="2011680" y="4434840"/>
+            <a:ext cx="8138160" cy="777240"/>
+          </a:xfrm>
+          <a:prstGeom prst="roundRect">
+            <a:avLst>
+              <a:gd name="adj" fmla="val 6588"/>
+            </a:avLst>
+          </a:prstGeom>
+          <a:solidFill>
+            <a:srgbClr val="1A2742"/>
+          </a:solidFill>
+          <a:ln>
+            <a:noFill/>
+          </a:ln>
+          <a:effectLst/>
+        </p:spPr>
+        <p:style>
+          <a:lnRef idx="1">
+            <a:schemeClr val="accent1"/>
+          </a:lnRef>
+          <a:fillRef idx="3">
+            <a:schemeClr val="accent1"/>
+          </a:fillRef>
+          <a:effectRef idx="2">
+            <a:schemeClr val="accent1"/>
+          </a:effectRef>
+          <a:fontRef idx="minor">
+            <a:schemeClr val="lt1"/>
+          </a:fontRef>
+        </p:style>
+        <p:txBody>
+          <a:bodyPr rtlCol="0" anchor="ctr"/>
+          <a:lstStyle/>
+          <a:p/>
+        </p:txBody>
+      </p:sp>
+      <p:sp>
+        <p:nvSpPr>
+          <p:cNvPr id="12" name="TextBox 11"/>
+          <p:cNvSpPr txBox="1"/>
+          <p:nvPr/>
+        </p:nvSpPr>
+        <p:spPr>
+          <a:xfrm>
+            <a:off x="2194560" y="4434840"/>
+            <a:ext cx="548640" cy="777240"/>
+          </a:xfrm>
+          <a:prstGeom prst="rect">
+            <a:avLst/>
+          </a:prstGeom>
+          <a:noFill/>
+        </p:spPr>
+        <p:txBody>
+          <a:bodyPr wrap="square" lIns="45720" rIns="45720" tIns="27432" bIns="27432" anchor="ctr">
+            <a:spAutoFit/>
+          </a:bodyPr>
+          <a:lstStyle/>
+          <a:p>
+            <a:r>
+              <a:rPr sz="2200" b="1">
                 <a:solidFill>
                   <a:srgbClr val="00D4AA"/>
                 </a:solidFill>
-                <a:latin typeface="JetBrains Mono"/>
-              </a:rPr>
-              <a:t>traceable</a:t>
-            </a:r>
-            <a:r>
-              <a:rPr sz="1400" b="0">
-                <a:solidFill>
-                  <a:srgbClr val="94A3B8"/>
-                </a:solidFill>
-                <a:latin typeface="Inter"/>
-              </a:rPr>
-              <a:t> and </a:t>
-            </a:r>
-            <a:r>
-              <a:rPr sz="1288" b="0">
-                <a:solidFill>
-                  <a:srgbClr val="00D4AA"/>
-                </a:solidFill>
-                <a:latin typeface="JetBrains Mono"/>
-              </a:rPr>
-              <a:t>wrap_openai</a:t>
-            </a:r>
-            <a:r>
-              <a:rPr sz="1400" b="0">
-                <a:solidFill>
-                  <a:srgbClr val="94A3B8"/>
-                </a:solidFill>
-                <a:latin typeface="Inter"/>
-              </a:rPr>
-              <a:t>, and what changes when you get there.</a:t>
+                <a:latin typeface="Inter"/>
+              </a:rPr>
+              <a:t>✓</a:t>
+            </a:r>
+          </a:p>
+        </p:txBody>
+      </p:sp>
+      <p:sp>
+        <p:nvSpPr>
+          <p:cNvPr id="13" name="TextBox 12"/>
+          <p:cNvSpPr txBox="1"/>
+          <p:nvPr/>
+        </p:nvSpPr>
+        <p:spPr>
+          <a:xfrm>
+            <a:off x="2788920" y="4434840"/>
+            <a:ext cx="7223760" cy="777240"/>
+          </a:xfrm>
+          <a:prstGeom prst="rect">
+            <a:avLst/>
+          </a:prstGeom>
+          <a:noFill/>
+        </p:spPr>
+        <p:txBody>
+          <a:bodyPr wrap="square" lIns="45720" rIns="45720" tIns="27432" bIns="27432" anchor="ctr">
+            <a:spAutoFit/>
+          </a:bodyPr>
+          <a:lstStyle/>
+          <a:p>
+            <a:r>
+              <a:rPr sz="1800" b="1">
+                <a:solidFill>
+                  <a:srgbClr val="FFFFFF"/>
+                </a:solidFill>
+                <a:latin typeface="Inter"/>
+              </a:rPr>
+              <a:t>Four files import the vendor module</a:t>
             </a:r>
           </a:p>
         </p:txBody>
@@ -15909,7 +19338,7 @@
                 </a:solidFill>
                 <a:latin typeface="Inter"/>
               </a:rPr>
-              <a:t>AI Agent Observability &amp; Cost Control · Section 12 · Lecture 12.2</a:t>
+              <a:t>AI Agent Observability &amp; Cost Control · Section 12 · Lecture 12.1</a:t>
             </a:r>
           </a:p>
         </p:txBody>
@@ -15922,8 +19351,42 @@
         </p:nvSpPr>
         <p:spPr>
           <a:xfrm>
-            <a:off x="6675120" y="320040"/>
-            <a:ext cx="5074920" cy="548640"/>
+            <a:off x="2377440" y="2286000"/>
+            <a:ext cx="1097280" cy="1097280"/>
+          </a:xfrm>
+          <a:prstGeom prst="rect">
+            <a:avLst/>
+          </a:prstGeom>
+          <a:noFill/>
+        </p:spPr>
+        <p:txBody>
+          <a:bodyPr wrap="square" lIns="45720" rIns="45720" tIns="27432" bIns="27432" anchor="ctr">
+            <a:spAutoFit/>
+          </a:bodyPr>
+          <a:lstStyle/>
+          <a:p>
+            <a:r>
+              <a:rPr sz="5400" b="1">
+                <a:solidFill>
+                  <a:srgbClr val="00D4AA"/>
+                </a:solidFill>
+                <a:latin typeface="Inter"/>
+              </a:rPr>
+              <a:t>→</a:t>
+            </a:r>
+          </a:p>
+        </p:txBody>
+      </p:sp>
+      <p:sp>
+        <p:nvSpPr>
+          <p:cNvPr id="4" name="TextBox 3"/>
+          <p:cNvSpPr txBox="1"/>
+          <p:nvPr/>
+        </p:nvSpPr>
+        <p:spPr>
+          <a:xfrm>
+            <a:off x="3566160" y="2148840"/>
+            <a:ext cx="7315200" cy="457200"/>
           </a:xfrm>
           <a:prstGeom prst="rect">
             <a:avLst/>
@@ -15936,29 +19399,28 @@
           </a:bodyPr>
           <a:lstStyle/>
           <a:p>
-            <a:pPr algn="r"/>
-            <a:r>
-              <a:rPr sz="1000" b="0">
+            <a:r>
+              <a:rPr sz="1400" b="0">
                 <a:solidFill>
                   <a:srgbClr val="94A3B8"/>
                 </a:solidFill>
                 <a:latin typeface="Inter"/>
               </a:rPr>
-              <a:t>SECTION 12 · PORTABILITY AND ALTERNATIVES</a:t>
-            </a:r>
-          </a:p>
-        </p:txBody>
-      </p:sp>
-      <p:sp>
-        <p:nvSpPr>
-          <p:cNvPr id="4" name="TextBox 3"/>
+              <a:t>Next up:</a:t>
+            </a:r>
+          </a:p>
+        </p:txBody>
+      </p:sp>
+      <p:sp>
+        <p:nvSpPr>
+          <p:cNvPr id="5" name="TextBox 4"/>
           <p:cNvSpPr txBox="1"/>
           <p:nvPr/>
         </p:nvSpPr>
         <p:spPr>
           <a:xfrm>
-            <a:off x="914400" y="1417320"/>
-            <a:ext cx="10332720" cy="457200"/>
+            <a:off x="3566160" y="2560320"/>
+            <a:ext cx="7315200" cy="1097280"/>
           </a:xfrm>
           <a:prstGeom prst="rect">
             <a:avLst/>
@@ -15972,27 +19434,27 @@
           <a:lstStyle/>
           <a:p>
             <a:r>
-              <a:rPr sz="1200" b="1">
-                <a:solidFill>
-                  <a:srgbClr val="00D4AA"/>
-                </a:solidFill>
-                <a:latin typeface="Inter"/>
-              </a:rPr>
-              <a:t>LECTURE 12.2</a:t>
-            </a:r>
-          </a:p>
-        </p:txBody>
-      </p:sp>
-      <p:sp>
-        <p:nvSpPr>
-          <p:cNvPr id="5" name="TextBox 4"/>
+              <a:rPr sz="2600" b="1">
+                <a:solidFill>
+                  <a:srgbClr val="FFFFFF"/>
+                </a:solidFill>
+                <a:latin typeface="Inter"/>
+              </a:rPr>
+              <a:t>Code-along: same Atlas, traced to LangSmith</a:t>
+            </a:r>
+          </a:p>
+        </p:txBody>
+      </p:sp>
+      <p:sp>
+        <p:nvSpPr>
+          <p:cNvPr id="6" name="TextBox 5"/>
           <p:cNvSpPr txBox="1"/>
           <p:nvPr/>
         </p:nvSpPr>
         <p:spPr>
           <a:xfrm>
-            <a:off x="914400" y="1874519"/>
-            <a:ext cx="10332720" cy="1645920"/>
+            <a:off x="3566160" y="3703320"/>
+            <a:ext cx="7315200" cy="1097280"/>
           </a:xfrm>
           <a:prstGeom prst="rect">
             <a:avLst/>
@@ -16005,121 +19467,35 @@
           </a:bodyPr>
           <a:lstStyle/>
           <a:p>
-            <a:pPr>
-              <a:lnSpc>
-                <a:spcPct val="110000"/>
-              </a:lnSpc>
-            </a:pPr>
-            <a:r>
-              <a:rPr sz="3000" b="1">
-                <a:solidFill>
-                  <a:srgbClr val="FFFFFF"/>
-                </a:solidFill>
-                <a:latin typeface="Inter"/>
-              </a:rPr>
-              <a:t>Code-along: same Atlas, traced to LangSmith</a:t>
-            </a:r>
-          </a:p>
-        </p:txBody>
-      </p:sp>
-      <p:sp>
-        <p:nvSpPr>
-          <p:cNvPr id="6" name="Rectangle 5"/>
-          <p:cNvSpPr/>
-          <p:nvPr/>
-        </p:nvSpPr>
-        <p:spPr>
-          <a:xfrm>
-            <a:off x="914400" y="3794760"/>
-            <a:ext cx="64008" cy="1143000"/>
-          </a:xfrm>
-          <a:prstGeom prst="rect">
-            <a:avLst/>
-          </a:prstGeom>
-          <a:solidFill>
-            <a:srgbClr val="00D4AA"/>
-          </a:solidFill>
-          <a:ln>
-            <a:noFill/>
-          </a:ln>
-          <a:effectLst/>
-        </p:spPr>
-        <p:style>
-          <a:lnRef idx="1">
-            <a:schemeClr val="accent1"/>
-          </a:lnRef>
-          <a:fillRef idx="3">
-            <a:schemeClr val="accent1"/>
-          </a:fillRef>
-          <a:effectRef idx="2">
-            <a:schemeClr val="accent1"/>
-          </a:effectRef>
-          <a:fontRef idx="minor">
-            <a:schemeClr val="lt1"/>
-          </a:fontRef>
-        </p:style>
-        <p:txBody>
-          <a:bodyPr rtlCol="0" anchor="ctr"/>
-          <a:lstStyle/>
-          <a:p/>
-        </p:txBody>
-      </p:sp>
-      <p:sp>
-        <p:nvSpPr>
-          <p:cNvPr id="7" name="TextBox 6"/>
-          <p:cNvSpPr txBox="1"/>
-          <p:nvPr/>
-        </p:nvSpPr>
-        <p:spPr>
-          <a:xfrm>
-            <a:off x="1188720" y="3749039"/>
-            <a:ext cx="9692640" cy="1280160"/>
-          </a:xfrm>
-          <a:prstGeom prst="rect">
-            <a:avLst/>
-          </a:prstGeom>
-          <a:noFill/>
-        </p:spPr>
-        <p:txBody>
-          <a:bodyPr wrap="square" lIns="45720" rIns="45720" tIns="27432" bIns="27432" anchor="ctr">
-            <a:spAutoFit/>
-          </a:bodyPr>
-          <a:lstStyle/>
-          <a:p>
-            <a:pPr>
-              <a:lnSpc>
-                <a:spcPct val="130000"/>
-              </a:lnSpc>
-            </a:pPr>
-            <a:r>
-              <a:rPr sz="1600" b="0">
-                <a:solidFill>
-                  <a:srgbClr val="CBD5E1"/>
-                </a:solidFill>
-                <a:latin typeface="Inter"/>
-              </a:rPr>
-              <a:t>Trace Atlas to LangSmith with </a:t>
-            </a:r>
-            <a:r>
-              <a:rPr sz="1472" b="0">
+            <a:r>
+              <a:rPr sz="1400" b="0">
+                <a:solidFill>
+                  <a:srgbClr val="94A3B8"/>
+                </a:solidFill>
+                <a:latin typeface="Inter"/>
+              </a:rPr>
+              <a:t>Next, the same Atlas traced to LangSmith with </a:t>
+            </a:r>
+            <a:r>
+              <a:rPr sz="1288" b="0">
                 <a:solidFill>
                   <a:srgbClr val="00D4AA"/>
                 </a:solidFill>
                 <a:latin typeface="JetBrains Mono"/>
               </a:rPr>
-              <a:t>@traceable</a:t>
-            </a:r>
-            <a:r>
-              <a:rPr sz="1600" b="0">
-                <a:solidFill>
-                  <a:srgbClr val="CBD5E1"/>
-                </a:solidFill>
-                <a:latin typeface="Inter"/>
-              </a:rPr>
-              <a:t> run types and </a:t>
-            </a:r>
-            <a:r>
-              <a:rPr sz="1472" b="0">
+              <a:t>traceable</a:t>
+            </a:r>
+            <a:r>
+              <a:rPr sz="1400" b="0">
+                <a:solidFill>
+                  <a:srgbClr val="94A3B8"/>
+                </a:solidFill>
+                <a:latin typeface="Inter"/>
+              </a:rPr>
+              <a:t> and </a:t>
+            </a:r>
+            <a:r>
+              <a:rPr sz="1288" b="0">
                 <a:solidFill>
                   <a:srgbClr val="00D4AA"/>
                 </a:solidFill>
@@ -16128,13 +19504,13 @@
               <a:t>wrap_openai</a:t>
             </a:r>
             <a:r>
-              <a:rPr sz="1600" b="0">
-                <a:solidFill>
-                  <a:srgbClr val="CBD5E1"/>
-                </a:solidFill>
-                <a:latin typeface="Inter"/>
-              </a:rPr>
-              <a:t>, with tenant and session metadata.</a:t>
+              <a:rPr sz="1400" b="0">
+                <a:solidFill>
+                  <a:srgbClr val="94A3B8"/>
+                </a:solidFill>
+                <a:latin typeface="Inter"/>
+              </a:rPr>
+              <a:t>, and what changes when you get there.</a:t>
             </a:r>
           </a:p>
         </p:txBody>
